--- a/resources/github-copilot-workshop.pptx
+++ b/resources/github-copilot-workshop.pptx
@@ -5,23 +5,17 @@
     <p:sldMasterId id="2147483660" r:id="rId4"/>
   </p:sldMasterIdLst>
   <p:notesMasterIdLst>
-    <p:notesMasterId r:id="rId12"/>
+    <p:notesMasterId r:id="rId13"/>
   </p:notesMasterIdLst>
   <p:sldIdLst>
-    <p:sldId id="651" r:id="rId10"/>
-    <p:sldId id="652" r:id="rId17"/>
-    <p:sldId id="653" r:id="rId18"/>
-    <p:sldId id="654" r:id="rId19"/>
-    <p:sldId id="655" r:id="rId20"/>
-    <p:sldId id="656" r:id="rId21"/>
-    <p:sldId id="657" r:id="rId22"/>
-    <p:sldId id="658" r:id="rId23"/>
-    <p:sldId id="659" r:id="rId24"/>
-    <p:sldId id="660" r:id="rId25"/>
-    <p:sldId id="661" r:id="rId26"/>
-    <p:sldId id="662" r:id="rId27"/>
-    <p:sldId id="663" r:id="rId28"/>
-    <p:sldId id="582" r:id="rId11"/>
+    <p:sldId id="651" r:id="rId5"/>
+    <p:sldId id="652" r:id="rId6"/>
+    <p:sldId id="653" r:id="rId7"/>
+    <p:sldId id="657" r:id="rId8"/>
+    <p:sldId id="658" r:id="rId9"/>
+    <p:sldId id="659" r:id="rId10"/>
+    <p:sldId id="660" r:id="rId11"/>
+    <p:sldId id="582" r:id="rId12"/>
   </p:sldIdLst>
   <p:sldSz cx="12188825" cy="6858000"/>
   <p:notesSz cx="6858000" cy="9144000"/>
@@ -616,7 +610,1707 @@
 </p:notes>
 </file>
 
+<file path=ppt/slideLayouts/slideLayout1.xml><?xml version="1.0" encoding="utf-8"?>
+<p:sldLayout xmlns:a="http://schemas.openxmlformats.org/drawingml/2006/main" xmlns:r="http://schemas.openxmlformats.org/officeDocument/2006/relationships" xmlns:p="http://schemas.openxmlformats.org/presentationml/2006/main" preserve="1" userDrawn="1">
+  <p:cSld name="Agenda">
+    <p:bg>
+      <p:bgPr>
+        <a:solidFill>
+          <a:srgbClr val="101411"/>
+        </a:solidFill>
+        <a:effectLst/>
+      </p:bgPr>
+    </p:bg>
+    <p:spTree>
+      <p:nvGrpSpPr>
+        <p:cNvPr id="1" name=""/>
+        <p:cNvGrpSpPr/>
+        <p:nvPr/>
+      </p:nvGrpSpPr>
+      <p:grpSpPr>
+        <a:xfrm>
+          <a:off x="0" y="0"/>
+          <a:ext cx="0" cy="0"/>
+          <a:chOff x="0" y="0"/>
+          <a:chExt cx="0" cy="0"/>
+        </a:xfrm>
+      </p:grpSpPr>
+      <p:sp>
+        <p:nvSpPr>
+          <p:cNvPr id="2" name="Text Placeholder 2">
+            <a:extLst>
+              <a:ext uri="{FF2B5EF4-FFF2-40B4-BE49-F238E27FC236}">
+                <a16:creationId xmlns:a16="http://schemas.microsoft.com/office/drawing/2014/main" id="{93A06B34-F03E-5DC7-2F93-8740C8F86415}"/>
+              </a:ext>
+            </a:extLst>
+          </p:cNvPr>
+          <p:cNvSpPr>
+            <a:spLocks noGrp="1"/>
+          </p:cNvSpPr>
+          <p:nvPr>
+            <p:ph type="body" sz="quarter" idx="11" hasCustomPrompt="1"/>
+          </p:nvPr>
+        </p:nvSpPr>
+        <p:spPr>
+          <a:xfrm>
+            <a:off x="4404700" y="318247"/>
+            <a:ext cx="726126" cy="5804124"/>
+          </a:xfrm>
+          <a:prstGeom prst="rect">
+            <a:avLst/>
+          </a:prstGeom>
+        </p:spPr>
+        <p:txBody>
+          <a:bodyPr/>
+          <a:lstStyle>
+            <a:lvl1pPr>
+              <a:defRPr sz="2799" b="0" i="0">
+                <a:solidFill>
+                  <a:schemeClr val="bg2"/>
+                </a:solidFill>
+                <a:latin typeface="Mona Sans Display" pitchFamily="2" charset="77"/>
+                <a:cs typeface="Mona Sans Display" pitchFamily="2" charset="77"/>
+              </a:defRPr>
+            </a:lvl1pPr>
+          </a:lstStyle>
+          <a:p>
+            <a:pPr lvl="0"/>
+            <a:r>
+              <a:rPr lang="en-US" dirty="0"/>
+              <a:t>01</a:t>
+            </a:r>
+          </a:p>
+          <a:p>
+            <a:pPr lvl="0"/>
+            <a:r>
+              <a:rPr lang="en-US" dirty="0"/>
+              <a:t>02</a:t>
+            </a:r>
+          </a:p>
+          <a:p>
+            <a:pPr lvl="0"/>
+            <a:r>
+              <a:rPr lang="en-US" dirty="0"/>
+              <a:t>03</a:t>
+            </a:r>
+          </a:p>
+          <a:p>
+            <a:pPr lvl="0"/>
+            <a:r>
+              <a:rPr lang="en-US" dirty="0"/>
+              <a:t>04</a:t>
+            </a:r>
+          </a:p>
+          <a:p>
+            <a:pPr lvl="0"/>
+            <a:r>
+              <a:rPr lang="en-US" dirty="0"/>
+              <a:t>05</a:t>
+            </a:r>
+          </a:p>
+          <a:p>
+            <a:pPr lvl="0"/>
+            <a:r>
+              <a:rPr lang="en-US" dirty="0"/>
+              <a:t>06</a:t>
+            </a:r>
+          </a:p>
+          <a:p>
+            <a:pPr lvl="0"/>
+            <a:r>
+              <a:rPr lang="en-US" dirty="0"/>
+              <a:t>07</a:t>
+            </a:r>
+          </a:p>
+          <a:p>
+            <a:pPr lvl="0"/>
+            <a:r>
+              <a:rPr lang="en-US" dirty="0"/>
+              <a:t>08</a:t>
+            </a:r>
+          </a:p>
+          <a:p>
+            <a:pPr lvl="0"/>
+            <a:r>
+              <a:rPr lang="en-US" dirty="0"/>
+              <a:t>09</a:t>
+            </a:r>
+          </a:p>
+        </p:txBody>
+      </p:sp>
+      <p:sp>
+        <p:nvSpPr>
+          <p:cNvPr id="3" name="Text Placeholder 2">
+            <a:extLst>
+              <a:ext uri="{FF2B5EF4-FFF2-40B4-BE49-F238E27FC236}">
+                <a16:creationId xmlns:a16="http://schemas.microsoft.com/office/drawing/2014/main" id="{00329222-7B60-0287-B5CD-B9A22C449836}"/>
+              </a:ext>
+            </a:extLst>
+          </p:cNvPr>
+          <p:cNvSpPr>
+            <a:spLocks noGrp="1"/>
+          </p:cNvSpPr>
+          <p:nvPr>
+            <p:ph type="body" sz="quarter" idx="12" hasCustomPrompt="1"/>
+          </p:nvPr>
+        </p:nvSpPr>
+        <p:spPr>
+          <a:xfrm>
+            <a:off x="5130826" y="318247"/>
+            <a:ext cx="6650234" cy="5804124"/>
+          </a:xfrm>
+          <a:prstGeom prst="rect">
+            <a:avLst/>
+          </a:prstGeom>
+        </p:spPr>
+        <p:txBody>
+          <a:bodyPr/>
+          <a:lstStyle>
+            <a:lvl1pPr marL="0" marR="0" indent="0" algn="l" defTabSz="914034" rtl="0" eaLnBrk="1" fontAlgn="auto" latinLnBrk="0" hangingPunct="1">
+              <a:lnSpc>
+                <a:spcPct val="90000"/>
+              </a:lnSpc>
+              <a:spcBef>
+                <a:spcPts val="1000"/>
+              </a:spcBef>
+              <a:spcAft>
+                <a:spcPts val="0"/>
+              </a:spcAft>
+              <a:buClrTx/>
+              <a:buSzTx/>
+              <a:buFont typeface="Arial" panose="020B0604020202020204" pitchFamily="34" charset="0"/>
+              <a:buNone/>
+              <a:tabLst/>
+              <a:defRPr sz="2799" b="0" i="0">
+                <a:solidFill>
+                  <a:schemeClr val="tx1"/>
+                </a:solidFill>
+                <a:latin typeface="Mona Sans Display" pitchFamily="2" charset="77"/>
+                <a:cs typeface="Mona Sans Display" pitchFamily="2" charset="77"/>
+              </a:defRPr>
+            </a:lvl1pPr>
+          </a:lstStyle>
+          <a:p>
+            <a:pPr lvl="0"/>
+            <a:r>
+              <a:rPr lang="en-US" dirty="0"/>
+              <a:t>Section title</a:t>
+            </a:r>
+          </a:p>
+          <a:p>
+            <a:pPr lvl="0"/>
+            <a:r>
+              <a:rPr lang="en-US" dirty="0"/>
+              <a:t>Section title </a:t>
+            </a:r>
+          </a:p>
+          <a:p>
+            <a:pPr lvl="0"/>
+            <a:r>
+              <a:rPr lang="en-US" dirty="0"/>
+              <a:t>Section title</a:t>
+            </a:r>
+          </a:p>
+          <a:p>
+            <a:pPr lvl="0"/>
+            <a:r>
+              <a:rPr lang="en-US" dirty="0"/>
+              <a:t>Section title</a:t>
+            </a:r>
+          </a:p>
+          <a:p>
+            <a:pPr lvl="0"/>
+            <a:r>
+              <a:rPr lang="en-US" dirty="0"/>
+              <a:t>Section title</a:t>
+            </a:r>
+          </a:p>
+          <a:p>
+            <a:pPr marL="0" marR="0" lvl="0" indent="0" algn="l" defTabSz="914034" rtl="0" eaLnBrk="1" fontAlgn="auto" latinLnBrk="0" hangingPunct="1">
+              <a:lnSpc>
+                <a:spcPct val="90000"/>
+              </a:lnSpc>
+              <a:spcBef>
+                <a:spcPts val="1000"/>
+              </a:spcBef>
+              <a:spcAft>
+                <a:spcPts val="0"/>
+              </a:spcAft>
+              <a:buClrTx/>
+              <a:buSzTx/>
+              <a:buFont typeface="Arial" panose="020B0604020202020204" pitchFamily="34" charset="0"/>
+              <a:buNone/>
+              <a:tabLst/>
+              <a:defRPr/>
+            </a:pPr>
+            <a:r>
+              <a:rPr lang="en-US" dirty="0"/>
+              <a:t>Section title </a:t>
+            </a:r>
+          </a:p>
+          <a:p>
+            <a:pPr marL="0" marR="0" lvl="0" indent="0" algn="l" defTabSz="914034" rtl="0" eaLnBrk="1" fontAlgn="auto" latinLnBrk="0" hangingPunct="1">
+              <a:lnSpc>
+                <a:spcPct val="90000"/>
+              </a:lnSpc>
+              <a:spcBef>
+                <a:spcPts val="1000"/>
+              </a:spcBef>
+              <a:spcAft>
+                <a:spcPts val="0"/>
+              </a:spcAft>
+              <a:buClrTx/>
+              <a:buSzTx/>
+              <a:buFont typeface="Arial" panose="020B0604020202020204" pitchFamily="34" charset="0"/>
+              <a:buNone/>
+              <a:tabLst/>
+              <a:defRPr/>
+            </a:pPr>
+            <a:r>
+              <a:rPr lang="en-US" dirty="0"/>
+              <a:t>Section title </a:t>
+            </a:r>
+          </a:p>
+          <a:p>
+            <a:pPr marL="0" marR="0" lvl="0" indent="0" algn="l" defTabSz="914034" rtl="0" eaLnBrk="1" fontAlgn="auto" latinLnBrk="0" hangingPunct="1">
+              <a:lnSpc>
+                <a:spcPct val="90000"/>
+              </a:lnSpc>
+              <a:spcBef>
+                <a:spcPts val="1000"/>
+              </a:spcBef>
+              <a:spcAft>
+                <a:spcPts val="0"/>
+              </a:spcAft>
+              <a:buClrTx/>
+              <a:buSzTx/>
+              <a:buFont typeface="Arial" panose="020B0604020202020204" pitchFamily="34" charset="0"/>
+              <a:buNone/>
+              <a:tabLst/>
+              <a:defRPr/>
+            </a:pPr>
+            <a:r>
+              <a:rPr lang="en-US" dirty="0"/>
+              <a:t>Section title</a:t>
+            </a:r>
+          </a:p>
+          <a:p>
+            <a:pPr marL="0" marR="0" lvl="0" indent="0" algn="l" defTabSz="914034" rtl="0" eaLnBrk="1" fontAlgn="auto" latinLnBrk="0" hangingPunct="1">
+              <a:lnSpc>
+                <a:spcPct val="90000"/>
+              </a:lnSpc>
+              <a:spcBef>
+                <a:spcPts val="1000"/>
+              </a:spcBef>
+              <a:spcAft>
+                <a:spcPts val="0"/>
+              </a:spcAft>
+              <a:buClrTx/>
+              <a:buSzTx/>
+              <a:buFont typeface="Arial" panose="020B0604020202020204" pitchFamily="34" charset="0"/>
+              <a:buNone/>
+              <a:tabLst/>
+              <a:defRPr/>
+            </a:pPr>
+            <a:r>
+              <a:rPr lang="en-US" dirty="0"/>
+              <a:t>Section title  </a:t>
+            </a:r>
+          </a:p>
+          <a:p>
+            <a:pPr lvl="0"/>
+            <a:endParaRPr lang="en-US" dirty="0"/>
+          </a:p>
+        </p:txBody>
+      </p:sp>
+      <p:sp>
+        <p:nvSpPr>
+          <p:cNvPr id="7" name="Rectangle 6">
+            <a:extLst>
+              <a:ext uri="{FF2B5EF4-FFF2-40B4-BE49-F238E27FC236}">
+                <a16:creationId xmlns:a16="http://schemas.microsoft.com/office/drawing/2014/main" id="{661974D1-2B3B-9B4D-272E-11CF159EBA96}"/>
+              </a:ext>
+            </a:extLst>
+          </p:cNvPr>
+          <p:cNvSpPr/>
+          <p:nvPr userDrawn="1"/>
+        </p:nvSpPr>
+        <p:spPr>
+          <a:xfrm>
+            <a:off x="4075384" y="-2"/>
+            <a:ext cx="9144" cy="6455440"/>
+          </a:xfrm>
+          <a:prstGeom prst="rect">
+            <a:avLst/>
+          </a:prstGeom>
+          <a:solidFill>
+            <a:srgbClr val="909692"/>
+          </a:solidFill>
+          <a:ln>
+            <a:noFill/>
+          </a:ln>
+        </p:spPr>
+        <p:style>
+          <a:lnRef idx="2">
+            <a:schemeClr val="accent1">
+              <a:shade val="15000"/>
+            </a:schemeClr>
+          </a:lnRef>
+          <a:fillRef idx="1">
+            <a:schemeClr val="accent1"/>
+          </a:fillRef>
+          <a:effectRef idx="0">
+            <a:schemeClr val="accent1"/>
+          </a:effectRef>
+          <a:fontRef idx="minor">
+            <a:schemeClr val="lt1"/>
+          </a:fontRef>
+        </p:style>
+        <p:txBody>
+          <a:bodyPr rtlCol="0" anchor="ctr"/>
+          <a:lstStyle/>
+          <a:p>
+            <a:pPr algn="ctr"/>
+            <a:endParaRPr lang="en-US"/>
+          </a:p>
+        </p:txBody>
+      </p:sp>
+      <p:sp>
+        <p:nvSpPr>
+          <p:cNvPr id="16" name="TextBox 15">
+            <a:extLst>
+              <a:ext uri="{FF2B5EF4-FFF2-40B4-BE49-F238E27FC236}">
+                <a16:creationId xmlns:a16="http://schemas.microsoft.com/office/drawing/2014/main" id="{8F169222-62F0-2EFF-01A8-8D6A3B1B695C}"/>
+              </a:ext>
+            </a:extLst>
+          </p:cNvPr>
+          <p:cNvSpPr txBox="1"/>
+          <p:nvPr userDrawn="1"/>
+        </p:nvSpPr>
+        <p:spPr>
+          <a:xfrm>
+            <a:off x="407766" y="318247"/>
+            <a:ext cx="3250890" cy="1996572"/>
+          </a:xfrm>
+          <a:prstGeom prst="rect">
+            <a:avLst/>
+          </a:prstGeom>
+          <a:noFill/>
+        </p:spPr>
+        <p:txBody>
+          <a:bodyPr wrap="none" lIns="0" tIns="0" rIns="0" bIns="0" rtlCol="0">
+            <a:spAutoFit/>
+          </a:bodyPr>
+          <a:lstStyle/>
+          <a:p>
+            <a:pPr>
+              <a:lnSpc>
+                <a:spcPct val="90000"/>
+              </a:lnSpc>
+            </a:pPr>
+            <a:r>
+              <a:rPr lang="en-US" sz="6000" spc="0" dirty="0">
+                <a:latin typeface="Mona Sans Display" pitchFamily="2" charset="77"/>
+                <a:cs typeface="Mona Sans Display" pitchFamily="2" charset="77"/>
+              </a:rPr>
+              <a:t>Session</a:t>
+            </a:r>
+            <a:br>
+              <a:rPr lang="en-US" sz="6000" spc="0" dirty="0">
+                <a:latin typeface="Mona Sans Display" pitchFamily="2" charset="77"/>
+                <a:cs typeface="Mona Sans Display" pitchFamily="2" charset="77"/>
+              </a:rPr>
+            </a:br>
+            <a:r>
+              <a:rPr lang="en-US" sz="6000" spc="0" dirty="0">
+                <a:solidFill>
+                  <a:schemeClr val="bg2"/>
+                </a:solidFill>
+                <a:latin typeface="Mona Sans Display" pitchFamily="2" charset="77"/>
+                <a:cs typeface="Mona Sans Display" pitchFamily="2" charset="77"/>
+              </a:rPr>
+              <a:t>Agenda</a:t>
+            </a:r>
+          </a:p>
+        </p:txBody>
+      </p:sp>
+      <p:sp>
+        <p:nvSpPr>
+          <p:cNvPr id="25" name="Rectangle 24">
+            <a:extLst>
+              <a:ext uri="{FF2B5EF4-FFF2-40B4-BE49-F238E27FC236}">
+                <a16:creationId xmlns:a16="http://schemas.microsoft.com/office/drawing/2014/main" id="{D18BEDA9-9E4A-4AB3-2AC5-BA36C010DBBB}"/>
+              </a:ext>
+            </a:extLst>
+          </p:cNvPr>
+          <p:cNvSpPr>
+            <a:spLocks noGrp="1" noRot="1" noMove="1" noResize="1" noEditPoints="1" noAdjustHandles="1" noChangeArrowheads="1" noChangeShapeType="1"/>
+          </p:cNvSpPr>
+          <p:nvPr userDrawn="1"/>
+        </p:nvSpPr>
+        <p:spPr>
+          <a:xfrm>
+            <a:off x="-63" y="6437150"/>
+            <a:ext cx="12188952" cy="18288"/>
+          </a:xfrm>
+          <a:prstGeom prst="rect">
+            <a:avLst/>
+          </a:prstGeom>
+          <a:solidFill>
+            <a:schemeClr val="accent4"/>
+          </a:solidFill>
+          <a:ln>
+            <a:noFill/>
+          </a:ln>
+        </p:spPr>
+        <p:style>
+          <a:lnRef idx="2">
+            <a:schemeClr val="accent1">
+              <a:shade val="15000"/>
+            </a:schemeClr>
+          </a:lnRef>
+          <a:fillRef idx="1">
+            <a:schemeClr val="accent1"/>
+          </a:fillRef>
+          <a:effectRef idx="0">
+            <a:schemeClr val="accent1"/>
+          </a:effectRef>
+          <a:fontRef idx="minor">
+            <a:schemeClr val="lt1"/>
+          </a:fontRef>
+        </p:style>
+        <p:txBody>
+          <a:bodyPr rtlCol="0" anchor="ctr"/>
+          <a:lstStyle/>
+          <a:p>
+            <a:pPr algn="ctr"/>
+            <a:endParaRPr lang="en-US"/>
+          </a:p>
+        </p:txBody>
+      </p:sp>
+      <p:sp>
+        <p:nvSpPr>
+          <p:cNvPr id="26" name="Rectangle 25">
+            <a:extLst>
+              <a:ext uri="{FF2B5EF4-FFF2-40B4-BE49-F238E27FC236}">
+                <a16:creationId xmlns:a16="http://schemas.microsoft.com/office/drawing/2014/main" id="{848B612C-5E67-5414-731A-C9339B410D72}"/>
+              </a:ext>
+            </a:extLst>
+          </p:cNvPr>
+          <p:cNvSpPr>
+            <a:spLocks noGrp="1" noRot="1" noMove="1" noResize="1" noEditPoints="1" noAdjustHandles="1" noChangeArrowheads="1" noChangeShapeType="1"/>
+          </p:cNvSpPr>
+          <p:nvPr userDrawn="1"/>
+        </p:nvSpPr>
+        <p:spPr>
+          <a:xfrm>
+            <a:off x="11781917" y="6455664"/>
+            <a:ext cx="9144" cy="402336"/>
+          </a:xfrm>
+          <a:prstGeom prst="rect">
+            <a:avLst/>
+          </a:prstGeom>
+          <a:solidFill>
+            <a:srgbClr val="909692"/>
+          </a:solidFill>
+          <a:ln>
+            <a:noFill/>
+          </a:ln>
+        </p:spPr>
+        <p:style>
+          <a:lnRef idx="2">
+            <a:schemeClr val="accent1">
+              <a:shade val="15000"/>
+            </a:schemeClr>
+          </a:lnRef>
+          <a:fillRef idx="1">
+            <a:schemeClr val="accent1"/>
+          </a:fillRef>
+          <a:effectRef idx="0">
+            <a:schemeClr val="accent1"/>
+          </a:effectRef>
+          <a:fontRef idx="minor">
+            <a:schemeClr val="lt1"/>
+          </a:fontRef>
+        </p:style>
+        <p:txBody>
+          <a:bodyPr rtlCol="0" anchor="ctr"/>
+          <a:lstStyle/>
+          <a:p>
+            <a:pPr algn="ctr"/>
+            <a:endParaRPr lang="en-US"/>
+          </a:p>
+        </p:txBody>
+      </p:sp>
+      <p:pic>
+        <p:nvPicPr>
+          <p:cNvPr id="27" name="Graphic 26">
+            <a:extLst>
+              <a:ext uri="{FF2B5EF4-FFF2-40B4-BE49-F238E27FC236}">
+                <a16:creationId xmlns:a16="http://schemas.microsoft.com/office/drawing/2014/main" id="{1A91557B-968A-5EC0-CAFB-09897FC08F54}"/>
+              </a:ext>
+              <a:ext uri="{C183D7F6-B498-43B3-948B-1728B52AA6E4}">
+                <adec:decorative xmlns:adec="http://schemas.microsoft.com/office/drawing/2017/decorative" val="1"/>
+              </a:ext>
+            </a:extLst>
+          </p:cNvPr>
+          <p:cNvPicPr>
+            <a:picLocks noGrp="1" noRot="1" noMove="1" noResize="1" noEditPoints="1" noAdjustHandles="1" noChangeArrowheads="1" noChangeShapeType="1" noCrop="1"/>
+          </p:cNvPicPr>
+          <p:nvPr userDrawn="1"/>
+        </p:nvPicPr>
+        <p:blipFill>
+          <a:blip>
+            <a:extLst>
+              <a:ext uri="{96DAC541-7B7A-43D3-8B79-37D633B846F1}">
+                <asvg:svgBlip xmlns:asvg="http://schemas.microsoft.com/office/drawing/2016/SVG/main" r:embed="rId2"/>
+              </a:ext>
+            </a:extLst>
+          </a:blip>
+          <a:stretch>
+            <a:fillRect/>
+          </a:stretch>
+        </p:blipFill>
+        <p:spPr>
+          <a:xfrm>
+            <a:off x="11859825" y="6530993"/>
+            <a:ext cx="260299" cy="251679"/>
+          </a:xfrm>
+          <a:prstGeom prst="rect">
+            <a:avLst/>
+          </a:prstGeom>
+        </p:spPr>
+      </p:pic>
+      <p:sp>
+        <p:nvSpPr>
+          <p:cNvPr id="28" name="Text Placeholder 13">
+            <a:extLst>
+              <a:ext uri="{FF2B5EF4-FFF2-40B4-BE49-F238E27FC236}">
+                <a16:creationId xmlns:a16="http://schemas.microsoft.com/office/drawing/2014/main" id="{73D074C2-03EF-908D-252E-5ED8D14F44A3}"/>
+              </a:ext>
+            </a:extLst>
+          </p:cNvPr>
+          <p:cNvSpPr>
+            <a:spLocks noGrp="1" noRot="1" noMove="1" noResize="1" noEditPoints="1" noAdjustHandles="1" noChangeArrowheads="1" noChangeShapeType="1"/>
+          </p:cNvSpPr>
+          <p:nvPr>
+            <p:ph type="body" sz="quarter" idx="10" hasCustomPrompt="1"/>
+          </p:nvPr>
+        </p:nvSpPr>
+        <p:spPr>
+          <a:xfrm>
+            <a:off x="188913" y="6595277"/>
+            <a:ext cx="11495038" cy="123111"/>
+          </a:xfrm>
+          <a:prstGeom prst="rect">
+            <a:avLst/>
+          </a:prstGeom>
+        </p:spPr>
+        <p:txBody>
+          <a:bodyPr lIns="0" tIns="0" rIns="0" bIns="0" anchor="ctr"/>
+          <a:lstStyle>
+            <a:lvl1pPr algn="r">
+              <a:defRPr sz="800" cap="all" baseline="0">
+                <a:solidFill>
+                  <a:schemeClr val="bg2"/>
+                </a:solidFill>
+                <a:latin typeface="Mona Sans Mono" pitchFamily="2" charset="77"/>
+                <a:cs typeface="Mona Sans Mono" pitchFamily="2" charset="77"/>
+              </a:defRPr>
+            </a:lvl1pPr>
+          </a:lstStyle>
+          <a:p>
+            <a:pPr lvl="0"/>
+            <a:r>
+              <a:rPr lang="en-US" dirty="0"/>
+              <a:t>OPTIONAL</a:t>
+            </a:r>
+          </a:p>
+        </p:txBody>
+      </p:sp>
+    </p:spTree>
+    <p:extLst>
+      <p:ext uri="{BB962C8B-B14F-4D97-AF65-F5344CB8AC3E}">
+        <p14:creationId xmlns:p14="http://schemas.microsoft.com/office/powerpoint/2010/main" val="2375681114"/>
+      </p:ext>
+    </p:extLst>
+  </p:cSld>
+  <p:clrMapOvr>
+    <a:masterClrMapping/>
+  </p:clrMapOvr>
+  <p:extLst>
+    <p:ext uri="{DCECCB84-F9BA-43D5-87BE-67443E8EF086}">
+      <p15:sldGuideLst xmlns:p15="http://schemas.microsoft.com/office/powerpoint/2012/main">
+        <p15:guide id="1" orient="horz" pos="2160" userDrawn="1">
+          <p15:clr>
+            <a:srgbClr val="FBAE40"/>
+          </p15:clr>
+        </p15:guide>
+        <p15:guide id="2" pos="3839" userDrawn="1">
+          <p15:clr>
+            <a:srgbClr val="FBAE40"/>
+          </p15:clr>
+        </p15:guide>
+      </p15:sldGuideLst>
+    </p:ext>
+  </p:extLst>
+</p:sldLayout>
+</file>
+
 <file path=ppt/slideLayouts/slideLayout10.xml><?xml version="1.0" encoding="utf-8"?>
+<p:sldLayout xmlns:a="http://schemas.openxmlformats.org/drawingml/2006/main" xmlns:r="http://schemas.openxmlformats.org/officeDocument/2006/relationships" xmlns:p="http://schemas.openxmlformats.org/presentationml/2006/main" userDrawn="1">
+  <p:cSld name="2_Speaker Card (1)">
+    <p:bg>
+      <p:bgPr>
+        <a:solidFill>
+          <a:srgbClr val="101411"/>
+        </a:solidFill>
+        <a:effectLst/>
+      </p:bgPr>
+    </p:bg>
+    <p:spTree>
+      <p:nvGrpSpPr>
+        <p:cNvPr id="1" name=""/>
+        <p:cNvGrpSpPr/>
+        <p:nvPr/>
+      </p:nvGrpSpPr>
+      <p:grpSpPr>
+        <a:xfrm>
+          <a:off x="0" y="0"/>
+          <a:ext cx="0" cy="0"/>
+          <a:chOff x="0" y="0"/>
+          <a:chExt cx="0" cy="0"/>
+        </a:xfrm>
+      </p:grpSpPr>
+      <p:pic>
+        <p:nvPicPr>
+          <p:cNvPr id="45" name="Picture 44" descr="A black and green rectangular object with a white line&#10;&#10;AI-generated content may be incorrect.">
+            <a:extLst>
+              <a:ext uri="{FF2B5EF4-FFF2-40B4-BE49-F238E27FC236}">
+                <a16:creationId xmlns:a16="http://schemas.microsoft.com/office/drawing/2014/main" id="{4F4489C5-E215-8D70-746C-B5582A4FE789}"/>
+              </a:ext>
+            </a:extLst>
+          </p:cNvPr>
+          <p:cNvPicPr>
+            <a:picLocks noChangeAspect="1"/>
+          </p:cNvPicPr>
+          <p:nvPr userDrawn="1"/>
+        </p:nvPicPr>
+        <p:blipFill>
+          <a:blip r:embed="rId2"/>
+          <a:stretch>
+            <a:fillRect/>
+          </a:stretch>
+        </p:blipFill>
+        <p:spPr>
+          <a:xfrm>
+            <a:off x="1" y="0"/>
+            <a:ext cx="2234327" cy="6858000"/>
+          </a:xfrm>
+          <a:prstGeom prst="rect">
+            <a:avLst/>
+          </a:prstGeom>
+        </p:spPr>
+      </p:pic>
+      <p:sp>
+        <p:nvSpPr>
+          <p:cNvPr id="53" name="Rectangle 52">
+            <a:extLst>
+              <a:ext uri="{FF2B5EF4-FFF2-40B4-BE49-F238E27FC236}">
+                <a16:creationId xmlns:a16="http://schemas.microsoft.com/office/drawing/2014/main" id="{CDD3A83C-C68D-A01C-8D55-A1D1099D7AE2}"/>
+              </a:ext>
+            </a:extLst>
+          </p:cNvPr>
+          <p:cNvSpPr/>
+          <p:nvPr userDrawn="1"/>
+        </p:nvSpPr>
+        <p:spPr>
+          <a:xfrm>
+            <a:off x="2432958" y="5767540"/>
+            <a:ext cx="9564624" cy="18288"/>
+          </a:xfrm>
+          <a:prstGeom prst="rect">
+            <a:avLst/>
+          </a:prstGeom>
+          <a:solidFill>
+            <a:srgbClr val="5A615C"/>
+          </a:solidFill>
+          <a:ln>
+            <a:noFill/>
+          </a:ln>
+        </p:spPr>
+        <p:style>
+          <a:lnRef idx="2">
+            <a:schemeClr val="accent1">
+              <a:shade val="15000"/>
+            </a:schemeClr>
+          </a:lnRef>
+          <a:fillRef idx="1">
+            <a:schemeClr val="accent1"/>
+          </a:fillRef>
+          <a:effectRef idx="0">
+            <a:schemeClr val="accent1"/>
+          </a:effectRef>
+          <a:fontRef idx="minor">
+            <a:schemeClr val="lt1"/>
+          </a:fontRef>
+        </p:style>
+        <p:txBody>
+          <a:bodyPr rtlCol="0" anchor="ctr"/>
+          <a:lstStyle/>
+          <a:p>
+            <a:pPr algn="ctr"/>
+            <a:endParaRPr lang="en-US" sz="1799"/>
+          </a:p>
+        </p:txBody>
+      </p:sp>
+      <p:sp>
+        <p:nvSpPr>
+          <p:cNvPr id="2" name="Google Shape;179;p20">
+            <a:extLst>
+              <a:ext uri="{FF2B5EF4-FFF2-40B4-BE49-F238E27FC236}">
+                <a16:creationId xmlns:a16="http://schemas.microsoft.com/office/drawing/2014/main" id="{61125A65-45F8-A471-4B7F-AC11E8E32A7A}"/>
+              </a:ext>
+            </a:extLst>
+          </p:cNvPr>
+          <p:cNvSpPr>
+            <a:spLocks noGrp="1"/>
+          </p:cNvSpPr>
+          <p:nvPr>
+            <p:ph type="pic" idx="35"/>
+          </p:nvPr>
+        </p:nvSpPr>
+        <p:spPr>
+          <a:xfrm>
+            <a:off x="2432959" y="5966441"/>
+            <a:ext cx="687748" cy="697885"/>
+          </a:xfrm>
+          <a:prstGeom prst="rect">
+            <a:avLst/>
+          </a:prstGeom>
+          <a:noFill/>
+          <a:ln w="19050" cap="flat" cmpd="sng">
+            <a:noFill/>
+            <a:prstDash val="solid"/>
+            <a:round/>
+            <a:headEnd type="none" w="sm" len="sm"/>
+            <a:tailEnd type="none" w="sm" len="sm"/>
+          </a:ln>
+          <a:effectLst/>
+        </p:spPr>
+        <p:txBody>
+          <a:bodyPr anchor="ctr">
+            <a:normAutofit/>
+          </a:bodyPr>
+          <a:lstStyle>
+            <a:lvl1pPr marL="0" indent="0" algn="ctr">
+              <a:buNone/>
+              <a:defRPr sz="800">
+                <a:solidFill>
+                  <a:schemeClr val="bg1"/>
+                </a:solidFill>
+                <a:latin typeface="Mona Sans" pitchFamily="2" charset="77"/>
+              </a:defRPr>
+            </a:lvl1pPr>
+          </a:lstStyle>
+          <a:p>
+            <a:r>
+              <a:rPr lang="en-GB"/>
+              <a:t>Click icon to add picture</a:t>
+            </a:r>
+            <a:endParaRPr lang="en-US"/>
+          </a:p>
+        </p:txBody>
+      </p:sp>
+      <p:sp>
+        <p:nvSpPr>
+          <p:cNvPr id="4" name="Text Placeholder 23">
+            <a:extLst>
+              <a:ext uri="{FF2B5EF4-FFF2-40B4-BE49-F238E27FC236}">
+                <a16:creationId xmlns:a16="http://schemas.microsoft.com/office/drawing/2014/main" id="{FD123D75-A39D-B792-0116-4A67E53B584C}"/>
+              </a:ext>
+            </a:extLst>
+          </p:cNvPr>
+          <p:cNvSpPr>
+            <a:spLocks noGrp="1"/>
+          </p:cNvSpPr>
+          <p:nvPr>
+            <p:ph type="body" sz="quarter" idx="36" hasCustomPrompt="1"/>
+          </p:nvPr>
+        </p:nvSpPr>
+        <p:spPr>
+          <a:xfrm>
+            <a:off x="3233879" y="5966441"/>
+            <a:ext cx="8774021" cy="152601"/>
+          </a:xfrm>
+          <a:prstGeom prst="rect">
+            <a:avLst/>
+          </a:prstGeom>
+        </p:spPr>
+        <p:txBody>
+          <a:bodyPr lIns="0" tIns="0" rIns="0" bIns="0" anchor="t" anchorCtr="0">
+            <a:noAutofit/>
+          </a:bodyPr>
+          <a:lstStyle>
+            <a:lvl1pPr marL="0" indent="0" algn="l">
+              <a:buNone/>
+              <a:defRPr sz="1400" b="0" i="0" cap="all" spc="0" baseline="0">
+                <a:solidFill>
+                  <a:schemeClr val="tx1"/>
+                </a:solidFill>
+                <a:latin typeface="Mona Sans Mono" pitchFamily="2" charset="77"/>
+                <a:cs typeface="Mona Sans Mono" pitchFamily="2" charset="77"/>
+              </a:defRPr>
+            </a:lvl1pPr>
+            <a:lvl2pPr marL="456880" indent="0">
+              <a:buNone/>
+              <a:defRPr/>
+            </a:lvl2pPr>
+            <a:lvl3pPr marL="913760" indent="0">
+              <a:buNone/>
+              <a:defRPr/>
+            </a:lvl3pPr>
+            <a:lvl4pPr marL="1370640" indent="0">
+              <a:buNone/>
+              <a:defRPr/>
+            </a:lvl4pPr>
+            <a:lvl5pPr marL="1827520" indent="0">
+              <a:buNone/>
+              <a:defRPr/>
+            </a:lvl5pPr>
+          </a:lstStyle>
+          <a:p>
+            <a:pPr lvl="0"/>
+            <a:r>
+              <a:rPr lang="en-US"/>
+              <a:t>FIRST &amp; LAST NAME</a:t>
+            </a:r>
+          </a:p>
+        </p:txBody>
+      </p:sp>
+      <p:sp>
+        <p:nvSpPr>
+          <p:cNvPr id="5" name="Text Placeholder 23">
+            <a:extLst>
+              <a:ext uri="{FF2B5EF4-FFF2-40B4-BE49-F238E27FC236}">
+                <a16:creationId xmlns:a16="http://schemas.microsoft.com/office/drawing/2014/main" id="{743B97D3-FA80-C7A1-F2B5-14130DB8D136}"/>
+              </a:ext>
+            </a:extLst>
+          </p:cNvPr>
+          <p:cNvSpPr>
+            <a:spLocks noGrp="1"/>
+          </p:cNvSpPr>
+          <p:nvPr>
+            <p:ph type="body" sz="quarter" idx="52" hasCustomPrompt="1"/>
+          </p:nvPr>
+        </p:nvSpPr>
+        <p:spPr>
+          <a:xfrm>
+            <a:off x="3225891" y="6242208"/>
+            <a:ext cx="8774021" cy="152601"/>
+          </a:xfrm>
+          <a:prstGeom prst="rect">
+            <a:avLst/>
+          </a:prstGeom>
+        </p:spPr>
+        <p:txBody>
+          <a:bodyPr lIns="0" tIns="0" rIns="0" bIns="0" anchor="b" anchorCtr="0">
+            <a:noAutofit/>
+          </a:bodyPr>
+          <a:lstStyle>
+            <a:lvl1pPr marL="0" indent="0" algn="l">
+              <a:lnSpc>
+                <a:spcPct val="100000"/>
+              </a:lnSpc>
+              <a:buNone/>
+              <a:defRPr sz="1400" b="0" i="0">
+                <a:solidFill>
+                  <a:schemeClr val="bg2"/>
+                </a:solidFill>
+                <a:latin typeface="Mona Sans Display" pitchFamily="2" charset="77"/>
+                <a:cs typeface="Mona Sans Display" pitchFamily="2" charset="77"/>
+              </a:defRPr>
+            </a:lvl1pPr>
+            <a:lvl2pPr marL="456880" indent="0">
+              <a:buNone/>
+              <a:defRPr/>
+            </a:lvl2pPr>
+            <a:lvl3pPr marL="913760" indent="0">
+              <a:buNone/>
+              <a:defRPr/>
+            </a:lvl3pPr>
+            <a:lvl4pPr marL="1370640" indent="0">
+              <a:buNone/>
+              <a:defRPr/>
+            </a:lvl4pPr>
+            <a:lvl5pPr marL="1827520" indent="0">
+              <a:buNone/>
+              <a:defRPr/>
+            </a:lvl5pPr>
+          </a:lstStyle>
+          <a:p>
+            <a:pPr lvl="0"/>
+            <a:r>
+              <a:rPr lang="en-US"/>
+              <a:t>Position</a:t>
+            </a:r>
+          </a:p>
+        </p:txBody>
+      </p:sp>
+      <p:sp>
+        <p:nvSpPr>
+          <p:cNvPr id="6" name="Text Placeholder 23">
+            <a:extLst>
+              <a:ext uri="{FF2B5EF4-FFF2-40B4-BE49-F238E27FC236}">
+                <a16:creationId xmlns:a16="http://schemas.microsoft.com/office/drawing/2014/main" id="{A161DEC9-EF82-CC34-3B8F-865E1635353D}"/>
+              </a:ext>
+            </a:extLst>
+          </p:cNvPr>
+          <p:cNvSpPr>
+            <a:spLocks noGrp="1"/>
+          </p:cNvSpPr>
+          <p:nvPr>
+            <p:ph type="body" sz="quarter" idx="53" hasCustomPrompt="1"/>
+          </p:nvPr>
+        </p:nvSpPr>
+        <p:spPr>
+          <a:xfrm>
+            <a:off x="3225891" y="6517127"/>
+            <a:ext cx="8774021" cy="152601"/>
+          </a:xfrm>
+          <a:prstGeom prst="rect">
+            <a:avLst/>
+          </a:prstGeom>
+        </p:spPr>
+        <p:txBody>
+          <a:bodyPr lIns="0" tIns="0" rIns="0" bIns="0" anchor="b" anchorCtr="0">
+            <a:noAutofit/>
+          </a:bodyPr>
+          <a:lstStyle>
+            <a:lvl1pPr marL="0" indent="0" algn="l">
+              <a:lnSpc>
+                <a:spcPct val="100000"/>
+              </a:lnSpc>
+              <a:buNone/>
+              <a:defRPr sz="1400" b="0" i="0">
+                <a:solidFill>
+                  <a:schemeClr val="bg2"/>
+                </a:solidFill>
+                <a:latin typeface="Mona Sans Display" pitchFamily="2" charset="77"/>
+                <a:cs typeface="Mona Sans Display" pitchFamily="2" charset="77"/>
+              </a:defRPr>
+            </a:lvl1pPr>
+            <a:lvl2pPr marL="456880" indent="0">
+              <a:buNone/>
+              <a:defRPr/>
+            </a:lvl2pPr>
+            <a:lvl3pPr marL="913760" indent="0">
+              <a:buNone/>
+              <a:defRPr/>
+            </a:lvl3pPr>
+            <a:lvl4pPr marL="1370640" indent="0">
+              <a:buNone/>
+              <a:defRPr/>
+            </a:lvl4pPr>
+            <a:lvl5pPr marL="1827520" indent="0">
+              <a:buNone/>
+              <a:defRPr/>
+            </a:lvl5pPr>
+          </a:lstStyle>
+          <a:p>
+            <a:pPr lvl="0"/>
+            <a:r>
+              <a:rPr lang="en-US"/>
+              <a:t>Company</a:t>
+            </a:r>
+          </a:p>
+        </p:txBody>
+      </p:sp>
+      <p:sp>
+        <p:nvSpPr>
+          <p:cNvPr id="7" name="Text Placeholder 16">
+            <a:extLst>
+              <a:ext uri="{FF2B5EF4-FFF2-40B4-BE49-F238E27FC236}">
+                <a16:creationId xmlns:a16="http://schemas.microsoft.com/office/drawing/2014/main" id="{86B8320E-0D81-3983-CB21-EB31547660CF}"/>
+              </a:ext>
+            </a:extLst>
+          </p:cNvPr>
+          <p:cNvSpPr>
+            <a:spLocks noGrp="1"/>
+          </p:cNvSpPr>
+          <p:nvPr>
+            <p:ph type="body" sz="quarter" idx="62" hasCustomPrompt="1"/>
+          </p:nvPr>
+        </p:nvSpPr>
+        <p:spPr>
+          <a:xfrm>
+            <a:off x="2432957" y="190499"/>
+            <a:ext cx="9566956" cy="5396429"/>
+          </a:xfrm>
+          <a:prstGeom prst="rect">
+            <a:avLst/>
+          </a:prstGeom>
+        </p:spPr>
+        <p:txBody>
+          <a:bodyPr lIns="0" tIns="0" rIns="0" bIns="0"/>
+          <a:lstStyle>
+            <a:lvl1pPr>
+              <a:defRPr sz="7198">
+                <a:latin typeface="+mj-lt"/>
+              </a:defRPr>
+            </a:lvl1pPr>
+          </a:lstStyle>
+          <a:p>
+            <a:pPr lvl="0"/>
+            <a:r>
+              <a:rPr lang="en-US"/>
+              <a:t>Presentation title</a:t>
+            </a:r>
+          </a:p>
+        </p:txBody>
+      </p:sp>
+    </p:spTree>
+    <p:extLst>
+      <p:ext uri="{BB962C8B-B14F-4D97-AF65-F5344CB8AC3E}">
+        <p14:creationId xmlns:p14="http://schemas.microsoft.com/office/powerpoint/2010/main" val="321306770"/>
+      </p:ext>
+    </p:extLst>
+  </p:cSld>
+  <p:clrMapOvr>
+    <a:masterClrMapping/>
+  </p:clrMapOvr>
+  <p:extLst>
+    <p:ext uri="{DCECCB84-F9BA-43D5-87BE-67443E8EF086}">
+      <p15:sldGuideLst xmlns:p15="http://schemas.microsoft.com/office/powerpoint/2012/main">
+        <p15:guide id="1" orient="horz" pos="2160">
+          <p15:clr>
+            <a:srgbClr val="FBAE40"/>
+          </p15:clr>
+        </p15:guide>
+        <p15:guide id="2" pos="3839">
+          <p15:clr>
+            <a:srgbClr val="FBAE40"/>
+          </p15:clr>
+        </p15:guide>
+        <p15:guide id="3" orient="horz" pos="120">
+          <p15:clr>
+            <a:srgbClr val="FBAE40"/>
+          </p15:clr>
+        </p15:guide>
+        <p15:guide id="4" pos="119">
+          <p15:clr>
+            <a:srgbClr val="FBAE40"/>
+          </p15:clr>
+        </p15:guide>
+        <p15:guide id="5" pos="7559">
+          <p15:clr>
+            <a:srgbClr val="FBAE40"/>
+          </p15:clr>
+        </p15:guide>
+        <p15:guide id="6" orient="horz" pos="4200">
+          <p15:clr>
+            <a:srgbClr val="FBAE40"/>
+          </p15:clr>
+        </p15:guide>
+      </p15:sldGuideLst>
+    </p:ext>
+  </p:extLst>
+</p:sldLayout>
+</file>
+
+<file path=ppt/slideLayouts/slideLayout2.xml><?xml version="1.0" encoding="utf-8"?>
+<p:sldLayout xmlns:a="http://schemas.openxmlformats.org/drawingml/2006/main" xmlns:r="http://schemas.openxmlformats.org/officeDocument/2006/relationships" xmlns:p="http://schemas.openxmlformats.org/presentationml/2006/main" preserve="1" userDrawn="1">
+  <p:cSld name="Section">
+    <p:bg>
+      <p:bgPr>
+        <a:solidFill>
+          <a:srgbClr val="101411"/>
+        </a:solidFill>
+        <a:effectLst/>
+      </p:bgPr>
+    </p:bg>
+    <p:spTree>
+      <p:nvGrpSpPr>
+        <p:cNvPr id="1" name=""/>
+        <p:cNvGrpSpPr/>
+        <p:nvPr/>
+      </p:nvGrpSpPr>
+      <p:grpSpPr>
+        <a:xfrm>
+          <a:off x="0" y="0"/>
+          <a:ext cx="0" cy="0"/>
+          <a:chOff x="0" y="0"/>
+          <a:chExt cx="0" cy="0"/>
+        </a:xfrm>
+      </p:grpSpPr>
+      <p:sp>
+        <p:nvSpPr>
+          <p:cNvPr id="4" name="Title 1">
+            <a:extLst>
+              <a:ext uri="{FF2B5EF4-FFF2-40B4-BE49-F238E27FC236}">
+                <a16:creationId xmlns:a16="http://schemas.microsoft.com/office/drawing/2014/main" id="{B4439122-4607-B9A2-B0E1-EC68EC513EDD}"/>
+              </a:ext>
+            </a:extLst>
+          </p:cNvPr>
+          <p:cNvSpPr>
+            <a:spLocks noGrp="1"/>
+          </p:cNvSpPr>
+          <p:nvPr>
+            <p:ph type="ctrTitle" hasCustomPrompt="1"/>
+          </p:nvPr>
+        </p:nvSpPr>
+        <p:spPr>
+          <a:xfrm>
+            <a:off x="397260" y="419100"/>
+            <a:ext cx="11384657" cy="5942495"/>
+          </a:xfrm>
+          <a:prstGeom prst="rect">
+            <a:avLst/>
+          </a:prstGeom>
+        </p:spPr>
+        <p:txBody>
+          <a:bodyPr lIns="0" tIns="0" rIns="0" bIns="0" anchor="b">
+            <a:normAutofit/>
+          </a:bodyPr>
+          <a:lstStyle>
+            <a:lvl1pPr algn="l">
+              <a:lnSpc>
+                <a:spcPct val="80000"/>
+              </a:lnSpc>
+              <a:defRPr sz="9600" b="0" i="0">
+                <a:solidFill>
+                  <a:schemeClr val="tx1"/>
+                </a:solidFill>
+                <a:latin typeface="Mona Sans Display" pitchFamily="2" charset="77"/>
+                <a:cs typeface="Mona Sans Display" pitchFamily="2" charset="77"/>
+              </a:defRPr>
+            </a:lvl1pPr>
+          </a:lstStyle>
+          <a:p>
+            <a:r>
+              <a:rPr lang="en-US" dirty="0"/>
+              <a:t>Section name</a:t>
+            </a:r>
+          </a:p>
+        </p:txBody>
+      </p:sp>
+      <p:sp>
+        <p:nvSpPr>
+          <p:cNvPr id="15" name="Rectangle 14">
+            <a:extLst>
+              <a:ext uri="{FF2B5EF4-FFF2-40B4-BE49-F238E27FC236}">
+                <a16:creationId xmlns:a16="http://schemas.microsoft.com/office/drawing/2014/main" id="{A3F0248E-07E8-06F9-9AAF-0C1CD16713FB}"/>
+              </a:ext>
+            </a:extLst>
+          </p:cNvPr>
+          <p:cNvSpPr>
+            <a:spLocks noGrp="1" noRot="1" noMove="1" noResize="1" noEditPoints="1" noAdjustHandles="1" noChangeArrowheads="1" noChangeShapeType="1"/>
+          </p:cNvSpPr>
+          <p:nvPr userDrawn="1"/>
+        </p:nvSpPr>
+        <p:spPr>
+          <a:xfrm>
+            <a:off x="-63" y="6437150"/>
+            <a:ext cx="12188952" cy="18288"/>
+          </a:xfrm>
+          <a:prstGeom prst="rect">
+            <a:avLst/>
+          </a:prstGeom>
+          <a:solidFill>
+            <a:schemeClr val="accent4"/>
+          </a:solidFill>
+          <a:ln>
+            <a:noFill/>
+          </a:ln>
+        </p:spPr>
+        <p:style>
+          <a:lnRef idx="2">
+            <a:schemeClr val="accent1">
+              <a:shade val="15000"/>
+            </a:schemeClr>
+          </a:lnRef>
+          <a:fillRef idx="1">
+            <a:schemeClr val="accent1"/>
+          </a:fillRef>
+          <a:effectRef idx="0">
+            <a:schemeClr val="accent1"/>
+          </a:effectRef>
+          <a:fontRef idx="minor">
+            <a:schemeClr val="lt1"/>
+          </a:fontRef>
+        </p:style>
+        <p:txBody>
+          <a:bodyPr rtlCol="0" anchor="ctr"/>
+          <a:lstStyle/>
+          <a:p>
+            <a:pPr algn="ctr"/>
+            <a:endParaRPr lang="en-US"/>
+          </a:p>
+        </p:txBody>
+      </p:sp>
+      <p:sp>
+        <p:nvSpPr>
+          <p:cNvPr id="16" name="Rectangle 15">
+            <a:extLst>
+              <a:ext uri="{FF2B5EF4-FFF2-40B4-BE49-F238E27FC236}">
+                <a16:creationId xmlns:a16="http://schemas.microsoft.com/office/drawing/2014/main" id="{51BEE7DE-452C-214F-7F38-C14C82A42BDA}"/>
+              </a:ext>
+            </a:extLst>
+          </p:cNvPr>
+          <p:cNvSpPr>
+            <a:spLocks noGrp="1" noRot="1" noMove="1" noResize="1" noEditPoints="1" noAdjustHandles="1" noChangeArrowheads="1" noChangeShapeType="1"/>
+          </p:cNvSpPr>
+          <p:nvPr userDrawn="1"/>
+        </p:nvSpPr>
+        <p:spPr>
+          <a:xfrm>
+            <a:off x="11781917" y="6455664"/>
+            <a:ext cx="9144" cy="402336"/>
+          </a:xfrm>
+          <a:prstGeom prst="rect">
+            <a:avLst/>
+          </a:prstGeom>
+          <a:solidFill>
+            <a:srgbClr val="909692"/>
+          </a:solidFill>
+          <a:ln>
+            <a:noFill/>
+          </a:ln>
+        </p:spPr>
+        <p:style>
+          <a:lnRef idx="2">
+            <a:schemeClr val="accent1">
+              <a:shade val="15000"/>
+            </a:schemeClr>
+          </a:lnRef>
+          <a:fillRef idx="1">
+            <a:schemeClr val="accent1"/>
+          </a:fillRef>
+          <a:effectRef idx="0">
+            <a:schemeClr val="accent1"/>
+          </a:effectRef>
+          <a:fontRef idx="minor">
+            <a:schemeClr val="lt1"/>
+          </a:fontRef>
+        </p:style>
+        <p:txBody>
+          <a:bodyPr rtlCol="0" anchor="ctr"/>
+          <a:lstStyle/>
+          <a:p>
+            <a:pPr algn="ctr"/>
+            <a:endParaRPr lang="en-US"/>
+          </a:p>
+        </p:txBody>
+      </p:sp>
+      <p:pic>
+        <p:nvPicPr>
+          <p:cNvPr id="17" name="Graphic 16">
+            <a:extLst>
+              <a:ext uri="{FF2B5EF4-FFF2-40B4-BE49-F238E27FC236}">
+                <a16:creationId xmlns:a16="http://schemas.microsoft.com/office/drawing/2014/main" id="{D7749530-64E1-E47A-E8E6-06385AE55519}"/>
+              </a:ext>
+              <a:ext uri="{C183D7F6-B498-43B3-948B-1728B52AA6E4}">
+                <adec:decorative xmlns:adec="http://schemas.microsoft.com/office/drawing/2017/decorative" val="1"/>
+              </a:ext>
+            </a:extLst>
+          </p:cNvPr>
+          <p:cNvPicPr>
+            <a:picLocks noGrp="1" noRot="1" noMove="1" noResize="1" noEditPoints="1" noAdjustHandles="1" noChangeArrowheads="1" noChangeShapeType="1" noCrop="1"/>
+          </p:cNvPicPr>
+          <p:nvPr userDrawn="1"/>
+        </p:nvPicPr>
+        <p:blipFill>
+          <a:blip>
+            <a:extLst>
+              <a:ext uri="{96DAC541-7B7A-43D3-8B79-37D633B846F1}">
+                <asvg:svgBlip xmlns:asvg="http://schemas.microsoft.com/office/drawing/2016/SVG/main" r:embed="rId2"/>
+              </a:ext>
+            </a:extLst>
+          </a:blip>
+          <a:stretch>
+            <a:fillRect/>
+          </a:stretch>
+        </p:blipFill>
+        <p:spPr>
+          <a:xfrm>
+            <a:off x="11859825" y="6530993"/>
+            <a:ext cx="260299" cy="251679"/>
+          </a:xfrm>
+          <a:prstGeom prst="rect">
+            <a:avLst/>
+          </a:prstGeom>
+        </p:spPr>
+      </p:pic>
+      <p:sp>
+        <p:nvSpPr>
+          <p:cNvPr id="18" name="Text Placeholder 13">
+            <a:extLst>
+              <a:ext uri="{FF2B5EF4-FFF2-40B4-BE49-F238E27FC236}">
+                <a16:creationId xmlns:a16="http://schemas.microsoft.com/office/drawing/2014/main" id="{47249D01-C24C-14C8-0425-CFAD66343AB4}"/>
+              </a:ext>
+            </a:extLst>
+          </p:cNvPr>
+          <p:cNvSpPr>
+            <a:spLocks noGrp="1" noRot="1" noMove="1" noResize="1" noEditPoints="1" noAdjustHandles="1" noChangeArrowheads="1" noChangeShapeType="1"/>
+          </p:cNvSpPr>
+          <p:nvPr>
+            <p:ph type="body" sz="quarter" idx="10" hasCustomPrompt="1"/>
+          </p:nvPr>
+        </p:nvSpPr>
+        <p:spPr>
+          <a:xfrm>
+            <a:off x="188913" y="6595277"/>
+            <a:ext cx="11495038" cy="123111"/>
+          </a:xfrm>
+          <a:prstGeom prst="rect">
+            <a:avLst/>
+          </a:prstGeom>
+        </p:spPr>
+        <p:txBody>
+          <a:bodyPr lIns="0" tIns="0" rIns="0" bIns="0" anchor="ctr"/>
+          <a:lstStyle>
+            <a:lvl1pPr algn="r">
+              <a:defRPr sz="800" cap="all" baseline="0">
+                <a:solidFill>
+                  <a:schemeClr val="bg2"/>
+                </a:solidFill>
+                <a:latin typeface="Mona Sans Mono" pitchFamily="2" charset="77"/>
+                <a:cs typeface="Mona Sans Mono" pitchFamily="2" charset="77"/>
+              </a:defRPr>
+            </a:lvl1pPr>
+          </a:lstStyle>
+          <a:p>
+            <a:pPr lvl="0"/>
+            <a:r>
+              <a:rPr lang="en-US" dirty="0"/>
+              <a:t>OPTIONAL</a:t>
+            </a:r>
+          </a:p>
+        </p:txBody>
+      </p:sp>
+    </p:spTree>
+    <p:extLst>
+      <p:ext uri="{BB962C8B-B14F-4D97-AF65-F5344CB8AC3E}">
+        <p14:creationId xmlns:p14="http://schemas.microsoft.com/office/powerpoint/2010/main" val="2459713623"/>
+      </p:ext>
+    </p:extLst>
+  </p:cSld>
+  <p:clrMapOvr>
+    <a:masterClrMapping/>
+  </p:clrMapOvr>
+  <p:extLst>
+    <p:ext uri="{DCECCB84-F9BA-43D5-87BE-67443E8EF086}">
+      <p15:sldGuideLst xmlns:p15="http://schemas.microsoft.com/office/powerpoint/2012/main">
+        <p15:guide id="1" orient="horz" pos="2160" userDrawn="1">
+          <p15:clr>
+            <a:srgbClr val="FBAE40"/>
+          </p15:clr>
+        </p15:guide>
+        <p15:guide id="2" pos="3839" userDrawn="1">
+          <p15:clr>
+            <a:srgbClr val="FBAE40"/>
+          </p15:clr>
+        </p15:guide>
+      </p15:sldGuideLst>
+    </p:ext>
+  </p:extLst>
+</p:sldLayout>
+</file>
+
+<file path=ppt/slideLayouts/slideLayout3.xml><?xml version="1.0" encoding="utf-8"?>
+<p:sldLayout xmlns:a="http://schemas.openxmlformats.org/drawingml/2006/main" xmlns:r="http://schemas.openxmlformats.org/officeDocument/2006/relationships" xmlns:p="http://schemas.openxmlformats.org/presentationml/2006/main" preserve="1" userDrawn="1">
+  <p:cSld name="Large statement">
+    <p:bg>
+      <p:bgPr>
+        <a:solidFill>
+          <a:srgbClr val="101411"/>
+        </a:solidFill>
+        <a:effectLst/>
+      </p:bgPr>
+    </p:bg>
+    <p:spTree>
+      <p:nvGrpSpPr>
+        <p:cNvPr id="1" name=""/>
+        <p:cNvGrpSpPr/>
+        <p:nvPr/>
+      </p:nvGrpSpPr>
+      <p:grpSpPr>
+        <a:xfrm>
+          <a:off x="0" y="0"/>
+          <a:ext cx="0" cy="0"/>
+          <a:chOff x="0" y="0"/>
+          <a:chExt cx="0" cy="0"/>
+        </a:xfrm>
+      </p:grpSpPr>
+      <p:sp>
+        <p:nvSpPr>
+          <p:cNvPr id="4" name="Title 1">
+            <a:extLst>
+              <a:ext uri="{FF2B5EF4-FFF2-40B4-BE49-F238E27FC236}">
+                <a16:creationId xmlns:a16="http://schemas.microsoft.com/office/drawing/2014/main" id="{B4439122-4607-B9A2-B0E1-EC68EC513EDD}"/>
+              </a:ext>
+            </a:extLst>
+          </p:cNvPr>
+          <p:cNvSpPr>
+            <a:spLocks noGrp="1"/>
+          </p:cNvSpPr>
+          <p:nvPr>
+            <p:ph type="ctrTitle" hasCustomPrompt="1"/>
+          </p:nvPr>
+        </p:nvSpPr>
+        <p:spPr>
+          <a:xfrm>
+            <a:off x="188914" y="638739"/>
+            <a:ext cx="11811000" cy="5580526"/>
+          </a:xfrm>
+          <a:prstGeom prst="rect">
+            <a:avLst/>
+          </a:prstGeom>
+        </p:spPr>
+        <p:txBody>
+          <a:bodyPr anchor="ctr">
+            <a:normAutofit/>
+          </a:bodyPr>
+          <a:lstStyle>
+            <a:lvl1pPr algn="ctr">
+              <a:lnSpc>
+                <a:spcPct val="80000"/>
+              </a:lnSpc>
+              <a:defRPr sz="5998" b="0" i="0">
+                <a:solidFill>
+                  <a:schemeClr val="tx1"/>
+                </a:solidFill>
+                <a:latin typeface="Mona Sans Display" pitchFamily="2" charset="77"/>
+                <a:cs typeface="Mona Sans Display" pitchFamily="2" charset="77"/>
+              </a:defRPr>
+            </a:lvl1pPr>
+          </a:lstStyle>
+          <a:p>
+            <a:r>
+              <a:rPr lang="en-US" dirty="0"/>
+              <a:t>Large Statement</a:t>
+            </a:r>
+          </a:p>
+        </p:txBody>
+      </p:sp>
+      <p:sp>
+        <p:nvSpPr>
+          <p:cNvPr id="2" name="Rectangle 1">
+            <a:extLst>
+              <a:ext uri="{FF2B5EF4-FFF2-40B4-BE49-F238E27FC236}">
+                <a16:creationId xmlns:a16="http://schemas.microsoft.com/office/drawing/2014/main" id="{D15E4003-1D40-7897-1FC6-FF65C90164F0}"/>
+              </a:ext>
+            </a:extLst>
+          </p:cNvPr>
+          <p:cNvSpPr/>
+          <p:nvPr userDrawn="1"/>
+        </p:nvSpPr>
+        <p:spPr>
+          <a:xfrm>
+            <a:off x="-63" y="6437150"/>
+            <a:ext cx="12188952" cy="18288"/>
+          </a:xfrm>
+          <a:prstGeom prst="rect">
+            <a:avLst/>
+          </a:prstGeom>
+          <a:solidFill>
+            <a:schemeClr val="accent4"/>
+          </a:solidFill>
+          <a:ln>
+            <a:noFill/>
+          </a:ln>
+        </p:spPr>
+        <p:style>
+          <a:lnRef idx="2">
+            <a:schemeClr val="accent1">
+              <a:shade val="15000"/>
+            </a:schemeClr>
+          </a:lnRef>
+          <a:fillRef idx="1">
+            <a:schemeClr val="accent1"/>
+          </a:fillRef>
+          <a:effectRef idx="0">
+            <a:schemeClr val="accent1"/>
+          </a:effectRef>
+          <a:fontRef idx="minor">
+            <a:schemeClr val="lt1"/>
+          </a:fontRef>
+        </p:style>
+        <p:txBody>
+          <a:bodyPr rtlCol="0" anchor="ctr"/>
+          <a:lstStyle/>
+          <a:p>
+            <a:pPr algn="ctr"/>
+            <a:endParaRPr lang="en-US"/>
+          </a:p>
+        </p:txBody>
+      </p:sp>
+      <p:sp>
+        <p:nvSpPr>
+          <p:cNvPr id="8" name="Rectangle 7">
+            <a:extLst>
+              <a:ext uri="{FF2B5EF4-FFF2-40B4-BE49-F238E27FC236}">
+                <a16:creationId xmlns:a16="http://schemas.microsoft.com/office/drawing/2014/main" id="{0BE37B27-DEEB-9467-E362-1A2C671792C0}"/>
+              </a:ext>
+            </a:extLst>
+          </p:cNvPr>
+          <p:cNvSpPr/>
+          <p:nvPr userDrawn="1"/>
+        </p:nvSpPr>
+        <p:spPr>
+          <a:xfrm>
+            <a:off x="11781917" y="6455664"/>
+            <a:ext cx="9144" cy="402336"/>
+          </a:xfrm>
+          <a:prstGeom prst="rect">
+            <a:avLst/>
+          </a:prstGeom>
+          <a:solidFill>
+            <a:srgbClr val="909692"/>
+          </a:solidFill>
+          <a:ln>
+            <a:noFill/>
+          </a:ln>
+        </p:spPr>
+        <p:style>
+          <a:lnRef idx="2">
+            <a:schemeClr val="accent1">
+              <a:shade val="15000"/>
+            </a:schemeClr>
+          </a:lnRef>
+          <a:fillRef idx="1">
+            <a:schemeClr val="accent1"/>
+          </a:fillRef>
+          <a:effectRef idx="0">
+            <a:schemeClr val="accent1"/>
+          </a:effectRef>
+          <a:fontRef idx="minor">
+            <a:schemeClr val="lt1"/>
+          </a:fontRef>
+        </p:style>
+        <p:txBody>
+          <a:bodyPr rtlCol="0" anchor="ctr"/>
+          <a:lstStyle/>
+          <a:p>
+            <a:pPr algn="ctr"/>
+            <a:endParaRPr lang="en-US"/>
+          </a:p>
+        </p:txBody>
+      </p:sp>
+      <p:pic>
+        <p:nvPicPr>
+          <p:cNvPr id="9" name="Graphic 8">
+            <a:extLst>
+              <a:ext uri="{FF2B5EF4-FFF2-40B4-BE49-F238E27FC236}">
+                <a16:creationId xmlns:a16="http://schemas.microsoft.com/office/drawing/2014/main" id="{6003487B-C5AC-7790-7D60-2DFC60A19E59}"/>
+              </a:ext>
+              <a:ext uri="{C183D7F6-B498-43B3-948B-1728B52AA6E4}">
+                <adec:decorative xmlns:adec="http://schemas.microsoft.com/office/drawing/2017/decorative" val="1"/>
+              </a:ext>
+            </a:extLst>
+          </p:cNvPr>
+          <p:cNvPicPr/>
+          <p:nvPr userDrawn="1"/>
+        </p:nvPicPr>
+        <p:blipFill>
+          <a:blip>
+            <a:extLst>
+              <a:ext uri="{96DAC541-7B7A-43D3-8B79-37D633B846F1}">
+                <asvg:svgBlip xmlns:asvg="http://schemas.microsoft.com/office/drawing/2016/SVG/main" r:embed="rId2"/>
+              </a:ext>
+            </a:extLst>
+          </a:blip>
+          <a:stretch>
+            <a:fillRect/>
+          </a:stretch>
+        </p:blipFill>
+        <p:spPr>
+          <a:xfrm>
+            <a:off x="11859825" y="6530993"/>
+            <a:ext cx="260299" cy="251679"/>
+          </a:xfrm>
+          <a:prstGeom prst="rect">
+            <a:avLst/>
+          </a:prstGeom>
+        </p:spPr>
+      </p:pic>
+      <p:sp>
+        <p:nvSpPr>
+          <p:cNvPr id="10" name="Text Placeholder 13">
+            <a:extLst>
+              <a:ext uri="{FF2B5EF4-FFF2-40B4-BE49-F238E27FC236}">
+                <a16:creationId xmlns:a16="http://schemas.microsoft.com/office/drawing/2014/main" id="{60E4617F-1087-AA0E-4F82-FDB96276CB8E}"/>
+              </a:ext>
+            </a:extLst>
+          </p:cNvPr>
+          <p:cNvSpPr>
+            <a:spLocks noGrp="1"/>
+          </p:cNvSpPr>
+          <p:nvPr>
+            <p:ph type="body" sz="quarter" idx="10" hasCustomPrompt="1"/>
+          </p:nvPr>
+        </p:nvSpPr>
+        <p:spPr>
+          <a:xfrm>
+            <a:off x="188913" y="6595277"/>
+            <a:ext cx="11495038" cy="123111"/>
+          </a:xfrm>
+          <a:prstGeom prst="rect">
+            <a:avLst/>
+          </a:prstGeom>
+        </p:spPr>
+        <p:txBody>
+          <a:bodyPr lIns="0" tIns="0" rIns="0" bIns="0" anchor="ctr"/>
+          <a:lstStyle>
+            <a:lvl1pPr algn="r">
+              <a:defRPr sz="800" cap="all" baseline="0">
+                <a:solidFill>
+                  <a:schemeClr val="bg2"/>
+                </a:solidFill>
+                <a:latin typeface="Mona Sans Mono" pitchFamily="2" charset="77"/>
+                <a:cs typeface="Mona Sans Mono" pitchFamily="2" charset="77"/>
+              </a:defRPr>
+            </a:lvl1pPr>
+          </a:lstStyle>
+          <a:p>
+            <a:pPr lvl="0"/>
+            <a:r>
+              <a:rPr lang="en-US" dirty="0"/>
+              <a:t>OPTIONAL</a:t>
+            </a:r>
+          </a:p>
+        </p:txBody>
+      </p:sp>
+    </p:spTree>
+    <p:extLst>
+      <p:ext uri="{BB962C8B-B14F-4D97-AF65-F5344CB8AC3E}">
+        <p14:creationId xmlns:p14="http://schemas.microsoft.com/office/powerpoint/2010/main" val="2191561938"/>
+      </p:ext>
+    </p:extLst>
+  </p:cSld>
+  <p:clrMapOvr>
+    <a:masterClrMapping/>
+  </p:clrMapOvr>
+  <p:extLst>
+    <p:ext uri="{DCECCB84-F9BA-43D5-87BE-67443E8EF086}">
+      <p15:sldGuideLst xmlns:p15="http://schemas.microsoft.com/office/powerpoint/2012/main">
+        <p15:guide id="1" orient="horz" pos="2160" userDrawn="1">
+          <p15:clr>
+            <a:srgbClr val="FBAE40"/>
+          </p15:clr>
+        </p15:guide>
+        <p15:guide id="2" pos="3839" userDrawn="1">
+          <p15:clr>
+            <a:srgbClr val="FBAE40"/>
+          </p15:clr>
+        </p15:guide>
+      </p15:sldGuideLst>
+    </p:ext>
+  </p:extLst>
+</p:sldLayout>
+</file>
+
+<file path=ppt/slideLayouts/slideLayout4.xml><?xml version="1.0" encoding="utf-8"?>
 <p:sldLayout xmlns:a="http://schemas.openxmlformats.org/drawingml/2006/main" xmlns:r="http://schemas.openxmlformats.org/officeDocument/2006/relationships" xmlns:p="http://schemas.openxmlformats.org/presentationml/2006/main" preserve="1" userDrawn="1">
   <p:cSld name="Quote">
     <p:bg>
@@ -1151,7 +2845,7 @@
 </p:sldLayout>
 </file>
 
-<file path=ppt/slideLayouts/slideLayout24.xml><?xml version="1.0" encoding="utf-8"?>
+<file path=ppt/slideLayouts/slideLayout5.xml><?xml version="1.0" encoding="utf-8"?>
 <p:sldLayout xmlns:a="http://schemas.openxmlformats.org/drawingml/2006/main" xmlns:r="http://schemas.openxmlformats.org/officeDocument/2006/relationships" xmlns:p="http://schemas.openxmlformats.org/presentationml/2006/main" preserve="1" userDrawn="1">
   <p:cSld name="Title and Content">
     <p:spTree>
@@ -1581,7 +3275,7 @@
 </p:sldLayout>
 </file>
 
-<file path=ppt/slideLayouts/slideLayout25.xml><?xml version="1.0" encoding="utf-8"?>
+<file path=ppt/slideLayouts/slideLayout6.xml><?xml version="1.0" encoding="utf-8"?>
 <p:sldLayout xmlns:a="http://schemas.openxmlformats.org/drawingml/2006/main" xmlns:r="http://schemas.openxmlformats.org/officeDocument/2006/relationships" xmlns:p="http://schemas.openxmlformats.org/presentationml/2006/main" preserve="1" userDrawn="1">
   <p:cSld name="Title and Subtitle">
     <p:spTree>
@@ -1986,7 +3680,7 @@
 </p:sldLayout>
 </file>
 
-<file path=ppt/slideLayouts/slideLayout27.xml><?xml version="1.0" encoding="utf-8"?>
+<file path=ppt/slideLayouts/slideLayout7.xml><?xml version="1.0" encoding="utf-8"?>
 <p:sldLayout xmlns:a="http://schemas.openxmlformats.org/drawingml/2006/main" xmlns:r="http://schemas.openxmlformats.org/officeDocument/2006/relationships" xmlns:p="http://schemas.openxmlformats.org/presentationml/2006/main" preserve="1" userDrawn="1">
   <p:cSld name="Three statements">
     <p:spTree>
@@ -2840,7 +4534,7 @@
 </p:sldLayout>
 </file>
 
-<file path=ppt/slideLayouts/slideLayout40.xml><?xml version="1.0" encoding="utf-8"?>
+<file path=ppt/slideLayouts/slideLayout8.xml><?xml version="1.0" encoding="utf-8"?>
 <p:sldLayout xmlns:a="http://schemas.openxmlformats.org/drawingml/2006/main" xmlns:r="http://schemas.openxmlformats.org/officeDocument/2006/relationships" xmlns:p="http://schemas.openxmlformats.org/presentationml/2006/main" preserve="1" userDrawn="1">
   <p:cSld name="Three large numbers">
     <p:bg>
@@ -3622,7 +5316,7 @@
 </p:sldLayout>
 </file>
 
-<file path=ppt/slideLayouts/slideLayout44.xml><?xml version="1.0" encoding="utf-8"?>
+<file path=ppt/slideLayouts/slideLayout9.xml><?xml version="1.0" encoding="utf-8"?>
 <p:sldLayout xmlns:a="http://schemas.openxmlformats.org/drawingml/2006/main" xmlns:r="http://schemas.openxmlformats.org/officeDocument/2006/relationships" xmlns:p="http://schemas.openxmlformats.org/presentationml/2006/main" preserve="1">
   <p:cSld name="Thank you ">
     <p:bg>
@@ -3943,1706 +5637,6 @@
 </p:sldLayout>
 </file>
 
-<file path=ppt/slideLayouts/slideLayout52.xml><?xml version="1.0" encoding="utf-8"?>
-<p:sldLayout xmlns:a="http://schemas.openxmlformats.org/drawingml/2006/main" xmlns:r="http://schemas.openxmlformats.org/officeDocument/2006/relationships" xmlns:p="http://schemas.openxmlformats.org/presentationml/2006/main" userDrawn="1">
-  <p:cSld name="2_Speaker Card (1)">
-    <p:bg>
-      <p:bgPr>
-        <a:solidFill>
-          <a:srgbClr val="101411"/>
-        </a:solidFill>
-        <a:effectLst/>
-      </p:bgPr>
-    </p:bg>
-    <p:spTree>
-      <p:nvGrpSpPr>
-        <p:cNvPr id="1" name=""/>
-        <p:cNvGrpSpPr/>
-        <p:nvPr/>
-      </p:nvGrpSpPr>
-      <p:grpSpPr>
-        <a:xfrm>
-          <a:off x="0" y="0"/>
-          <a:ext cx="0" cy="0"/>
-          <a:chOff x="0" y="0"/>
-          <a:chExt cx="0" cy="0"/>
-        </a:xfrm>
-      </p:grpSpPr>
-      <p:pic>
-        <p:nvPicPr>
-          <p:cNvPr id="45" name="Picture 44" descr="A black and green rectangular object with a white line&#10;&#10;AI-generated content may be incorrect.">
-            <a:extLst>
-              <a:ext uri="{FF2B5EF4-FFF2-40B4-BE49-F238E27FC236}">
-                <a16:creationId xmlns:a16="http://schemas.microsoft.com/office/drawing/2014/main" id="{4F4489C5-E215-8D70-746C-B5582A4FE789}"/>
-              </a:ext>
-            </a:extLst>
-          </p:cNvPr>
-          <p:cNvPicPr>
-            <a:picLocks noChangeAspect="1"/>
-          </p:cNvPicPr>
-          <p:nvPr userDrawn="1"/>
-        </p:nvPicPr>
-        <p:blipFill>
-          <a:blip r:embed="rId2"/>
-          <a:stretch>
-            <a:fillRect/>
-          </a:stretch>
-        </p:blipFill>
-        <p:spPr>
-          <a:xfrm>
-            <a:off x="1" y="0"/>
-            <a:ext cx="2234327" cy="6858000"/>
-          </a:xfrm>
-          <a:prstGeom prst="rect">
-            <a:avLst/>
-          </a:prstGeom>
-        </p:spPr>
-      </p:pic>
-      <p:sp>
-        <p:nvSpPr>
-          <p:cNvPr id="53" name="Rectangle 52">
-            <a:extLst>
-              <a:ext uri="{FF2B5EF4-FFF2-40B4-BE49-F238E27FC236}">
-                <a16:creationId xmlns:a16="http://schemas.microsoft.com/office/drawing/2014/main" id="{CDD3A83C-C68D-A01C-8D55-A1D1099D7AE2}"/>
-              </a:ext>
-            </a:extLst>
-          </p:cNvPr>
-          <p:cNvSpPr/>
-          <p:nvPr userDrawn="1"/>
-        </p:nvSpPr>
-        <p:spPr>
-          <a:xfrm>
-            <a:off x="2432958" y="5767540"/>
-            <a:ext cx="9564624" cy="18288"/>
-          </a:xfrm>
-          <a:prstGeom prst="rect">
-            <a:avLst/>
-          </a:prstGeom>
-          <a:solidFill>
-            <a:srgbClr val="5A615C"/>
-          </a:solidFill>
-          <a:ln>
-            <a:noFill/>
-          </a:ln>
-        </p:spPr>
-        <p:style>
-          <a:lnRef idx="2">
-            <a:schemeClr val="accent1">
-              <a:shade val="15000"/>
-            </a:schemeClr>
-          </a:lnRef>
-          <a:fillRef idx="1">
-            <a:schemeClr val="accent1"/>
-          </a:fillRef>
-          <a:effectRef idx="0">
-            <a:schemeClr val="accent1"/>
-          </a:effectRef>
-          <a:fontRef idx="minor">
-            <a:schemeClr val="lt1"/>
-          </a:fontRef>
-        </p:style>
-        <p:txBody>
-          <a:bodyPr rtlCol="0" anchor="ctr"/>
-          <a:lstStyle/>
-          <a:p>
-            <a:pPr algn="ctr"/>
-            <a:endParaRPr lang="en-US" sz="1799"/>
-          </a:p>
-        </p:txBody>
-      </p:sp>
-      <p:sp>
-        <p:nvSpPr>
-          <p:cNvPr id="2" name="Google Shape;179;p20">
-            <a:extLst>
-              <a:ext uri="{FF2B5EF4-FFF2-40B4-BE49-F238E27FC236}">
-                <a16:creationId xmlns:a16="http://schemas.microsoft.com/office/drawing/2014/main" id="{61125A65-45F8-A471-4B7F-AC11E8E32A7A}"/>
-              </a:ext>
-            </a:extLst>
-          </p:cNvPr>
-          <p:cNvSpPr>
-            <a:spLocks noGrp="1"/>
-          </p:cNvSpPr>
-          <p:nvPr>
-            <p:ph type="pic" idx="35"/>
-          </p:nvPr>
-        </p:nvSpPr>
-        <p:spPr>
-          <a:xfrm>
-            <a:off x="2432959" y="5966441"/>
-            <a:ext cx="687748" cy="697885"/>
-          </a:xfrm>
-          <a:prstGeom prst="rect">
-            <a:avLst/>
-          </a:prstGeom>
-          <a:noFill/>
-          <a:ln w="19050" cap="flat" cmpd="sng">
-            <a:noFill/>
-            <a:prstDash val="solid"/>
-            <a:round/>
-            <a:headEnd type="none" w="sm" len="sm"/>
-            <a:tailEnd type="none" w="sm" len="sm"/>
-          </a:ln>
-          <a:effectLst/>
-        </p:spPr>
-        <p:txBody>
-          <a:bodyPr anchor="ctr">
-            <a:normAutofit/>
-          </a:bodyPr>
-          <a:lstStyle>
-            <a:lvl1pPr marL="0" indent="0" algn="ctr">
-              <a:buNone/>
-              <a:defRPr sz="800">
-                <a:solidFill>
-                  <a:schemeClr val="bg1"/>
-                </a:solidFill>
-                <a:latin typeface="Mona Sans" pitchFamily="2" charset="77"/>
-              </a:defRPr>
-            </a:lvl1pPr>
-          </a:lstStyle>
-          <a:p>
-            <a:r>
-              <a:rPr lang="en-GB"/>
-              <a:t>Click icon to add picture</a:t>
-            </a:r>
-            <a:endParaRPr lang="en-US"/>
-          </a:p>
-        </p:txBody>
-      </p:sp>
-      <p:sp>
-        <p:nvSpPr>
-          <p:cNvPr id="4" name="Text Placeholder 23">
-            <a:extLst>
-              <a:ext uri="{FF2B5EF4-FFF2-40B4-BE49-F238E27FC236}">
-                <a16:creationId xmlns:a16="http://schemas.microsoft.com/office/drawing/2014/main" id="{FD123D75-A39D-B792-0116-4A67E53B584C}"/>
-              </a:ext>
-            </a:extLst>
-          </p:cNvPr>
-          <p:cNvSpPr>
-            <a:spLocks noGrp="1"/>
-          </p:cNvSpPr>
-          <p:nvPr>
-            <p:ph type="body" sz="quarter" idx="36" hasCustomPrompt="1"/>
-          </p:nvPr>
-        </p:nvSpPr>
-        <p:spPr>
-          <a:xfrm>
-            <a:off x="3233879" y="5966441"/>
-            <a:ext cx="8774021" cy="152601"/>
-          </a:xfrm>
-          <a:prstGeom prst="rect">
-            <a:avLst/>
-          </a:prstGeom>
-        </p:spPr>
-        <p:txBody>
-          <a:bodyPr lIns="0" tIns="0" rIns="0" bIns="0" anchor="t" anchorCtr="0">
-            <a:noAutofit/>
-          </a:bodyPr>
-          <a:lstStyle>
-            <a:lvl1pPr marL="0" indent="0" algn="l">
-              <a:buNone/>
-              <a:defRPr sz="1400" b="0" i="0" cap="all" spc="0" baseline="0">
-                <a:solidFill>
-                  <a:schemeClr val="tx1"/>
-                </a:solidFill>
-                <a:latin typeface="Mona Sans Mono" pitchFamily="2" charset="77"/>
-                <a:cs typeface="Mona Sans Mono" pitchFamily="2" charset="77"/>
-              </a:defRPr>
-            </a:lvl1pPr>
-            <a:lvl2pPr marL="456880" indent="0">
-              <a:buNone/>
-              <a:defRPr/>
-            </a:lvl2pPr>
-            <a:lvl3pPr marL="913760" indent="0">
-              <a:buNone/>
-              <a:defRPr/>
-            </a:lvl3pPr>
-            <a:lvl4pPr marL="1370640" indent="0">
-              <a:buNone/>
-              <a:defRPr/>
-            </a:lvl4pPr>
-            <a:lvl5pPr marL="1827520" indent="0">
-              <a:buNone/>
-              <a:defRPr/>
-            </a:lvl5pPr>
-          </a:lstStyle>
-          <a:p>
-            <a:pPr lvl="0"/>
-            <a:r>
-              <a:rPr lang="en-US"/>
-              <a:t>FIRST &amp; LAST NAME</a:t>
-            </a:r>
-          </a:p>
-        </p:txBody>
-      </p:sp>
-      <p:sp>
-        <p:nvSpPr>
-          <p:cNvPr id="5" name="Text Placeholder 23">
-            <a:extLst>
-              <a:ext uri="{FF2B5EF4-FFF2-40B4-BE49-F238E27FC236}">
-                <a16:creationId xmlns:a16="http://schemas.microsoft.com/office/drawing/2014/main" id="{743B97D3-FA80-C7A1-F2B5-14130DB8D136}"/>
-              </a:ext>
-            </a:extLst>
-          </p:cNvPr>
-          <p:cNvSpPr>
-            <a:spLocks noGrp="1"/>
-          </p:cNvSpPr>
-          <p:nvPr>
-            <p:ph type="body" sz="quarter" idx="52" hasCustomPrompt="1"/>
-          </p:nvPr>
-        </p:nvSpPr>
-        <p:spPr>
-          <a:xfrm>
-            <a:off x="3225891" y="6242208"/>
-            <a:ext cx="8774021" cy="152601"/>
-          </a:xfrm>
-          <a:prstGeom prst="rect">
-            <a:avLst/>
-          </a:prstGeom>
-        </p:spPr>
-        <p:txBody>
-          <a:bodyPr lIns="0" tIns="0" rIns="0" bIns="0" anchor="b" anchorCtr="0">
-            <a:noAutofit/>
-          </a:bodyPr>
-          <a:lstStyle>
-            <a:lvl1pPr marL="0" indent="0" algn="l">
-              <a:lnSpc>
-                <a:spcPct val="100000"/>
-              </a:lnSpc>
-              <a:buNone/>
-              <a:defRPr sz="1400" b="0" i="0">
-                <a:solidFill>
-                  <a:schemeClr val="bg2"/>
-                </a:solidFill>
-                <a:latin typeface="Mona Sans Display" pitchFamily="2" charset="77"/>
-                <a:cs typeface="Mona Sans Display" pitchFamily="2" charset="77"/>
-              </a:defRPr>
-            </a:lvl1pPr>
-            <a:lvl2pPr marL="456880" indent="0">
-              <a:buNone/>
-              <a:defRPr/>
-            </a:lvl2pPr>
-            <a:lvl3pPr marL="913760" indent="0">
-              <a:buNone/>
-              <a:defRPr/>
-            </a:lvl3pPr>
-            <a:lvl4pPr marL="1370640" indent="0">
-              <a:buNone/>
-              <a:defRPr/>
-            </a:lvl4pPr>
-            <a:lvl5pPr marL="1827520" indent="0">
-              <a:buNone/>
-              <a:defRPr/>
-            </a:lvl5pPr>
-          </a:lstStyle>
-          <a:p>
-            <a:pPr lvl="0"/>
-            <a:r>
-              <a:rPr lang="en-US"/>
-              <a:t>Position</a:t>
-            </a:r>
-          </a:p>
-        </p:txBody>
-      </p:sp>
-      <p:sp>
-        <p:nvSpPr>
-          <p:cNvPr id="6" name="Text Placeholder 23">
-            <a:extLst>
-              <a:ext uri="{FF2B5EF4-FFF2-40B4-BE49-F238E27FC236}">
-                <a16:creationId xmlns:a16="http://schemas.microsoft.com/office/drawing/2014/main" id="{A161DEC9-EF82-CC34-3B8F-865E1635353D}"/>
-              </a:ext>
-            </a:extLst>
-          </p:cNvPr>
-          <p:cNvSpPr>
-            <a:spLocks noGrp="1"/>
-          </p:cNvSpPr>
-          <p:nvPr>
-            <p:ph type="body" sz="quarter" idx="53" hasCustomPrompt="1"/>
-          </p:nvPr>
-        </p:nvSpPr>
-        <p:spPr>
-          <a:xfrm>
-            <a:off x="3225891" y="6517127"/>
-            <a:ext cx="8774021" cy="152601"/>
-          </a:xfrm>
-          <a:prstGeom prst="rect">
-            <a:avLst/>
-          </a:prstGeom>
-        </p:spPr>
-        <p:txBody>
-          <a:bodyPr lIns="0" tIns="0" rIns="0" bIns="0" anchor="b" anchorCtr="0">
-            <a:noAutofit/>
-          </a:bodyPr>
-          <a:lstStyle>
-            <a:lvl1pPr marL="0" indent="0" algn="l">
-              <a:lnSpc>
-                <a:spcPct val="100000"/>
-              </a:lnSpc>
-              <a:buNone/>
-              <a:defRPr sz="1400" b="0" i="0">
-                <a:solidFill>
-                  <a:schemeClr val="bg2"/>
-                </a:solidFill>
-                <a:latin typeface="Mona Sans Display" pitchFamily="2" charset="77"/>
-                <a:cs typeface="Mona Sans Display" pitchFamily="2" charset="77"/>
-              </a:defRPr>
-            </a:lvl1pPr>
-            <a:lvl2pPr marL="456880" indent="0">
-              <a:buNone/>
-              <a:defRPr/>
-            </a:lvl2pPr>
-            <a:lvl3pPr marL="913760" indent="0">
-              <a:buNone/>
-              <a:defRPr/>
-            </a:lvl3pPr>
-            <a:lvl4pPr marL="1370640" indent="0">
-              <a:buNone/>
-              <a:defRPr/>
-            </a:lvl4pPr>
-            <a:lvl5pPr marL="1827520" indent="0">
-              <a:buNone/>
-              <a:defRPr/>
-            </a:lvl5pPr>
-          </a:lstStyle>
-          <a:p>
-            <a:pPr lvl="0"/>
-            <a:r>
-              <a:rPr lang="en-US"/>
-              <a:t>Company</a:t>
-            </a:r>
-          </a:p>
-        </p:txBody>
-      </p:sp>
-      <p:sp>
-        <p:nvSpPr>
-          <p:cNvPr id="7" name="Text Placeholder 16">
-            <a:extLst>
-              <a:ext uri="{FF2B5EF4-FFF2-40B4-BE49-F238E27FC236}">
-                <a16:creationId xmlns:a16="http://schemas.microsoft.com/office/drawing/2014/main" id="{86B8320E-0D81-3983-CB21-EB31547660CF}"/>
-              </a:ext>
-            </a:extLst>
-          </p:cNvPr>
-          <p:cNvSpPr>
-            <a:spLocks noGrp="1"/>
-          </p:cNvSpPr>
-          <p:nvPr>
-            <p:ph type="body" sz="quarter" idx="62" hasCustomPrompt="1"/>
-          </p:nvPr>
-        </p:nvSpPr>
-        <p:spPr>
-          <a:xfrm>
-            <a:off x="2432957" y="190499"/>
-            <a:ext cx="9566956" cy="5396429"/>
-          </a:xfrm>
-          <a:prstGeom prst="rect">
-            <a:avLst/>
-          </a:prstGeom>
-        </p:spPr>
-        <p:txBody>
-          <a:bodyPr lIns="0" tIns="0" rIns="0" bIns="0"/>
-          <a:lstStyle>
-            <a:lvl1pPr>
-              <a:defRPr sz="7198">
-                <a:latin typeface="+mj-lt"/>
-              </a:defRPr>
-            </a:lvl1pPr>
-          </a:lstStyle>
-          <a:p>
-            <a:pPr lvl="0"/>
-            <a:r>
-              <a:rPr lang="en-US"/>
-              <a:t>Presentation title</a:t>
-            </a:r>
-          </a:p>
-        </p:txBody>
-      </p:sp>
-    </p:spTree>
-    <p:extLst>
-      <p:ext uri="{BB962C8B-B14F-4D97-AF65-F5344CB8AC3E}">
-        <p14:creationId xmlns:p14="http://schemas.microsoft.com/office/powerpoint/2010/main" val="321306770"/>
-      </p:ext>
-    </p:extLst>
-  </p:cSld>
-  <p:clrMapOvr>
-    <a:masterClrMapping/>
-  </p:clrMapOvr>
-  <p:extLst>
-    <p:ext uri="{DCECCB84-F9BA-43D5-87BE-67443E8EF086}">
-      <p15:sldGuideLst xmlns:p15="http://schemas.microsoft.com/office/powerpoint/2012/main">
-        <p15:guide id="1" orient="horz" pos="2160">
-          <p15:clr>
-            <a:srgbClr val="FBAE40"/>
-          </p15:clr>
-        </p15:guide>
-        <p15:guide id="2" pos="3839">
-          <p15:clr>
-            <a:srgbClr val="FBAE40"/>
-          </p15:clr>
-        </p15:guide>
-        <p15:guide id="3" orient="horz" pos="120">
-          <p15:clr>
-            <a:srgbClr val="FBAE40"/>
-          </p15:clr>
-        </p15:guide>
-        <p15:guide id="4" pos="119">
-          <p15:clr>
-            <a:srgbClr val="FBAE40"/>
-          </p15:clr>
-        </p15:guide>
-        <p15:guide id="5" pos="7559">
-          <p15:clr>
-            <a:srgbClr val="FBAE40"/>
-          </p15:clr>
-        </p15:guide>
-        <p15:guide id="6" orient="horz" pos="4200">
-          <p15:clr>
-            <a:srgbClr val="FBAE40"/>
-          </p15:clr>
-        </p15:guide>
-      </p15:sldGuideLst>
-    </p:ext>
-  </p:extLst>
-</p:sldLayout>
-</file>
-
-<file path=ppt/slideLayouts/slideLayout7.xml><?xml version="1.0" encoding="utf-8"?>
-<p:sldLayout xmlns:a="http://schemas.openxmlformats.org/drawingml/2006/main" xmlns:r="http://schemas.openxmlformats.org/officeDocument/2006/relationships" xmlns:p="http://schemas.openxmlformats.org/presentationml/2006/main" preserve="1" userDrawn="1">
-  <p:cSld name="Agenda">
-    <p:bg>
-      <p:bgPr>
-        <a:solidFill>
-          <a:srgbClr val="101411"/>
-        </a:solidFill>
-        <a:effectLst/>
-      </p:bgPr>
-    </p:bg>
-    <p:spTree>
-      <p:nvGrpSpPr>
-        <p:cNvPr id="1" name=""/>
-        <p:cNvGrpSpPr/>
-        <p:nvPr/>
-      </p:nvGrpSpPr>
-      <p:grpSpPr>
-        <a:xfrm>
-          <a:off x="0" y="0"/>
-          <a:ext cx="0" cy="0"/>
-          <a:chOff x="0" y="0"/>
-          <a:chExt cx="0" cy="0"/>
-        </a:xfrm>
-      </p:grpSpPr>
-      <p:sp>
-        <p:nvSpPr>
-          <p:cNvPr id="2" name="Text Placeholder 2">
-            <a:extLst>
-              <a:ext uri="{FF2B5EF4-FFF2-40B4-BE49-F238E27FC236}">
-                <a16:creationId xmlns:a16="http://schemas.microsoft.com/office/drawing/2014/main" id="{93A06B34-F03E-5DC7-2F93-8740C8F86415}"/>
-              </a:ext>
-            </a:extLst>
-          </p:cNvPr>
-          <p:cNvSpPr>
-            <a:spLocks noGrp="1"/>
-          </p:cNvSpPr>
-          <p:nvPr>
-            <p:ph type="body" sz="quarter" idx="11" hasCustomPrompt="1"/>
-          </p:nvPr>
-        </p:nvSpPr>
-        <p:spPr>
-          <a:xfrm>
-            <a:off x="4404700" y="318247"/>
-            <a:ext cx="726126" cy="5804124"/>
-          </a:xfrm>
-          <a:prstGeom prst="rect">
-            <a:avLst/>
-          </a:prstGeom>
-        </p:spPr>
-        <p:txBody>
-          <a:bodyPr/>
-          <a:lstStyle>
-            <a:lvl1pPr>
-              <a:defRPr sz="2799" b="0" i="0">
-                <a:solidFill>
-                  <a:schemeClr val="bg2"/>
-                </a:solidFill>
-                <a:latin typeface="Mona Sans Display" pitchFamily="2" charset="77"/>
-                <a:cs typeface="Mona Sans Display" pitchFamily="2" charset="77"/>
-              </a:defRPr>
-            </a:lvl1pPr>
-          </a:lstStyle>
-          <a:p>
-            <a:pPr lvl="0"/>
-            <a:r>
-              <a:rPr lang="en-US" dirty="0"/>
-              <a:t>01</a:t>
-            </a:r>
-          </a:p>
-          <a:p>
-            <a:pPr lvl="0"/>
-            <a:r>
-              <a:rPr lang="en-US" dirty="0"/>
-              <a:t>02</a:t>
-            </a:r>
-          </a:p>
-          <a:p>
-            <a:pPr lvl="0"/>
-            <a:r>
-              <a:rPr lang="en-US" dirty="0"/>
-              <a:t>03</a:t>
-            </a:r>
-          </a:p>
-          <a:p>
-            <a:pPr lvl="0"/>
-            <a:r>
-              <a:rPr lang="en-US" dirty="0"/>
-              <a:t>04</a:t>
-            </a:r>
-          </a:p>
-          <a:p>
-            <a:pPr lvl="0"/>
-            <a:r>
-              <a:rPr lang="en-US" dirty="0"/>
-              <a:t>05</a:t>
-            </a:r>
-          </a:p>
-          <a:p>
-            <a:pPr lvl="0"/>
-            <a:r>
-              <a:rPr lang="en-US" dirty="0"/>
-              <a:t>06</a:t>
-            </a:r>
-          </a:p>
-          <a:p>
-            <a:pPr lvl="0"/>
-            <a:r>
-              <a:rPr lang="en-US" dirty="0"/>
-              <a:t>07</a:t>
-            </a:r>
-          </a:p>
-          <a:p>
-            <a:pPr lvl="0"/>
-            <a:r>
-              <a:rPr lang="en-US" dirty="0"/>
-              <a:t>08</a:t>
-            </a:r>
-          </a:p>
-          <a:p>
-            <a:pPr lvl="0"/>
-            <a:r>
-              <a:rPr lang="en-US" dirty="0"/>
-              <a:t>09</a:t>
-            </a:r>
-          </a:p>
-        </p:txBody>
-      </p:sp>
-      <p:sp>
-        <p:nvSpPr>
-          <p:cNvPr id="3" name="Text Placeholder 2">
-            <a:extLst>
-              <a:ext uri="{FF2B5EF4-FFF2-40B4-BE49-F238E27FC236}">
-                <a16:creationId xmlns:a16="http://schemas.microsoft.com/office/drawing/2014/main" id="{00329222-7B60-0287-B5CD-B9A22C449836}"/>
-              </a:ext>
-            </a:extLst>
-          </p:cNvPr>
-          <p:cNvSpPr>
-            <a:spLocks noGrp="1"/>
-          </p:cNvSpPr>
-          <p:nvPr>
-            <p:ph type="body" sz="quarter" idx="12" hasCustomPrompt="1"/>
-          </p:nvPr>
-        </p:nvSpPr>
-        <p:spPr>
-          <a:xfrm>
-            <a:off x="5130826" y="318247"/>
-            <a:ext cx="6650234" cy="5804124"/>
-          </a:xfrm>
-          <a:prstGeom prst="rect">
-            <a:avLst/>
-          </a:prstGeom>
-        </p:spPr>
-        <p:txBody>
-          <a:bodyPr/>
-          <a:lstStyle>
-            <a:lvl1pPr marL="0" marR="0" indent="0" algn="l" defTabSz="914034" rtl="0" eaLnBrk="1" fontAlgn="auto" latinLnBrk="0" hangingPunct="1">
-              <a:lnSpc>
-                <a:spcPct val="90000"/>
-              </a:lnSpc>
-              <a:spcBef>
-                <a:spcPts val="1000"/>
-              </a:spcBef>
-              <a:spcAft>
-                <a:spcPts val="0"/>
-              </a:spcAft>
-              <a:buClrTx/>
-              <a:buSzTx/>
-              <a:buFont typeface="Arial" panose="020B0604020202020204" pitchFamily="34" charset="0"/>
-              <a:buNone/>
-              <a:tabLst/>
-              <a:defRPr sz="2799" b="0" i="0">
-                <a:solidFill>
-                  <a:schemeClr val="tx1"/>
-                </a:solidFill>
-                <a:latin typeface="Mona Sans Display" pitchFamily="2" charset="77"/>
-                <a:cs typeface="Mona Sans Display" pitchFamily="2" charset="77"/>
-              </a:defRPr>
-            </a:lvl1pPr>
-          </a:lstStyle>
-          <a:p>
-            <a:pPr lvl="0"/>
-            <a:r>
-              <a:rPr lang="en-US" dirty="0"/>
-              <a:t>Section title</a:t>
-            </a:r>
-          </a:p>
-          <a:p>
-            <a:pPr lvl="0"/>
-            <a:r>
-              <a:rPr lang="en-US" dirty="0"/>
-              <a:t>Section title </a:t>
-            </a:r>
-          </a:p>
-          <a:p>
-            <a:pPr lvl="0"/>
-            <a:r>
-              <a:rPr lang="en-US" dirty="0"/>
-              <a:t>Section title</a:t>
-            </a:r>
-          </a:p>
-          <a:p>
-            <a:pPr lvl="0"/>
-            <a:r>
-              <a:rPr lang="en-US" dirty="0"/>
-              <a:t>Section title</a:t>
-            </a:r>
-          </a:p>
-          <a:p>
-            <a:pPr lvl="0"/>
-            <a:r>
-              <a:rPr lang="en-US" dirty="0"/>
-              <a:t>Section title</a:t>
-            </a:r>
-          </a:p>
-          <a:p>
-            <a:pPr marL="0" marR="0" lvl="0" indent="0" algn="l" defTabSz="914034" rtl="0" eaLnBrk="1" fontAlgn="auto" latinLnBrk="0" hangingPunct="1">
-              <a:lnSpc>
-                <a:spcPct val="90000"/>
-              </a:lnSpc>
-              <a:spcBef>
-                <a:spcPts val="1000"/>
-              </a:spcBef>
-              <a:spcAft>
-                <a:spcPts val="0"/>
-              </a:spcAft>
-              <a:buClrTx/>
-              <a:buSzTx/>
-              <a:buFont typeface="Arial" panose="020B0604020202020204" pitchFamily="34" charset="0"/>
-              <a:buNone/>
-              <a:tabLst/>
-              <a:defRPr/>
-            </a:pPr>
-            <a:r>
-              <a:rPr lang="en-US" dirty="0"/>
-              <a:t>Section title </a:t>
-            </a:r>
-          </a:p>
-          <a:p>
-            <a:pPr marL="0" marR="0" lvl="0" indent="0" algn="l" defTabSz="914034" rtl="0" eaLnBrk="1" fontAlgn="auto" latinLnBrk="0" hangingPunct="1">
-              <a:lnSpc>
-                <a:spcPct val="90000"/>
-              </a:lnSpc>
-              <a:spcBef>
-                <a:spcPts val="1000"/>
-              </a:spcBef>
-              <a:spcAft>
-                <a:spcPts val="0"/>
-              </a:spcAft>
-              <a:buClrTx/>
-              <a:buSzTx/>
-              <a:buFont typeface="Arial" panose="020B0604020202020204" pitchFamily="34" charset="0"/>
-              <a:buNone/>
-              <a:tabLst/>
-              <a:defRPr/>
-            </a:pPr>
-            <a:r>
-              <a:rPr lang="en-US" dirty="0"/>
-              <a:t>Section title </a:t>
-            </a:r>
-          </a:p>
-          <a:p>
-            <a:pPr marL="0" marR="0" lvl="0" indent="0" algn="l" defTabSz="914034" rtl="0" eaLnBrk="1" fontAlgn="auto" latinLnBrk="0" hangingPunct="1">
-              <a:lnSpc>
-                <a:spcPct val="90000"/>
-              </a:lnSpc>
-              <a:spcBef>
-                <a:spcPts val="1000"/>
-              </a:spcBef>
-              <a:spcAft>
-                <a:spcPts val="0"/>
-              </a:spcAft>
-              <a:buClrTx/>
-              <a:buSzTx/>
-              <a:buFont typeface="Arial" panose="020B0604020202020204" pitchFamily="34" charset="0"/>
-              <a:buNone/>
-              <a:tabLst/>
-              <a:defRPr/>
-            </a:pPr>
-            <a:r>
-              <a:rPr lang="en-US" dirty="0"/>
-              <a:t>Section title</a:t>
-            </a:r>
-          </a:p>
-          <a:p>
-            <a:pPr marL="0" marR="0" lvl="0" indent="0" algn="l" defTabSz="914034" rtl="0" eaLnBrk="1" fontAlgn="auto" latinLnBrk="0" hangingPunct="1">
-              <a:lnSpc>
-                <a:spcPct val="90000"/>
-              </a:lnSpc>
-              <a:spcBef>
-                <a:spcPts val="1000"/>
-              </a:spcBef>
-              <a:spcAft>
-                <a:spcPts val="0"/>
-              </a:spcAft>
-              <a:buClrTx/>
-              <a:buSzTx/>
-              <a:buFont typeface="Arial" panose="020B0604020202020204" pitchFamily="34" charset="0"/>
-              <a:buNone/>
-              <a:tabLst/>
-              <a:defRPr/>
-            </a:pPr>
-            <a:r>
-              <a:rPr lang="en-US" dirty="0"/>
-              <a:t>Section title  </a:t>
-            </a:r>
-          </a:p>
-          <a:p>
-            <a:pPr lvl="0"/>
-            <a:endParaRPr lang="en-US" dirty="0"/>
-          </a:p>
-        </p:txBody>
-      </p:sp>
-      <p:sp>
-        <p:nvSpPr>
-          <p:cNvPr id="7" name="Rectangle 6">
-            <a:extLst>
-              <a:ext uri="{FF2B5EF4-FFF2-40B4-BE49-F238E27FC236}">
-                <a16:creationId xmlns:a16="http://schemas.microsoft.com/office/drawing/2014/main" id="{661974D1-2B3B-9B4D-272E-11CF159EBA96}"/>
-              </a:ext>
-            </a:extLst>
-          </p:cNvPr>
-          <p:cNvSpPr/>
-          <p:nvPr userDrawn="1"/>
-        </p:nvSpPr>
-        <p:spPr>
-          <a:xfrm>
-            <a:off x="4075384" y="-2"/>
-            <a:ext cx="9144" cy="6455440"/>
-          </a:xfrm>
-          <a:prstGeom prst="rect">
-            <a:avLst/>
-          </a:prstGeom>
-          <a:solidFill>
-            <a:srgbClr val="909692"/>
-          </a:solidFill>
-          <a:ln>
-            <a:noFill/>
-          </a:ln>
-        </p:spPr>
-        <p:style>
-          <a:lnRef idx="2">
-            <a:schemeClr val="accent1">
-              <a:shade val="15000"/>
-            </a:schemeClr>
-          </a:lnRef>
-          <a:fillRef idx="1">
-            <a:schemeClr val="accent1"/>
-          </a:fillRef>
-          <a:effectRef idx="0">
-            <a:schemeClr val="accent1"/>
-          </a:effectRef>
-          <a:fontRef idx="minor">
-            <a:schemeClr val="lt1"/>
-          </a:fontRef>
-        </p:style>
-        <p:txBody>
-          <a:bodyPr rtlCol="0" anchor="ctr"/>
-          <a:lstStyle/>
-          <a:p>
-            <a:pPr algn="ctr"/>
-            <a:endParaRPr lang="en-US"/>
-          </a:p>
-        </p:txBody>
-      </p:sp>
-      <p:sp>
-        <p:nvSpPr>
-          <p:cNvPr id="16" name="TextBox 15">
-            <a:extLst>
-              <a:ext uri="{FF2B5EF4-FFF2-40B4-BE49-F238E27FC236}">
-                <a16:creationId xmlns:a16="http://schemas.microsoft.com/office/drawing/2014/main" id="{8F169222-62F0-2EFF-01A8-8D6A3B1B695C}"/>
-              </a:ext>
-            </a:extLst>
-          </p:cNvPr>
-          <p:cNvSpPr txBox="1"/>
-          <p:nvPr userDrawn="1"/>
-        </p:nvSpPr>
-        <p:spPr>
-          <a:xfrm>
-            <a:off x="407766" y="318247"/>
-            <a:ext cx="3250890" cy="1996572"/>
-          </a:xfrm>
-          <a:prstGeom prst="rect">
-            <a:avLst/>
-          </a:prstGeom>
-          <a:noFill/>
-        </p:spPr>
-        <p:txBody>
-          <a:bodyPr wrap="none" lIns="0" tIns="0" rIns="0" bIns="0" rtlCol="0">
-            <a:spAutoFit/>
-          </a:bodyPr>
-          <a:lstStyle/>
-          <a:p>
-            <a:pPr>
-              <a:lnSpc>
-                <a:spcPct val="90000"/>
-              </a:lnSpc>
-            </a:pPr>
-            <a:r>
-              <a:rPr lang="en-US" sz="6000" spc="0" dirty="0">
-                <a:latin typeface="Mona Sans Display" pitchFamily="2" charset="77"/>
-                <a:cs typeface="Mona Sans Display" pitchFamily="2" charset="77"/>
-              </a:rPr>
-              <a:t>Session</a:t>
-            </a:r>
-            <a:br>
-              <a:rPr lang="en-US" sz="6000" spc="0" dirty="0">
-                <a:latin typeface="Mona Sans Display" pitchFamily="2" charset="77"/>
-                <a:cs typeface="Mona Sans Display" pitchFamily="2" charset="77"/>
-              </a:rPr>
-            </a:br>
-            <a:r>
-              <a:rPr lang="en-US" sz="6000" spc="0" dirty="0">
-                <a:solidFill>
-                  <a:schemeClr val="bg2"/>
-                </a:solidFill>
-                <a:latin typeface="Mona Sans Display" pitchFamily="2" charset="77"/>
-                <a:cs typeface="Mona Sans Display" pitchFamily="2" charset="77"/>
-              </a:rPr>
-              <a:t>Agenda</a:t>
-            </a:r>
-          </a:p>
-        </p:txBody>
-      </p:sp>
-      <p:sp>
-        <p:nvSpPr>
-          <p:cNvPr id="25" name="Rectangle 24">
-            <a:extLst>
-              <a:ext uri="{FF2B5EF4-FFF2-40B4-BE49-F238E27FC236}">
-                <a16:creationId xmlns:a16="http://schemas.microsoft.com/office/drawing/2014/main" id="{D18BEDA9-9E4A-4AB3-2AC5-BA36C010DBBB}"/>
-              </a:ext>
-            </a:extLst>
-          </p:cNvPr>
-          <p:cNvSpPr>
-            <a:spLocks noGrp="1" noRot="1" noMove="1" noResize="1" noEditPoints="1" noAdjustHandles="1" noChangeArrowheads="1" noChangeShapeType="1"/>
-          </p:cNvSpPr>
-          <p:nvPr userDrawn="1"/>
-        </p:nvSpPr>
-        <p:spPr>
-          <a:xfrm>
-            <a:off x="-63" y="6437150"/>
-            <a:ext cx="12188952" cy="18288"/>
-          </a:xfrm>
-          <a:prstGeom prst="rect">
-            <a:avLst/>
-          </a:prstGeom>
-          <a:solidFill>
-            <a:schemeClr val="accent4"/>
-          </a:solidFill>
-          <a:ln>
-            <a:noFill/>
-          </a:ln>
-        </p:spPr>
-        <p:style>
-          <a:lnRef idx="2">
-            <a:schemeClr val="accent1">
-              <a:shade val="15000"/>
-            </a:schemeClr>
-          </a:lnRef>
-          <a:fillRef idx="1">
-            <a:schemeClr val="accent1"/>
-          </a:fillRef>
-          <a:effectRef idx="0">
-            <a:schemeClr val="accent1"/>
-          </a:effectRef>
-          <a:fontRef idx="minor">
-            <a:schemeClr val="lt1"/>
-          </a:fontRef>
-        </p:style>
-        <p:txBody>
-          <a:bodyPr rtlCol="0" anchor="ctr"/>
-          <a:lstStyle/>
-          <a:p>
-            <a:pPr algn="ctr"/>
-            <a:endParaRPr lang="en-US"/>
-          </a:p>
-        </p:txBody>
-      </p:sp>
-      <p:sp>
-        <p:nvSpPr>
-          <p:cNvPr id="26" name="Rectangle 25">
-            <a:extLst>
-              <a:ext uri="{FF2B5EF4-FFF2-40B4-BE49-F238E27FC236}">
-                <a16:creationId xmlns:a16="http://schemas.microsoft.com/office/drawing/2014/main" id="{848B612C-5E67-5414-731A-C9339B410D72}"/>
-              </a:ext>
-            </a:extLst>
-          </p:cNvPr>
-          <p:cNvSpPr>
-            <a:spLocks noGrp="1" noRot="1" noMove="1" noResize="1" noEditPoints="1" noAdjustHandles="1" noChangeArrowheads="1" noChangeShapeType="1"/>
-          </p:cNvSpPr>
-          <p:nvPr userDrawn="1"/>
-        </p:nvSpPr>
-        <p:spPr>
-          <a:xfrm>
-            <a:off x="11781917" y="6455664"/>
-            <a:ext cx="9144" cy="402336"/>
-          </a:xfrm>
-          <a:prstGeom prst="rect">
-            <a:avLst/>
-          </a:prstGeom>
-          <a:solidFill>
-            <a:srgbClr val="909692"/>
-          </a:solidFill>
-          <a:ln>
-            <a:noFill/>
-          </a:ln>
-        </p:spPr>
-        <p:style>
-          <a:lnRef idx="2">
-            <a:schemeClr val="accent1">
-              <a:shade val="15000"/>
-            </a:schemeClr>
-          </a:lnRef>
-          <a:fillRef idx="1">
-            <a:schemeClr val="accent1"/>
-          </a:fillRef>
-          <a:effectRef idx="0">
-            <a:schemeClr val="accent1"/>
-          </a:effectRef>
-          <a:fontRef idx="minor">
-            <a:schemeClr val="lt1"/>
-          </a:fontRef>
-        </p:style>
-        <p:txBody>
-          <a:bodyPr rtlCol="0" anchor="ctr"/>
-          <a:lstStyle/>
-          <a:p>
-            <a:pPr algn="ctr"/>
-            <a:endParaRPr lang="en-US"/>
-          </a:p>
-        </p:txBody>
-      </p:sp>
-      <p:pic>
-        <p:nvPicPr>
-          <p:cNvPr id="27" name="Graphic 26">
-            <a:extLst>
-              <a:ext uri="{FF2B5EF4-FFF2-40B4-BE49-F238E27FC236}">
-                <a16:creationId xmlns:a16="http://schemas.microsoft.com/office/drawing/2014/main" id="{1A91557B-968A-5EC0-CAFB-09897FC08F54}"/>
-              </a:ext>
-              <a:ext uri="{C183D7F6-B498-43B3-948B-1728B52AA6E4}">
-                <adec:decorative xmlns:adec="http://schemas.microsoft.com/office/drawing/2017/decorative" val="1"/>
-              </a:ext>
-            </a:extLst>
-          </p:cNvPr>
-          <p:cNvPicPr>
-            <a:picLocks noGrp="1" noRot="1" noMove="1" noResize="1" noEditPoints="1" noAdjustHandles="1" noChangeArrowheads="1" noChangeShapeType="1" noCrop="1"/>
-          </p:cNvPicPr>
-          <p:nvPr userDrawn="1"/>
-        </p:nvPicPr>
-        <p:blipFill>
-          <a:blip>
-            <a:extLst>
-              <a:ext uri="{96DAC541-7B7A-43D3-8B79-37D633B846F1}">
-                <asvg:svgBlip xmlns:asvg="http://schemas.microsoft.com/office/drawing/2016/SVG/main" r:embed="rId2"/>
-              </a:ext>
-            </a:extLst>
-          </a:blip>
-          <a:stretch>
-            <a:fillRect/>
-          </a:stretch>
-        </p:blipFill>
-        <p:spPr>
-          <a:xfrm>
-            <a:off x="11859825" y="6530993"/>
-            <a:ext cx="260299" cy="251679"/>
-          </a:xfrm>
-          <a:prstGeom prst="rect">
-            <a:avLst/>
-          </a:prstGeom>
-        </p:spPr>
-      </p:pic>
-      <p:sp>
-        <p:nvSpPr>
-          <p:cNvPr id="28" name="Text Placeholder 13">
-            <a:extLst>
-              <a:ext uri="{FF2B5EF4-FFF2-40B4-BE49-F238E27FC236}">
-                <a16:creationId xmlns:a16="http://schemas.microsoft.com/office/drawing/2014/main" id="{73D074C2-03EF-908D-252E-5ED8D14F44A3}"/>
-              </a:ext>
-            </a:extLst>
-          </p:cNvPr>
-          <p:cNvSpPr>
-            <a:spLocks noGrp="1" noRot="1" noMove="1" noResize="1" noEditPoints="1" noAdjustHandles="1" noChangeArrowheads="1" noChangeShapeType="1"/>
-          </p:cNvSpPr>
-          <p:nvPr>
-            <p:ph type="body" sz="quarter" idx="10" hasCustomPrompt="1"/>
-          </p:nvPr>
-        </p:nvSpPr>
-        <p:spPr>
-          <a:xfrm>
-            <a:off x="188913" y="6595277"/>
-            <a:ext cx="11495038" cy="123111"/>
-          </a:xfrm>
-          <a:prstGeom prst="rect">
-            <a:avLst/>
-          </a:prstGeom>
-        </p:spPr>
-        <p:txBody>
-          <a:bodyPr lIns="0" tIns="0" rIns="0" bIns="0" anchor="ctr"/>
-          <a:lstStyle>
-            <a:lvl1pPr algn="r">
-              <a:defRPr sz="800" cap="all" baseline="0">
-                <a:solidFill>
-                  <a:schemeClr val="bg2"/>
-                </a:solidFill>
-                <a:latin typeface="Mona Sans Mono" pitchFamily="2" charset="77"/>
-                <a:cs typeface="Mona Sans Mono" pitchFamily="2" charset="77"/>
-              </a:defRPr>
-            </a:lvl1pPr>
-          </a:lstStyle>
-          <a:p>
-            <a:pPr lvl="0"/>
-            <a:r>
-              <a:rPr lang="en-US" dirty="0"/>
-              <a:t>OPTIONAL</a:t>
-            </a:r>
-          </a:p>
-        </p:txBody>
-      </p:sp>
-    </p:spTree>
-    <p:extLst>
-      <p:ext uri="{BB962C8B-B14F-4D97-AF65-F5344CB8AC3E}">
-        <p14:creationId xmlns:p14="http://schemas.microsoft.com/office/powerpoint/2010/main" val="2375681114"/>
-      </p:ext>
-    </p:extLst>
-  </p:cSld>
-  <p:clrMapOvr>
-    <a:masterClrMapping/>
-  </p:clrMapOvr>
-  <p:extLst>
-    <p:ext uri="{DCECCB84-F9BA-43D5-87BE-67443E8EF086}">
-      <p15:sldGuideLst xmlns:p15="http://schemas.microsoft.com/office/powerpoint/2012/main">
-        <p15:guide id="1" orient="horz" pos="2160" userDrawn="1">
-          <p15:clr>
-            <a:srgbClr val="FBAE40"/>
-          </p15:clr>
-        </p15:guide>
-        <p15:guide id="2" pos="3839" userDrawn="1">
-          <p15:clr>
-            <a:srgbClr val="FBAE40"/>
-          </p15:clr>
-        </p15:guide>
-      </p15:sldGuideLst>
-    </p:ext>
-  </p:extLst>
-</p:sldLayout>
-</file>
-
-<file path=ppt/slideLayouts/slideLayout8.xml><?xml version="1.0" encoding="utf-8"?>
-<p:sldLayout xmlns:a="http://schemas.openxmlformats.org/drawingml/2006/main" xmlns:r="http://schemas.openxmlformats.org/officeDocument/2006/relationships" xmlns:p="http://schemas.openxmlformats.org/presentationml/2006/main" preserve="1" userDrawn="1">
-  <p:cSld name="Section">
-    <p:bg>
-      <p:bgPr>
-        <a:solidFill>
-          <a:srgbClr val="101411"/>
-        </a:solidFill>
-        <a:effectLst/>
-      </p:bgPr>
-    </p:bg>
-    <p:spTree>
-      <p:nvGrpSpPr>
-        <p:cNvPr id="1" name=""/>
-        <p:cNvGrpSpPr/>
-        <p:nvPr/>
-      </p:nvGrpSpPr>
-      <p:grpSpPr>
-        <a:xfrm>
-          <a:off x="0" y="0"/>
-          <a:ext cx="0" cy="0"/>
-          <a:chOff x="0" y="0"/>
-          <a:chExt cx="0" cy="0"/>
-        </a:xfrm>
-      </p:grpSpPr>
-      <p:sp>
-        <p:nvSpPr>
-          <p:cNvPr id="4" name="Title 1">
-            <a:extLst>
-              <a:ext uri="{FF2B5EF4-FFF2-40B4-BE49-F238E27FC236}">
-                <a16:creationId xmlns:a16="http://schemas.microsoft.com/office/drawing/2014/main" id="{B4439122-4607-B9A2-B0E1-EC68EC513EDD}"/>
-              </a:ext>
-            </a:extLst>
-          </p:cNvPr>
-          <p:cNvSpPr>
-            <a:spLocks noGrp="1"/>
-          </p:cNvSpPr>
-          <p:nvPr>
-            <p:ph type="ctrTitle" hasCustomPrompt="1"/>
-          </p:nvPr>
-        </p:nvSpPr>
-        <p:spPr>
-          <a:xfrm>
-            <a:off x="397260" y="419100"/>
-            <a:ext cx="11384657" cy="5942495"/>
-          </a:xfrm>
-          <a:prstGeom prst="rect">
-            <a:avLst/>
-          </a:prstGeom>
-        </p:spPr>
-        <p:txBody>
-          <a:bodyPr lIns="0" tIns="0" rIns="0" bIns="0" anchor="b">
-            <a:normAutofit/>
-          </a:bodyPr>
-          <a:lstStyle>
-            <a:lvl1pPr algn="l">
-              <a:lnSpc>
-                <a:spcPct val="80000"/>
-              </a:lnSpc>
-              <a:defRPr sz="9600" b="0" i="0">
-                <a:solidFill>
-                  <a:schemeClr val="tx1"/>
-                </a:solidFill>
-                <a:latin typeface="Mona Sans Display" pitchFamily="2" charset="77"/>
-                <a:cs typeface="Mona Sans Display" pitchFamily="2" charset="77"/>
-              </a:defRPr>
-            </a:lvl1pPr>
-          </a:lstStyle>
-          <a:p>
-            <a:r>
-              <a:rPr lang="en-US" dirty="0"/>
-              <a:t>Section name</a:t>
-            </a:r>
-          </a:p>
-        </p:txBody>
-      </p:sp>
-      <p:sp>
-        <p:nvSpPr>
-          <p:cNvPr id="15" name="Rectangle 14">
-            <a:extLst>
-              <a:ext uri="{FF2B5EF4-FFF2-40B4-BE49-F238E27FC236}">
-                <a16:creationId xmlns:a16="http://schemas.microsoft.com/office/drawing/2014/main" id="{A3F0248E-07E8-06F9-9AAF-0C1CD16713FB}"/>
-              </a:ext>
-            </a:extLst>
-          </p:cNvPr>
-          <p:cNvSpPr>
-            <a:spLocks noGrp="1" noRot="1" noMove="1" noResize="1" noEditPoints="1" noAdjustHandles="1" noChangeArrowheads="1" noChangeShapeType="1"/>
-          </p:cNvSpPr>
-          <p:nvPr userDrawn="1"/>
-        </p:nvSpPr>
-        <p:spPr>
-          <a:xfrm>
-            <a:off x="-63" y="6437150"/>
-            <a:ext cx="12188952" cy="18288"/>
-          </a:xfrm>
-          <a:prstGeom prst="rect">
-            <a:avLst/>
-          </a:prstGeom>
-          <a:solidFill>
-            <a:schemeClr val="accent4"/>
-          </a:solidFill>
-          <a:ln>
-            <a:noFill/>
-          </a:ln>
-        </p:spPr>
-        <p:style>
-          <a:lnRef idx="2">
-            <a:schemeClr val="accent1">
-              <a:shade val="15000"/>
-            </a:schemeClr>
-          </a:lnRef>
-          <a:fillRef idx="1">
-            <a:schemeClr val="accent1"/>
-          </a:fillRef>
-          <a:effectRef idx="0">
-            <a:schemeClr val="accent1"/>
-          </a:effectRef>
-          <a:fontRef idx="minor">
-            <a:schemeClr val="lt1"/>
-          </a:fontRef>
-        </p:style>
-        <p:txBody>
-          <a:bodyPr rtlCol="0" anchor="ctr"/>
-          <a:lstStyle/>
-          <a:p>
-            <a:pPr algn="ctr"/>
-            <a:endParaRPr lang="en-US"/>
-          </a:p>
-        </p:txBody>
-      </p:sp>
-      <p:sp>
-        <p:nvSpPr>
-          <p:cNvPr id="16" name="Rectangle 15">
-            <a:extLst>
-              <a:ext uri="{FF2B5EF4-FFF2-40B4-BE49-F238E27FC236}">
-                <a16:creationId xmlns:a16="http://schemas.microsoft.com/office/drawing/2014/main" id="{51BEE7DE-452C-214F-7F38-C14C82A42BDA}"/>
-              </a:ext>
-            </a:extLst>
-          </p:cNvPr>
-          <p:cNvSpPr>
-            <a:spLocks noGrp="1" noRot="1" noMove="1" noResize="1" noEditPoints="1" noAdjustHandles="1" noChangeArrowheads="1" noChangeShapeType="1"/>
-          </p:cNvSpPr>
-          <p:nvPr userDrawn="1"/>
-        </p:nvSpPr>
-        <p:spPr>
-          <a:xfrm>
-            <a:off x="11781917" y="6455664"/>
-            <a:ext cx="9144" cy="402336"/>
-          </a:xfrm>
-          <a:prstGeom prst="rect">
-            <a:avLst/>
-          </a:prstGeom>
-          <a:solidFill>
-            <a:srgbClr val="909692"/>
-          </a:solidFill>
-          <a:ln>
-            <a:noFill/>
-          </a:ln>
-        </p:spPr>
-        <p:style>
-          <a:lnRef idx="2">
-            <a:schemeClr val="accent1">
-              <a:shade val="15000"/>
-            </a:schemeClr>
-          </a:lnRef>
-          <a:fillRef idx="1">
-            <a:schemeClr val="accent1"/>
-          </a:fillRef>
-          <a:effectRef idx="0">
-            <a:schemeClr val="accent1"/>
-          </a:effectRef>
-          <a:fontRef idx="minor">
-            <a:schemeClr val="lt1"/>
-          </a:fontRef>
-        </p:style>
-        <p:txBody>
-          <a:bodyPr rtlCol="0" anchor="ctr"/>
-          <a:lstStyle/>
-          <a:p>
-            <a:pPr algn="ctr"/>
-            <a:endParaRPr lang="en-US"/>
-          </a:p>
-        </p:txBody>
-      </p:sp>
-      <p:pic>
-        <p:nvPicPr>
-          <p:cNvPr id="17" name="Graphic 16">
-            <a:extLst>
-              <a:ext uri="{FF2B5EF4-FFF2-40B4-BE49-F238E27FC236}">
-                <a16:creationId xmlns:a16="http://schemas.microsoft.com/office/drawing/2014/main" id="{D7749530-64E1-E47A-E8E6-06385AE55519}"/>
-              </a:ext>
-              <a:ext uri="{C183D7F6-B498-43B3-948B-1728B52AA6E4}">
-                <adec:decorative xmlns:adec="http://schemas.microsoft.com/office/drawing/2017/decorative" val="1"/>
-              </a:ext>
-            </a:extLst>
-          </p:cNvPr>
-          <p:cNvPicPr>
-            <a:picLocks noGrp="1" noRot="1" noMove="1" noResize="1" noEditPoints="1" noAdjustHandles="1" noChangeArrowheads="1" noChangeShapeType="1" noCrop="1"/>
-          </p:cNvPicPr>
-          <p:nvPr userDrawn="1"/>
-        </p:nvPicPr>
-        <p:blipFill>
-          <a:blip>
-            <a:extLst>
-              <a:ext uri="{96DAC541-7B7A-43D3-8B79-37D633B846F1}">
-                <asvg:svgBlip xmlns:asvg="http://schemas.microsoft.com/office/drawing/2016/SVG/main" r:embed="rId2"/>
-              </a:ext>
-            </a:extLst>
-          </a:blip>
-          <a:stretch>
-            <a:fillRect/>
-          </a:stretch>
-        </p:blipFill>
-        <p:spPr>
-          <a:xfrm>
-            <a:off x="11859825" y="6530993"/>
-            <a:ext cx="260299" cy="251679"/>
-          </a:xfrm>
-          <a:prstGeom prst="rect">
-            <a:avLst/>
-          </a:prstGeom>
-        </p:spPr>
-      </p:pic>
-      <p:sp>
-        <p:nvSpPr>
-          <p:cNvPr id="18" name="Text Placeholder 13">
-            <a:extLst>
-              <a:ext uri="{FF2B5EF4-FFF2-40B4-BE49-F238E27FC236}">
-                <a16:creationId xmlns:a16="http://schemas.microsoft.com/office/drawing/2014/main" id="{47249D01-C24C-14C8-0425-CFAD66343AB4}"/>
-              </a:ext>
-            </a:extLst>
-          </p:cNvPr>
-          <p:cNvSpPr>
-            <a:spLocks noGrp="1" noRot="1" noMove="1" noResize="1" noEditPoints="1" noAdjustHandles="1" noChangeArrowheads="1" noChangeShapeType="1"/>
-          </p:cNvSpPr>
-          <p:nvPr>
-            <p:ph type="body" sz="quarter" idx="10" hasCustomPrompt="1"/>
-          </p:nvPr>
-        </p:nvSpPr>
-        <p:spPr>
-          <a:xfrm>
-            <a:off x="188913" y="6595277"/>
-            <a:ext cx="11495038" cy="123111"/>
-          </a:xfrm>
-          <a:prstGeom prst="rect">
-            <a:avLst/>
-          </a:prstGeom>
-        </p:spPr>
-        <p:txBody>
-          <a:bodyPr lIns="0" tIns="0" rIns="0" bIns="0" anchor="ctr"/>
-          <a:lstStyle>
-            <a:lvl1pPr algn="r">
-              <a:defRPr sz="800" cap="all" baseline="0">
-                <a:solidFill>
-                  <a:schemeClr val="bg2"/>
-                </a:solidFill>
-                <a:latin typeface="Mona Sans Mono" pitchFamily="2" charset="77"/>
-                <a:cs typeface="Mona Sans Mono" pitchFamily="2" charset="77"/>
-              </a:defRPr>
-            </a:lvl1pPr>
-          </a:lstStyle>
-          <a:p>
-            <a:pPr lvl="0"/>
-            <a:r>
-              <a:rPr lang="en-US" dirty="0"/>
-              <a:t>OPTIONAL</a:t>
-            </a:r>
-          </a:p>
-        </p:txBody>
-      </p:sp>
-    </p:spTree>
-    <p:extLst>
-      <p:ext uri="{BB962C8B-B14F-4D97-AF65-F5344CB8AC3E}">
-        <p14:creationId xmlns:p14="http://schemas.microsoft.com/office/powerpoint/2010/main" val="2459713623"/>
-      </p:ext>
-    </p:extLst>
-  </p:cSld>
-  <p:clrMapOvr>
-    <a:masterClrMapping/>
-  </p:clrMapOvr>
-  <p:extLst>
-    <p:ext uri="{DCECCB84-F9BA-43D5-87BE-67443E8EF086}">
-      <p15:sldGuideLst xmlns:p15="http://schemas.microsoft.com/office/powerpoint/2012/main">
-        <p15:guide id="1" orient="horz" pos="2160" userDrawn="1">
-          <p15:clr>
-            <a:srgbClr val="FBAE40"/>
-          </p15:clr>
-        </p15:guide>
-        <p15:guide id="2" pos="3839" userDrawn="1">
-          <p15:clr>
-            <a:srgbClr val="FBAE40"/>
-          </p15:clr>
-        </p15:guide>
-      </p15:sldGuideLst>
-    </p:ext>
-  </p:extLst>
-</p:sldLayout>
-</file>
-
-<file path=ppt/slideLayouts/slideLayout9.xml><?xml version="1.0" encoding="utf-8"?>
-<p:sldLayout xmlns:a="http://schemas.openxmlformats.org/drawingml/2006/main" xmlns:r="http://schemas.openxmlformats.org/officeDocument/2006/relationships" xmlns:p="http://schemas.openxmlformats.org/presentationml/2006/main" preserve="1" userDrawn="1">
-  <p:cSld name="Large statement">
-    <p:bg>
-      <p:bgPr>
-        <a:solidFill>
-          <a:srgbClr val="101411"/>
-        </a:solidFill>
-        <a:effectLst/>
-      </p:bgPr>
-    </p:bg>
-    <p:spTree>
-      <p:nvGrpSpPr>
-        <p:cNvPr id="1" name=""/>
-        <p:cNvGrpSpPr/>
-        <p:nvPr/>
-      </p:nvGrpSpPr>
-      <p:grpSpPr>
-        <a:xfrm>
-          <a:off x="0" y="0"/>
-          <a:ext cx="0" cy="0"/>
-          <a:chOff x="0" y="0"/>
-          <a:chExt cx="0" cy="0"/>
-        </a:xfrm>
-      </p:grpSpPr>
-      <p:sp>
-        <p:nvSpPr>
-          <p:cNvPr id="4" name="Title 1">
-            <a:extLst>
-              <a:ext uri="{FF2B5EF4-FFF2-40B4-BE49-F238E27FC236}">
-                <a16:creationId xmlns:a16="http://schemas.microsoft.com/office/drawing/2014/main" id="{B4439122-4607-B9A2-B0E1-EC68EC513EDD}"/>
-              </a:ext>
-            </a:extLst>
-          </p:cNvPr>
-          <p:cNvSpPr>
-            <a:spLocks noGrp="1"/>
-          </p:cNvSpPr>
-          <p:nvPr>
-            <p:ph type="ctrTitle" hasCustomPrompt="1"/>
-          </p:nvPr>
-        </p:nvSpPr>
-        <p:spPr>
-          <a:xfrm>
-            <a:off x="188914" y="638739"/>
-            <a:ext cx="11811000" cy="5580526"/>
-          </a:xfrm>
-          <a:prstGeom prst="rect">
-            <a:avLst/>
-          </a:prstGeom>
-        </p:spPr>
-        <p:txBody>
-          <a:bodyPr anchor="ctr">
-            <a:normAutofit/>
-          </a:bodyPr>
-          <a:lstStyle>
-            <a:lvl1pPr algn="ctr">
-              <a:lnSpc>
-                <a:spcPct val="80000"/>
-              </a:lnSpc>
-              <a:defRPr sz="5998" b="0" i="0">
-                <a:solidFill>
-                  <a:schemeClr val="tx1"/>
-                </a:solidFill>
-                <a:latin typeface="Mona Sans Display" pitchFamily="2" charset="77"/>
-                <a:cs typeface="Mona Sans Display" pitchFamily="2" charset="77"/>
-              </a:defRPr>
-            </a:lvl1pPr>
-          </a:lstStyle>
-          <a:p>
-            <a:r>
-              <a:rPr lang="en-US" dirty="0"/>
-              <a:t>Large Statement</a:t>
-            </a:r>
-          </a:p>
-        </p:txBody>
-      </p:sp>
-      <p:sp>
-        <p:nvSpPr>
-          <p:cNvPr id="2" name="Rectangle 1">
-            <a:extLst>
-              <a:ext uri="{FF2B5EF4-FFF2-40B4-BE49-F238E27FC236}">
-                <a16:creationId xmlns:a16="http://schemas.microsoft.com/office/drawing/2014/main" id="{D15E4003-1D40-7897-1FC6-FF65C90164F0}"/>
-              </a:ext>
-            </a:extLst>
-          </p:cNvPr>
-          <p:cNvSpPr/>
-          <p:nvPr userDrawn="1"/>
-        </p:nvSpPr>
-        <p:spPr>
-          <a:xfrm>
-            <a:off x="-63" y="6437150"/>
-            <a:ext cx="12188952" cy="18288"/>
-          </a:xfrm>
-          <a:prstGeom prst="rect">
-            <a:avLst/>
-          </a:prstGeom>
-          <a:solidFill>
-            <a:schemeClr val="accent4"/>
-          </a:solidFill>
-          <a:ln>
-            <a:noFill/>
-          </a:ln>
-        </p:spPr>
-        <p:style>
-          <a:lnRef idx="2">
-            <a:schemeClr val="accent1">
-              <a:shade val="15000"/>
-            </a:schemeClr>
-          </a:lnRef>
-          <a:fillRef idx="1">
-            <a:schemeClr val="accent1"/>
-          </a:fillRef>
-          <a:effectRef idx="0">
-            <a:schemeClr val="accent1"/>
-          </a:effectRef>
-          <a:fontRef idx="minor">
-            <a:schemeClr val="lt1"/>
-          </a:fontRef>
-        </p:style>
-        <p:txBody>
-          <a:bodyPr rtlCol="0" anchor="ctr"/>
-          <a:lstStyle/>
-          <a:p>
-            <a:pPr algn="ctr"/>
-            <a:endParaRPr lang="en-US"/>
-          </a:p>
-        </p:txBody>
-      </p:sp>
-      <p:sp>
-        <p:nvSpPr>
-          <p:cNvPr id="8" name="Rectangle 7">
-            <a:extLst>
-              <a:ext uri="{FF2B5EF4-FFF2-40B4-BE49-F238E27FC236}">
-                <a16:creationId xmlns:a16="http://schemas.microsoft.com/office/drawing/2014/main" id="{0BE37B27-DEEB-9467-E362-1A2C671792C0}"/>
-              </a:ext>
-            </a:extLst>
-          </p:cNvPr>
-          <p:cNvSpPr/>
-          <p:nvPr userDrawn="1"/>
-        </p:nvSpPr>
-        <p:spPr>
-          <a:xfrm>
-            <a:off x="11781917" y="6455664"/>
-            <a:ext cx="9144" cy="402336"/>
-          </a:xfrm>
-          <a:prstGeom prst="rect">
-            <a:avLst/>
-          </a:prstGeom>
-          <a:solidFill>
-            <a:srgbClr val="909692"/>
-          </a:solidFill>
-          <a:ln>
-            <a:noFill/>
-          </a:ln>
-        </p:spPr>
-        <p:style>
-          <a:lnRef idx="2">
-            <a:schemeClr val="accent1">
-              <a:shade val="15000"/>
-            </a:schemeClr>
-          </a:lnRef>
-          <a:fillRef idx="1">
-            <a:schemeClr val="accent1"/>
-          </a:fillRef>
-          <a:effectRef idx="0">
-            <a:schemeClr val="accent1"/>
-          </a:effectRef>
-          <a:fontRef idx="minor">
-            <a:schemeClr val="lt1"/>
-          </a:fontRef>
-        </p:style>
-        <p:txBody>
-          <a:bodyPr rtlCol="0" anchor="ctr"/>
-          <a:lstStyle/>
-          <a:p>
-            <a:pPr algn="ctr"/>
-            <a:endParaRPr lang="en-US"/>
-          </a:p>
-        </p:txBody>
-      </p:sp>
-      <p:pic>
-        <p:nvPicPr>
-          <p:cNvPr id="9" name="Graphic 8">
-            <a:extLst>
-              <a:ext uri="{FF2B5EF4-FFF2-40B4-BE49-F238E27FC236}">
-                <a16:creationId xmlns:a16="http://schemas.microsoft.com/office/drawing/2014/main" id="{6003487B-C5AC-7790-7D60-2DFC60A19E59}"/>
-              </a:ext>
-              <a:ext uri="{C183D7F6-B498-43B3-948B-1728B52AA6E4}">
-                <adec:decorative xmlns:adec="http://schemas.microsoft.com/office/drawing/2017/decorative" val="1"/>
-              </a:ext>
-            </a:extLst>
-          </p:cNvPr>
-          <p:cNvPicPr/>
-          <p:nvPr userDrawn="1"/>
-        </p:nvPicPr>
-        <p:blipFill>
-          <a:blip>
-            <a:extLst>
-              <a:ext uri="{96DAC541-7B7A-43D3-8B79-37D633B846F1}">
-                <asvg:svgBlip xmlns:asvg="http://schemas.microsoft.com/office/drawing/2016/SVG/main" r:embed="rId2"/>
-              </a:ext>
-            </a:extLst>
-          </a:blip>
-          <a:stretch>
-            <a:fillRect/>
-          </a:stretch>
-        </p:blipFill>
-        <p:spPr>
-          <a:xfrm>
-            <a:off x="11859825" y="6530993"/>
-            <a:ext cx="260299" cy="251679"/>
-          </a:xfrm>
-          <a:prstGeom prst="rect">
-            <a:avLst/>
-          </a:prstGeom>
-        </p:spPr>
-      </p:pic>
-      <p:sp>
-        <p:nvSpPr>
-          <p:cNvPr id="10" name="Text Placeholder 13">
-            <a:extLst>
-              <a:ext uri="{FF2B5EF4-FFF2-40B4-BE49-F238E27FC236}">
-                <a16:creationId xmlns:a16="http://schemas.microsoft.com/office/drawing/2014/main" id="{60E4617F-1087-AA0E-4F82-FDB96276CB8E}"/>
-              </a:ext>
-            </a:extLst>
-          </p:cNvPr>
-          <p:cNvSpPr>
-            <a:spLocks noGrp="1"/>
-          </p:cNvSpPr>
-          <p:nvPr>
-            <p:ph type="body" sz="quarter" idx="10" hasCustomPrompt="1"/>
-          </p:nvPr>
-        </p:nvSpPr>
-        <p:spPr>
-          <a:xfrm>
-            <a:off x="188913" y="6595277"/>
-            <a:ext cx="11495038" cy="123111"/>
-          </a:xfrm>
-          <a:prstGeom prst="rect">
-            <a:avLst/>
-          </a:prstGeom>
-        </p:spPr>
-        <p:txBody>
-          <a:bodyPr lIns="0" tIns="0" rIns="0" bIns="0" anchor="ctr"/>
-          <a:lstStyle>
-            <a:lvl1pPr algn="r">
-              <a:defRPr sz="800" cap="all" baseline="0">
-                <a:solidFill>
-                  <a:schemeClr val="bg2"/>
-                </a:solidFill>
-                <a:latin typeface="Mona Sans Mono" pitchFamily="2" charset="77"/>
-                <a:cs typeface="Mona Sans Mono" pitchFamily="2" charset="77"/>
-              </a:defRPr>
-            </a:lvl1pPr>
-          </a:lstStyle>
-          <a:p>
-            <a:pPr lvl="0"/>
-            <a:r>
-              <a:rPr lang="en-US" dirty="0"/>
-              <a:t>OPTIONAL</a:t>
-            </a:r>
-          </a:p>
-        </p:txBody>
-      </p:sp>
-    </p:spTree>
-    <p:extLst>
-      <p:ext uri="{BB962C8B-B14F-4D97-AF65-F5344CB8AC3E}">
-        <p14:creationId xmlns:p14="http://schemas.microsoft.com/office/powerpoint/2010/main" val="2191561938"/>
-      </p:ext>
-    </p:extLst>
-  </p:cSld>
-  <p:clrMapOvr>
-    <a:masterClrMapping/>
-  </p:clrMapOvr>
-  <p:extLst>
-    <p:ext uri="{DCECCB84-F9BA-43D5-87BE-67443E8EF086}">
-      <p15:sldGuideLst xmlns:p15="http://schemas.microsoft.com/office/powerpoint/2012/main">
-        <p15:guide id="1" orient="horz" pos="2160" userDrawn="1">
-          <p15:clr>
-            <a:srgbClr val="FBAE40"/>
-          </p15:clr>
-        </p15:guide>
-        <p15:guide id="2" pos="3839" userDrawn="1">
-          <p15:clr>
-            <a:srgbClr val="FBAE40"/>
-          </p15:clr>
-        </p15:guide>
-      </p15:sldGuideLst>
-    </p:ext>
-  </p:extLst>
-</p:sldLayout>
-</file>
-
 <file path=ppt/slideMasters/slideMaster1.xml><?xml version="1.0" encoding="utf-8"?>
 <p:sldMaster xmlns:a="http://schemas.openxmlformats.org/drawingml/2006/main" xmlns:r="http://schemas.openxmlformats.org/officeDocument/2006/relationships" xmlns:p="http://schemas.openxmlformats.org/presentationml/2006/main" preserve="1">
   <p:cSld>
@@ -5677,16 +5671,16 @@
   </p:cSld>
   <p:clrMap bg1="dk1" tx1="lt1" bg2="dk2" tx2="lt2" accent1="accent1" accent2="accent2" accent3="accent3" accent4="accent4" accent5="accent5" accent6="accent6" hlink="hlink" folHlink="folHlink"/>
   <p:sldLayoutIdLst>
-    <p:sldLayoutId id="2147483662" r:id="rId7"/>
-    <p:sldLayoutId id="2147483663" r:id="rId8"/>
-    <p:sldLayoutId id="2147483781" r:id="rId9"/>
-    <p:sldLayoutId id="2147483664" r:id="rId10"/>
-    <p:sldLayoutId id="2147483811" r:id="rId24"/>
-    <p:sldLayoutId id="2147483812" r:id="rId25"/>
-    <p:sldLayoutId id="2147483814" r:id="rId27"/>
-    <p:sldLayoutId id="2147483827" r:id="rId40"/>
-    <p:sldLayoutId id="2147483673" r:id="rId44"/>
-    <p:sldLayoutId id="2147483982" r:id="rId52"/>
+    <p:sldLayoutId id="2147483662" r:id="rId1"/>
+    <p:sldLayoutId id="2147483663" r:id="rId2"/>
+    <p:sldLayoutId id="2147483781" r:id="rId3"/>
+    <p:sldLayoutId id="2147483664" r:id="rId4"/>
+    <p:sldLayoutId id="2147483811" r:id="rId5"/>
+    <p:sldLayoutId id="2147483812" r:id="rId6"/>
+    <p:sldLayoutId id="2147483814" r:id="rId7"/>
+    <p:sldLayoutId id="2147483827" r:id="rId8"/>
+    <p:sldLayoutId id="2147483673" r:id="rId9"/>
+    <p:sldLayoutId id="2147483982" r:id="rId10"/>
   </p:sldLayoutIdLst>
   <p:txStyles>
     <p:titleStyle>
@@ -6748,8 +6742,8 @@
 </p:sld>
 </file>
 
-<file path=ppt/slides/slide10.xml><?xml version="1.0" encoding="utf-8"?>
-<p:sld xmlns:a="http://schemas.openxmlformats.org/drawingml/2006/main" xmlns:p="http://schemas.openxmlformats.org/presentationml/2006/main" xmlns:r="http://schemas.openxmlformats.org/officeDocument/2006/relationships">
+<file path=ppt/slides/slide2.xml><?xml version="1.0" encoding="utf-8"?>
+<p:sld xmlns:a="http://schemas.openxmlformats.org/drawingml/2006/main" xmlns:r="http://schemas.openxmlformats.org/officeDocument/2006/relationships" xmlns:p="http://schemas.openxmlformats.org/presentationml/2006/main">
   <p:cSld>
     <p:spTree>
       <p:nvGrpSpPr>
@@ -6757,7 +6751,14 @@
         <p:cNvGrpSpPr/>
         <p:nvPr/>
       </p:nvGrpSpPr>
-      <p:grpSpPr/>
+      <p:grpSpPr>
+        <a:xfrm>
+          <a:off x="0" y="0"/>
+          <a:ext cx="0" cy="0"/>
+          <a:chOff x="0" y="0"/>
+          <a:chExt cx="0" cy="0"/>
+        </a:xfrm>
+      </p:grpSpPr>
       <p:sp>
         <p:nvSpPr>
           <p:cNvPr id="2" name="Title 1"/>
@@ -6774,7 +6775,7 @@
           <a:lstStyle/>
           <a:p>
             <a:r>
-              <a:t>The exercises</a:t>
+              <a:t>Meet your AI pair programmer — and learn to build with it.</a:t>
             </a:r>
           </a:p>
         </p:txBody>
@@ -6786,14 +6787,16 @@
             <a:spLocks noGrp="1"/>
           </p:cNvSpPr>
           <p:nvPr>
-            <p:ph type="body" idx="10" sz="quarter"/>
+            <p:ph type="body" sz="quarter" idx="10"/>
           </p:nvPr>
         </p:nvSpPr>
         <p:spPr/>
         <p:txBody>
           <a:bodyPr/>
           <a:lstStyle/>
-          <a:p/>
+          <a:p>
+            <a:endParaRPr/>
+          </a:p>
         </p:txBody>
       </p:sp>
     </p:spTree>
@@ -6804,8 +6807,8 @@
 </p:sld>
 </file>
 
-<file path=ppt/slides/slide11.xml><?xml version="1.0" encoding="utf-8"?>
-<p:sld xmlns:a="http://schemas.openxmlformats.org/drawingml/2006/main" xmlns:p="http://schemas.openxmlformats.org/presentationml/2006/main" xmlns:r="http://schemas.openxmlformats.org/officeDocument/2006/relationships">
+<file path=ppt/slides/slide3.xml><?xml version="1.0" encoding="utf-8"?>
+<p:sld xmlns:a="http://schemas.openxmlformats.org/drawingml/2006/main" xmlns:r="http://schemas.openxmlformats.org/officeDocument/2006/relationships" xmlns:p="http://schemas.openxmlformats.org/presentationml/2006/main">
   <p:cSld>
     <p:spTree>
       <p:nvGrpSpPr>
@@ -6813,7 +6816,60 @@
         <p:cNvGrpSpPr/>
         <p:nvPr/>
       </p:nvGrpSpPr>
-      <p:grpSpPr/>
+      <p:grpSpPr>
+        <a:xfrm>
+          <a:off x="0" y="0"/>
+          <a:ext cx="0" cy="0"/>
+          <a:chOff x="0" y="0"/>
+          <a:chExt cx="0" cy="0"/>
+        </a:xfrm>
+      </p:grpSpPr>
+      <p:sp>
+        <p:nvSpPr>
+          <p:cNvPr id="2" name="Text Placeholder 1"/>
+          <p:cNvSpPr>
+            <a:spLocks noGrp="1"/>
+          </p:cNvSpPr>
+          <p:nvPr>
+            <p:ph type="body" sz="quarter" idx="11"/>
+          </p:nvPr>
+        </p:nvSpPr>
+        <p:spPr/>
+        <p:txBody>
+          <a:bodyPr/>
+          <a:lstStyle/>
+          <a:p>
+            <a:r>
+              <a:t>01</a:t>
+            </a:r>
+          </a:p>
+          <a:p>
+            <a:r>
+              <a:t>02</a:t>
+            </a:r>
+          </a:p>
+          <a:p>
+            <a:r>
+              <a:t>03</a:t>
+            </a:r>
+          </a:p>
+          <a:p>
+            <a:r>
+              <a:t>04</a:t>
+            </a:r>
+          </a:p>
+          <a:p>
+            <a:r>
+              <a:t>05</a:t>
+            </a:r>
+          </a:p>
+          <a:p>
+            <a:r>
+              <a:t>06</a:t>
+            </a:r>
+          </a:p>
+        </p:txBody>
+      </p:sp>
       <p:sp>
         <p:nvSpPr>
           <p:cNvPr id="3" name="Text Placeholder 2"/>
@@ -6821,7 +6877,7 @@
             <a:spLocks noGrp="1"/>
           </p:cNvSpPr>
           <p:nvPr>
-            <p:ph type="body" idx="32" sz="quarter"/>
+            <p:ph type="body" sz="quarter" idx="12"/>
           </p:nvPr>
         </p:nvSpPr>
         <p:spPr/>
@@ -6830,7 +6886,234 @@
           <a:lstStyle/>
           <a:p>
             <a:r>
-              <a:t>Roadmap</a:t>
+              <a:rPr dirty="0"/>
+              <a:t>Setup &amp; Basics</a:t>
+            </a:r>
+          </a:p>
+          <a:p>
+            <a:r>
+              <a:rPr dirty="0"/>
+              <a:t>Comment-to-Code</a:t>
+            </a:r>
+          </a:p>
+          <a:p>
+            <a:r>
+              <a:rPr dirty="0"/>
+              <a:t>Code Completion</a:t>
+            </a:r>
+          </a:p>
+          <a:p>
+            <a:r>
+              <a:rPr dirty="0"/>
+              <a:t>Copilot Chat</a:t>
+            </a:r>
+          </a:p>
+          <a:p>
+            <a:r>
+              <a:rPr dirty="0"/>
+              <a:t>Real-World Project</a:t>
+            </a:r>
+          </a:p>
+          <a:p>
+            <a:r>
+              <a:rPr dirty="0"/>
+              <a:t>Advanced: Agents, Skills &amp; MCP</a:t>
+            </a:r>
+          </a:p>
+        </p:txBody>
+      </p:sp>
+      <p:sp>
+        <p:nvSpPr>
+          <p:cNvPr id="4" name="Text Placeholder 3"/>
+          <p:cNvSpPr>
+            <a:spLocks noGrp="1"/>
+          </p:cNvSpPr>
+          <p:nvPr>
+            <p:ph type="body" sz="quarter" idx="10"/>
+          </p:nvPr>
+        </p:nvSpPr>
+        <p:spPr/>
+        <p:txBody>
+          <a:bodyPr/>
+          <a:lstStyle/>
+          <a:p>
+            <a:endParaRPr/>
+          </a:p>
+        </p:txBody>
+      </p:sp>
+    </p:spTree>
+  </p:cSld>
+  <p:clrMapOvr>
+    <a:masterClrMapping/>
+  </p:clrMapOvr>
+</p:sld>
+</file>
+
+<file path=ppt/slides/slide4.xml><?xml version="1.0" encoding="utf-8"?>
+<p:sld xmlns:a="http://schemas.openxmlformats.org/drawingml/2006/main" xmlns:r="http://schemas.openxmlformats.org/officeDocument/2006/relationships" xmlns:p="http://schemas.openxmlformats.org/presentationml/2006/main">
+  <p:cSld>
+    <p:spTree>
+      <p:nvGrpSpPr>
+        <p:cNvPr id="1" name=""/>
+        <p:cNvGrpSpPr/>
+        <p:nvPr/>
+      </p:nvGrpSpPr>
+      <p:grpSpPr>
+        <a:xfrm>
+          <a:off x="0" y="0"/>
+          <a:ext cx="0" cy="0"/>
+          <a:chOff x="0" y="0"/>
+          <a:chExt cx="0" cy="0"/>
+        </a:xfrm>
+      </p:grpSpPr>
+      <p:sp>
+        <p:nvSpPr>
+          <p:cNvPr id="2" name="Title 1"/>
+          <p:cNvSpPr>
+            <a:spLocks noGrp="1"/>
+          </p:cNvSpPr>
+          <p:nvPr>
+            <p:ph type="ctrTitle"/>
+          </p:nvPr>
+        </p:nvSpPr>
+        <p:spPr>
+          <a:xfrm>
+            <a:off x="402083" y="2699007"/>
+            <a:ext cx="11384657" cy="1459986"/>
+          </a:xfrm>
+        </p:spPr>
+        <p:txBody>
+          <a:bodyPr/>
+          <a:lstStyle/>
+          <a:p>
+            <a:r>
+              <a:rPr dirty="0"/>
+              <a:t>Before you start</a:t>
+            </a:r>
+          </a:p>
+        </p:txBody>
+      </p:sp>
+      <p:sp>
+        <p:nvSpPr>
+          <p:cNvPr id="3" name="Text Placeholder 2"/>
+          <p:cNvSpPr>
+            <a:spLocks noGrp="1"/>
+          </p:cNvSpPr>
+          <p:nvPr>
+            <p:ph type="body" sz="quarter" idx="10"/>
+          </p:nvPr>
+        </p:nvSpPr>
+        <p:spPr/>
+        <p:txBody>
+          <a:bodyPr/>
+          <a:lstStyle/>
+          <a:p>
+            <a:endParaRPr/>
+          </a:p>
+        </p:txBody>
+      </p:sp>
+    </p:spTree>
+  </p:cSld>
+  <p:clrMapOvr>
+    <a:masterClrMapping/>
+  </p:clrMapOvr>
+</p:sld>
+</file>
+
+<file path=ppt/slides/slide5.xml><?xml version="1.0" encoding="utf-8"?>
+<p:sld xmlns:a="http://schemas.openxmlformats.org/drawingml/2006/main" xmlns:r="http://schemas.openxmlformats.org/officeDocument/2006/relationships" xmlns:p="http://schemas.openxmlformats.org/presentationml/2006/main">
+  <p:cSld>
+    <p:spTree>
+      <p:nvGrpSpPr>
+        <p:cNvPr id="1" name=""/>
+        <p:cNvGrpSpPr/>
+        <p:nvPr/>
+      </p:nvGrpSpPr>
+      <p:grpSpPr>
+        <a:xfrm>
+          <a:off x="0" y="0"/>
+          <a:ext cx="0" cy="0"/>
+          <a:chOff x="0" y="0"/>
+          <a:chExt cx="0" cy="0"/>
+        </a:xfrm>
+      </p:grpSpPr>
+      <p:sp>
+        <p:nvSpPr>
+          <p:cNvPr id="2" name="Content Placeholder 1"/>
+          <p:cNvSpPr>
+            <a:spLocks noGrp="1"/>
+          </p:cNvSpPr>
+          <p:nvPr>
+            <p:ph idx="1"/>
+          </p:nvPr>
+        </p:nvSpPr>
+        <p:spPr>
+          <a:xfrm>
+            <a:off x="411477" y="2402017"/>
+            <a:ext cx="11379581" cy="2169984"/>
+          </a:xfrm>
+        </p:spPr>
+        <p:txBody>
+          <a:bodyPr/>
+          <a:lstStyle/>
+          <a:p>
+            <a:r>
+              <a:rPr dirty="0"/>
+              <a:t>GitHub Copilot license activated</a:t>
+            </a:r>
+          </a:p>
+          <a:p>
+            <a:r>
+              <a:rPr dirty="0"/>
+              <a:t>VS Code with the GitHub Copilot extension</a:t>
+            </a:r>
+          </a:p>
+          <a:p>
+            <a:r>
+              <a:rPr dirty="0"/>
+              <a:t>Node.js 20+ and Git installed and configured</a:t>
+            </a:r>
+          </a:p>
+          <a:p>
+            <a:r>
+              <a:rPr dirty="0"/>
+              <a:t>Clone the repo, then run </a:t>
+            </a:r>
+            <a:r>
+              <a:rPr dirty="0" err="1"/>
+              <a:t>npm</a:t>
+            </a:r>
+            <a:r>
+              <a:rPr dirty="0"/>
+              <a:t> install</a:t>
+            </a:r>
+          </a:p>
+          <a:p>
+            <a:r>
+              <a:rPr dirty="0"/>
+              <a:t>Verify the Copilot icon appears in the status bar</a:t>
+            </a:r>
+          </a:p>
+        </p:txBody>
+      </p:sp>
+      <p:sp>
+        <p:nvSpPr>
+          <p:cNvPr id="3" name="Text Placeholder 2"/>
+          <p:cNvSpPr>
+            <a:spLocks noGrp="1"/>
+          </p:cNvSpPr>
+          <p:nvPr>
+            <p:ph type="body" sz="quarter" idx="32"/>
+          </p:nvPr>
+        </p:nvSpPr>
+        <p:spPr/>
+        <p:txBody>
+          <a:bodyPr/>
+          <a:lstStyle/>
+          <a:p>
+            <a:r>
+              <a:rPr dirty="0"/>
+              <a:t>Setup</a:t>
             </a:r>
           </a:p>
         </p:txBody>
@@ -6845,13 +7128,19 @@
             <p:ph type="ctrTitle"/>
           </p:nvPr>
         </p:nvSpPr>
-        <p:spPr/>
+        <p:spPr>
+          <a:xfrm>
+            <a:off x="411478" y="1487548"/>
+            <a:ext cx="11379581" cy="882013"/>
+          </a:xfrm>
+        </p:spPr>
         <p:txBody>
           <a:bodyPr/>
           <a:lstStyle/>
           <a:p>
             <a:r>
-              <a:t>Your workshop journey</a:t>
+              <a:rPr dirty="0"/>
+              <a:t>Prerequisites &amp; setup</a:t>
             </a:r>
           </a:p>
         </p:txBody>
@@ -6863,14 +7152,173 @@
             <a:spLocks noGrp="1"/>
           </p:cNvSpPr>
           <p:nvPr>
-            <p:ph type="body" idx="10" sz="quarter"/>
+            <p:ph type="body" sz="quarter" idx="10"/>
           </p:nvPr>
         </p:nvSpPr>
         <p:spPr/>
         <p:txBody>
           <a:bodyPr/>
           <a:lstStyle/>
-          <a:p/>
+          <a:p>
+            <a:endParaRPr/>
+          </a:p>
+        </p:txBody>
+      </p:sp>
+    </p:spTree>
+  </p:cSld>
+  <p:clrMapOvr>
+    <a:masterClrMapping/>
+  </p:clrMapOvr>
+</p:sld>
+</file>
+
+<file path=ppt/slides/slide6.xml><?xml version="1.0" encoding="utf-8"?>
+<p:sld xmlns:a="http://schemas.openxmlformats.org/drawingml/2006/main" xmlns:r="http://schemas.openxmlformats.org/officeDocument/2006/relationships" xmlns:p="http://schemas.openxmlformats.org/presentationml/2006/main">
+  <p:cSld>
+    <p:spTree>
+      <p:nvGrpSpPr>
+        <p:cNvPr id="1" name=""/>
+        <p:cNvGrpSpPr/>
+        <p:nvPr/>
+      </p:nvGrpSpPr>
+      <p:grpSpPr>
+        <a:xfrm>
+          <a:off x="0" y="0"/>
+          <a:ext cx="0" cy="0"/>
+          <a:chOff x="0" y="0"/>
+          <a:chExt cx="0" cy="0"/>
+        </a:xfrm>
+      </p:grpSpPr>
+      <p:sp>
+        <p:nvSpPr>
+          <p:cNvPr id="2" name="Title 1"/>
+          <p:cNvSpPr>
+            <a:spLocks noGrp="1"/>
+          </p:cNvSpPr>
+          <p:nvPr>
+            <p:ph type="ctrTitle"/>
+          </p:nvPr>
+        </p:nvSpPr>
+        <p:spPr>
+          <a:xfrm>
+            <a:off x="402083" y="2752170"/>
+            <a:ext cx="11384657" cy="1353660"/>
+          </a:xfrm>
+        </p:spPr>
+        <p:txBody>
+          <a:bodyPr/>
+          <a:lstStyle/>
+          <a:p>
+            <a:r>
+              <a:rPr dirty="0"/>
+              <a:t>The exercises</a:t>
+            </a:r>
+          </a:p>
+        </p:txBody>
+      </p:sp>
+      <p:sp>
+        <p:nvSpPr>
+          <p:cNvPr id="3" name="Text Placeholder 2"/>
+          <p:cNvSpPr>
+            <a:spLocks noGrp="1"/>
+          </p:cNvSpPr>
+          <p:nvPr>
+            <p:ph type="body" sz="quarter" idx="10"/>
+          </p:nvPr>
+        </p:nvSpPr>
+        <p:spPr/>
+        <p:txBody>
+          <a:bodyPr/>
+          <a:lstStyle/>
+          <a:p>
+            <a:endParaRPr/>
+          </a:p>
+        </p:txBody>
+      </p:sp>
+    </p:spTree>
+  </p:cSld>
+  <p:clrMapOvr>
+    <a:masterClrMapping/>
+  </p:clrMapOvr>
+</p:sld>
+</file>
+
+<file path=ppt/slides/slide7.xml><?xml version="1.0" encoding="utf-8"?>
+<p:sld xmlns:a="http://schemas.openxmlformats.org/drawingml/2006/main" xmlns:r="http://schemas.openxmlformats.org/officeDocument/2006/relationships" xmlns:p="http://schemas.openxmlformats.org/presentationml/2006/main">
+  <p:cSld>
+    <p:spTree>
+      <p:nvGrpSpPr>
+        <p:cNvPr id="1" name=""/>
+        <p:cNvGrpSpPr/>
+        <p:nvPr/>
+      </p:nvGrpSpPr>
+      <p:grpSpPr>
+        <a:xfrm>
+          <a:off x="0" y="0"/>
+          <a:ext cx="0" cy="0"/>
+          <a:chOff x="0" y="0"/>
+          <a:chExt cx="0" cy="0"/>
+        </a:xfrm>
+      </p:grpSpPr>
+      <p:sp>
+        <p:nvSpPr>
+          <p:cNvPr id="3" name="Text Placeholder 2"/>
+          <p:cNvSpPr>
+            <a:spLocks noGrp="1"/>
+          </p:cNvSpPr>
+          <p:nvPr>
+            <p:ph type="body" sz="quarter" idx="32"/>
+          </p:nvPr>
+        </p:nvSpPr>
+        <p:spPr/>
+        <p:txBody>
+          <a:bodyPr/>
+          <a:lstStyle/>
+          <a:p>
+            <a:r>
+              <a:t>Roadmap</a:t>
+            </a:r>
+          </a:p>
+        </p:txBody>
+      </p:sp>
+      <p:sp>
+        <p:nvSpPr>
+          <p:cNvPr id="4" name="Title 3"/>
+          <p:cNvSpPr>
+            <a:spLocks noGrp="1"/>
+          </p:cNvSpPr>
+          <p:nvPr>
+            <p:ph type="ctrTitle"/>
+          </p:nvPr>
+        </p:nvSpPr>
+        <p:spPr/>
+        <p:txBody>
+          <a:bodyPr/>
+          <a:lstStyle/>
+          <a:p>
+            <a:r>
+              <a:t>Your workshop journey</a:t>
+            </a:r>
+          </a:p>
+        </p:txBody>
+      </p:sp>
+      <p:sp>
+        <p:nvSpPr>
+          <p:cNvPr id="5" name="Text Placeholder 4"/>
+          <p:cNvSpPr>
+            <a:spLocks noGrp="1"/>
+          </p:cNvSpPr>
+          <p:nvPr>
+            <p:ph type="body" sz="quarter" idx="10"/>
+          </p:nvPr>
+        </p:nvSpPr>
+        <p:spPr/>
+        <p:txBody>
+          <a:bodyPr/>
+          <a:lstStyle/>
+          <a:p>
+            <a:endParaRPr/>
+          </a:p>
         </p:txBody>
       </p:sp>
       <p:graphicFrame>
@@ -6892,9 +7340,27 @@
                 <a:tableStyleId>{5C22544A-7EE6-4342-B048-85BDC9FD1C3A}</a:tableStyleId>
               </a:tblPr>
               <a:tblGrid>
-                <a:gridCol w="4779424"/>
-                <a:gridCol w="2048324"/>
-                <a:gridCol w="4551832"/>
+                <a:gridCol w="4779424">
+                  <a:extLst>
+                    <a:ext uri="{9D8B030D-6E8A-4147-A177-3AD203B41FA5}">
+                      <a16:colId xmlns:a16="http://schemas.microsoft.com/office/drawing/2014/main" val="20000"/>
+                    </a:ext>
+                  </a:extLst>
+                </a:gridCol>
+                <a:gridCol w="2048324">
+                  <a:extLst>
+                    <a:ext uri="{9D8B030D-6E8A-4147-A177-3AD203B41FA5}">
+                      <a16:colId xmlns:a16="http://schemas.microsoft.com/office/drawing/2014/main" val="20001"/>
+                    </a:ext>
+                  </a:extLst>
+                </a:gridCol>
+                <a:gridCol w="4551832">
+                  <a:extLst>
+                    <a:ext uri="{9D8B030D-6E8A-4147-A177-3AD203B41FA5}">
+                      <a16:colId xmlns:a16="http://schemas.microsoft.com/office/drawing/2014/main" val="20002"/>
+                    </a:ext>
+                  </a:extLst>
+                </a:gridCol>
               </a:tblGrid>
               <a:tr h="618225">
                 <a:tc>
@@ -6914,7 +7380,7 @@
                       </a:r>
                     </a:p>
                   </a:txBody>
-                  <a:tcPr marL="137160" marR="91440" marT="45720" marB="45720">
+                  <a:tcPr marL="137160">
                     <a:solidFill>
                       <a:srgbClr val="0D6836"/>
                     </a:solidFill>
@@ -6937,7 +7403,7 @@
                       </a:r>
                     </a:p>
                   </a:txBody>
-                  <a:tcPr marL="137160" marR="91440" marT="45720" marB="45720">
+                  <a:tcPr marL="137160">
                     <a:solidFill>
                       <a:srgbClr val="0D6836"/>
                     </a:solidFill>
@@ -6960,12 +7426,17 @@
                       </a:r>
                     </a:p>
                   </a:txBody>
-                  <a:tcPr marL="137160" marR="91440" marT="45720" marB="45720">
+                  <a:tcPr marL="137160">
                     <a:solidFill>
                       <a:srgbClr val="0D6836"/>
                     </a:solidFill>
                   </a:tcPr>
                 </a:tc>
+                <a:extLst>
+                  <a:ext uri="{0D108BD9-81ED-4DB2-BD59-A6C34878D82A}">
+                    <a16:rowId xmlns:a16="http://schemas.microsoft.com/office/drawing/2014/main" val="10000"/>
+                  </a:ext>
+                </a:extLst>
               </a:tr>
               <a:tr h="618225">
                 <a:tc>
@@ -6985,7 +7456,7 @@
                       </a:r>
                     </a:p>
                   </a:txBody>
-                  <a:tcPr marL="137160" marR="91440" marT="45720" marB="45720">
+                  <a:tcPr marL="137160">
                     <a:solidFill>
                       <a:srgbClr val="EAFBF0"/>
                     </a:solidFill>
@@ -7008,7 +7479,7 @@
                       </a:r>
                     </a:p>
                   </a:txBody>
-                  <a:tcPr marL="137160" marR="91440" marT="45720" marB="45720">
+                  <a:tcPr marL="137160">
                     <a:solidFill>
                       <a:srgbClr val="EAFBF0"/>
                     </a:solidFill>
@@ -7031,12 +7502,17 @@
                       </a:r>
                     </a:p>
                   </a:txBody>
-                  <a:tcPr marL="137160" marR="91440" marT="45720" marB="45720">
+                  <a:tcPr marL="137160">
                     <a:solidFill>
                       <a:srgbClr val="EAFBF0"/>
                     </a:solidFill>
                   </a:tcPr>
                 </a:tc>
+                <a:extLst>
+                  <a:ext uri="{0D108BD9-81ED-4DB2-BD59-A6C34878D82A}">
+                    <a16:rowId xmlns:a16="http://schemas.microsoft.com/office/drawing/2014/main" val="10001"/>
+                  </a:ext>
+                </a:extLst>
               </a:tr>
               <a:tr h="618225">
                 <a:tc>
@@ -7056,7 +7532,7 @@
                       </a:r>
                     </a:p>
                   </a:txBody>
-                  <a:tcPr marL="137160" marR="91440" marT="45720" marB="45720">
+                  <a:tcPr marL="137160">
                     <a:solidFill>
                       <a:srgbClr val="FFFFFF"/>
                     </a:solidFill>
@@ -7079,7 +7555,7 @@
                       </a:r>
                     </a:p>
                   </a:txBody>
-                  <a:tcPr marL="137160" marR="91440" marT="45720" marB="45720">
+                  <a:tcPr marL="137160">
                     <a:solidFill>
                       <a:srgbClr val="FFFFFF"/>
                     </a:solidFill>
@@ -7102,12 +7578,17 @@
                       </a:r>
                     </a:p>
                   </a:txBody>
-                  <a:tcPr marL="137160" marR="91440" marT="45720" marB="45720">
+                  <a:tcPr marL="137160">
                     <a:solidFill>
                       <a:srgbClr val="FFFFFF"/>
                     </a:solidFill>
                   </a:tcPr>
                 </a:tc>
+                <a:extLst>
+                  <a:ext uri="{0D108BD9-81ED-4DB2-BD59-A6C34878D82A}">
+                    <a16:rowId xmlns:a16="http://schemas.microsoft.com/office/drawing/2014/main" val="10002"/>
+                  </a:ext>
+                </a:extLst>
               </a:tr>
               <a:tr h="618225">
                 <a:tc>
@@ -7127,7 +7608,7 @@
                       </a:r>
                     </a:p>
                   </a:txBody>
-                  <a:tcPr marL="137160" marR="91440" marT="45720" marB="45720">
+                  <a:tcPr marL="137160">
                     <a:solidFill>
                       <a:srgbClr val="EAFBF0"/>
                     </a:solidFill>
@@ -7150,7 +7631,7 @@
                       </a:r>
                     </a:p>
                   </a:txBody>
-                  <a:tcPr marL="137160" marR="91440" marT="45720" marB="45720">
+                  <a:tcPr marL="137160">
                     <a:solidFill>
                       <a:srgbClr val="EAFBF0"/>
                     </a:solidFill>
@@ -7173,12 +7654,17 @@
                       </a:r>
                     </a:p>
                   </a:txBody>
-                  <a:tcPr marL="137160" marR="91440" marT="45720" marB="45720">
+                  <a:tcPr marL="137160">
                     <a:solidFill>
                       <a:srgbClr val="EAFBF0"/>
                     </a:solidFill>
                   </a:tcPr>
                 </a:tc>
+                <a:extLst>
+                  <a:ext uri="{0D108BD9-81ED-4DB2-BD59-A6C34878D82A}">
+                    <a16:rowId xmlns:a16="http://schemas.microsoft.com/office/drawing/2014/main" val="10003"/>
+                  </a:ext>
+                </a:extLst>
               </a:tr>
               <a:tr h="618225">
                 <a:tc>
@@ -7198,7 +7684,7 @@
                       </a:r>
                     </a:p>
                   </a:txBody>
-                  <a:tcPr marL="137160" marR="91440" marT="45720" marB="45720">
+                  <a:tcPr marL="137160">
                     <a:solidFill>
                       <a:srgbClr val="FFFFFF"/>
                     </a:solidFill>
@@ -7221,7 +7707,7 @@
                       </a:r>
                     </a:p>
                   </a:txBody>
-                  <a:tcPr marL="137160" marR="91440" marT="45720" marB="45720">
+                  <a:tcPr marL="137160">
                     <a:solidFill>
                       <a:srgbClr val="FFFFFF"/>
                     </a:solidFill>
@@ -7244,12 +7730,17 @@
                       </a:r>
                     </a:p>
                   </a:txBody>
-                  <a:tcPr marL="137160" marR="91440" marT="45720" marB="45720">
+                  <a:tcPr marL="137160">
                     <a:solidFill>
                       <a:srgbClr val="FFFFFF"/>
                     </a:solidFill>
                   </a:tcPr>
                 </a:tc>
+                <a:extLst>
+                  <a:ext uri="{0D108BD9-81ED-4DB2-BD59-A6C34878D82A}">
+                    <a16:rowId xmlns:a16="http://schemas.microsoft.com/office/drawing/2014/main" val="10004"/>
+                  </a:ext>
+                </a:extLst>
               </a:tr>
               <a:tr h="618225">
                 <a:tc>
@@ -7269,7 +7760,7 @@
                       </a:r>
                     </a:p>
                   </a:txBody>
-                  <a:tcPr marL="137160" marR="91440" marT="45720" marB="45720">
+                  <a:tcPr marL="137160">
                     <a:solidFill>
                       <a:srgbClr val="EAFBF0"/>
                     </a:solidFill>
@@ -7292,7 +7783,7 @@
                       </a:r>
                     </a:p>
                   </a:txBody>
-                  <a:tcPr marL="137160" marR="91440" marT="45720" marB="45720">
+                  <a:tcPr marL="137160">
                     <a:solidFill>
                       <a:srgbClr val="EAFBF0"/>
                     </a:solidFill>
@@ -7315,12 +7806,17 @@
                       </a:r>
                     </a:p>
                   </a:txBody>
-                  <a:tcPr marL="137160" marR="91440" marT="45720" marB="45720">
+                  <a:tcPr marL="137160">
                     <a:solidFill>
                       <a:srgbClr val="EAFBF0"/>
                     </a:solidFill>
                   </a:tcPr>
                 </a:tc>
+                <a:extLst>
+                  <a:ext uri="{0D108BD9-81ED-4DB2-BD59-A6C34878D82A}">
+                    <a16:rowId xmlns:a16="http://schemas.microsoft.com/office/drawing/2014/main" val="10005"/>
+                  </a:ext>
+                </a:extLst>
               </a:tr>
               <a:tr h="618231">
                 <a:tc>
@@ -7340,7 +7836,7 @@
                       </a:r>
                     </a:p>
                   </a:txBody>
-                  <a:tcPr marL="137160" marR="91440" marT="45720" marB="45720">
+                  <a:tcPr marL="137160">
                     <a:solidFill>
                       <a:srgbClr val="FFFFFF"/>
                     </a:solidFill>
@@ -7353,7 +7849,7 @@
                     <a:p>
                       <a:pPr algn="l"/>
                       <a:r>
-                        <a:rPr sz="1500">
+                        <a:rPr sz="1500" dirty="0">
                           <a:solidFill>
                             <a:srgbClr val="20262C"/>
                           </a:solidFill>
@@ -7363,7 +7859,7 @@
                       </a:r>
                     </a:p>
                   </a:txBody>
-                  <a:tcPr marL="137160" marR="91440" marT="45720" marB="45720">
+                  <a:tcPr marL="137160">
                     <a:solidFill>
                       <a:srgbClr val="FFFFFF"/>
                     </a:solidFill>
@@ -7376,7 +7872,7 @@
                     <a:p>
                       <a:pPr algn="l"/>
                       <a:r>
-                        <a:rPr sz="1500">
+                        <a:rPr sz="1500" dirty="0">
                           <a:solidFill>
                             <a:srgbClr val="20262C"/>
                           </a:solidFill>
@@ -7386,12 +7882,17 @@
                       </a:r>
                     </a:p>
                   </a:txBody>
-                  <a:tcPr marL="137160" marR="91440" marT="45720" marB="45720">
+                  <a:tcPr marL="137160">
                     <a:solidFill>
                       <a:srgbClr val="FFFFFF"/>
                     </a:solidFill>
                   </a:tcPr>
                 </a:tc>
+                <a:extLst>
+                  <a:ext uri="{0D108BD9-81ED-4DB2-BD59-A6C34878D82A}">
+                    <a16:rowId xmlns:a16="http://schemas.microsoft.com/office/drawing/2014/main" val="10006"/>
+                  </a:ext>
+                </a:extLst>
               </a:tr>
             </a:tbl>
           </a:graphicData>
@@ -7405,447 +7906,7 @@
 </p:sld>
 </file>
 
-<file path=ppt/slides/slide12.xml><?xml version="1.0" encoding="utf-8"?>
-<p:sld xmlns:a="http://schemas.openxmlformats.org/drawingml/2006/main" xmlns:p="http://schemas.openxmlformats.org/presentationml/2006/main" xmlns:r="http://schemas.openxmlformats.org/officeDocument/2006/relationships">
-  <p:cSld>
-    <p:spTree>
-      <p:nvGrpSpPr>
-        <p:cNvPr id="1" name=""/>
-        <p:cNvGrpSpPr/>
-        <p:nvPr/>
-      </p:nvGrpSpPr>
-      <p:grpSpPr/>
-      <p:sp>
-        <p:nvSpPr>
-          <p:cNvPr id="2" name="Text Placeholder 1"/>
-          <p:cNvSpPr>
-            <a:spLocks noGrp="1"/>
-          </p:cNvSpPr>
-          <p:nvPr>
-            <p:ph type="body" idx="32" sz="quarter"/>
-          </p:nvPr>
-        </p:nvSpPr>
-        <p:spPr/>
-        <p:txBody>
-          <a:bodyPr/>
-          <a:lstStyle/>
-          <a:p>
-            <a:r>
-              <a:t>Get better results</a:t>
-            </a:r>
-          </a:p>
-        </p:txBody>
-      </p:sp>
-      <p:sp>
-        <p:nvSpPr>
-          <p:cNvPr id="3" name="Title 2"/>
-          <p:cNvSpPr>
-            <a:spLocks noGrp="1"/>
-          </p:cNvSpPr>
-          <p:nvPr>
-            <p:ph type="ctrTitle"/>
-          </p:nvPr>
-        </p:nvSpPr>
-        <p:spPr/>
-        <p:txBody>
-          <a:bodyPr/>
-          <a:lstStyle/>
-          <a:p>
-            <a:r>
-              <a:t>Best practices</a:t>
-            </a:r>
-          </a:p>
-        </p:txBody>
-      </p:sp>
-      <p:sp>
-        <p:nvSpPr>
-          <p:cNvPr id="4" name="Text Placeholder 3"/>
-          <p:cNvSpPr>
-            <a:spLocks noGrp="1"/>
-          </p:cNvSpPr>
-          <p:nvPr>
-            <p:ph type="body" idx="36" sz="quarter"/>
-          </p:nvPr>
-        </p:nvSpPr>
-        <p:spPr/>
-        <p:txBody>
-          <a:bodyPr/>
-          <a:lstStyle/>
-          <a:p>
-            <a:r>
-              <a:t>Be specific</a:t>
-            </a:r>
-          </a:p>
-        </p:txBody>
-      </p:sp>
-      <p:sp>
-        <p:nvSpPr>
-          <p:cNvPr id="5" name="Text Placeholder 4"/>
-          <p:cNvSpPr>
-            <a:spLocks noGrp="1"/>
-          </p:cNvSpPr>
-          <p:nvPr>
-            <p:ph type="body" idx="37" sz="quarter"/>
-          </p:nvPr>
-        </p:nvSpPr>
-        <p:spPr/>
-        <p:txBody>
-          <a:bodyPr/>
-          <a:lstStyle/>
-          <a:p>
-            <a:r>
-              <a:t>Write clear prompts with inputs, outputs, edge cases and constraints. Precise intent beats "fix this code."</a:t>
-            </a:r>
-          </a:p>
-        </p:txBody>
-      </p:sp>
-      <p:sp>
-        <p:nvSpPr>
-          <p:cNvPr id="6" name="Picture Placeholder 5"/>
-          <p:cNvSpPr>
-            <a:spLocks noGrp="1"/>
-          </p:cNvSpPr>
-          <p:nvPr>
-            <p:ph type="pic" idx="38" sz="quarter"/>
-          </p:nvPr>
-        </p:nvSpPr>
-        <p:spPr/>
-      </p:sp>
-      <p:sp>
-        <p:nvSpPr>
-          <p:cNvPr id="7" name="Text Placeholder 6"/>
-          <p:cNvSpPr>
-            <a:spLocks noGrp="1"/>
-          </p:cNvSpPr>
-          <p:nvPr>
-            <p:ph type="body" idx="39" sz="quarter"/>
-          </p:nvPr>
-        </p:nvSpPr>
-        <p:spPr/>
-        <p:txBody>
-          <a:bodyPr/>
-          <a:lstStyle/>
-          <a:p>
-            <a:r>
-              <a:t>Give context</a:t>
-            </a:r>
-          </a:p>
-        </p:txBody>
-      </p:sp>
-      <p:sp>
-        <p:nvSpPr>
-          <p:cNvPr id="8" name="Text Placeholder 7"/>
-          <p:cNvSpPr>
-            <a:spLocks noGrp="1"/>
-          </p:cNvSpPr>
-          <p:nvPr>
-            <p:ph type="body" idx="40" sz="quarter"/>
-          </p:nvPr>
-        </p:nvSpPr>
-        <p:spPr/>
-        <p:txBody>
-          <a:bodyPr/>
-          <a:lstStyle/>
-          <a:p>
-            <a:r>
-              <a:t>Reference #codebase, #file and #selection. Keep relevant files open and close the noise.</a:t>
-            </a:r>
-          </a:p>
-        </p:txBody>
-      </p:sp>
-      <p:sp>
-        <p:nvSpPr>
-          <p:cNvPr id="9" name="Picture Placeholder 8"/>
-          <p:cNvSpPr>
-            <a:spLocks noGrp="1"/>
-          </p:cNvSpPr>
-          <p:nvPr>
-            <p:ph type="pic" idx="41" sz="quarter"/>
-          </p:nvPr>
-        </p:nvSpPr>
-        <p:spPr/>
-      </p:sp>
-      <p:sp>
-        <p:nvSpPr>
-          <p:cNvPr id="10" name="Text Placeholder 9"/>
-          <p:cNvSpPr>
-            <a:spLocks noGrp="1"/>
-          </p:cNvSpPr>
-          <p:nvPr>
-            <p:ph type="body" idx="42" sz="quarter"/>
-          </p:nvPr>
-        </p:nvSpPr>
-        <p:spPr/>
-        <p:txBody>
-          <a:bodyPr/>
-          <a:lstStyle/>
-          <a:p>
-            <a:r>
-              <a:t>Review everything</a:t>
-            </a:r>
-          </a:p>
-        </p:txBody>
-      </p:sp>
-      <p:sp>
-        <p:nvSpPr>
-          <p:cNvPr id="11" name="Text Placeholder 10"/>
-          <p:cNvSpPr>
-            <a:spLocks noGrp="1"/>
-          </p:cNvSpPr>
-          <p:nvPr>
-            <p:ph type="body" idx="43" sz="quarter"/>
-          </p:nvPr>
-        </p:nvSpPr>
-        <p:spPr/>
-        <p:txBody>
-          <a:bodyPr/>
-          <a:lstStyle/>
-          <a:p>
-            <a:r>
-              <a:t>You own what you merge. Read the output, run the tests, and iterate: prompt, review, refine.</a:t>
-            </a:r>
-          </a:p>
-        </p:txBody>
-      </p:sp>
-      <p:sp>
-        <p:nvSpPr>
-          <p:cNvPr id="12" name="Picture Placeholder 11"/>
-          <p:cNvSpPr>
-            <a:spLocks noGrp="1"/>
-          </p:cNvSpPr>
-          <p:nvPr>
-            <p:ph type="pic" idx="44" sz="quarter"/>
-          </p:nvPr>
-        </p:nvSpPr>
-        <p:spPr/>
-      </p:sp>
-      <p:sp>
-        <p:nvSpPr>
-          <p:cNvPr id="13" name="Text Placeholder 12"/>
-          <p:cNvSpPr>
-            <a:spLocks noGrp="1"/>
-          </p:cNvSpPr>
-          <p:nvPr>
-            <p:ph type="body" idx="10" sz="quarter"/>
-          </p:nvPr>
-        </p:nvSpPr>
-        <p:spPr/>
-        <p:txBody>
-          <a:bodyPr/>
-          <a:lstStyle/>
-          <a:p/>
-        </p:txBody>
-      </p:sp>
-    </p:spTree>
-  </p:cSld>
-  <p:clrMapOvr>
-    <a:masterClrMapping/>
-  </p:clrMapOvr>
-</p:sld>
-</file>
-
-<file path=ppt/slides/slide13.xml><?xml version="1.0" encoding="utf-8"?>
-<p:sld xmlns:a="http://schemas.openxmlformats.org/drawingml/2006/main" xmlns:p="http://schemas.openxmlformats.org/presentationml/2006/main" xmlns:r="http://schemas.openxmlformats.org/officeDocument/2006/relationships">
-  <p:cSld>
-    <p:spTree>
-      <p:nvGrpSpPr>
-        <p:cNvPr id="1" name=""/>
-        <p:cNvGrpSpPr/>
-        <p:nvPr/>
-      </p:nvGrpSpPr>
-      <p:grpSpPr/>
-      <p:sp>
-        <p:nvSpPr>
-          <p:cNvPr id="2" name="Text Placeholder 1"/>
-          <p:cNvSpPr>
-            <a:spLocks noGrp="1"/>
-          </p:cNvSpPr>
-          <p:nvPr>
-            <p:ph type="body" idx="10" sz="quarter"/>
-          </p:nvPr>
-        </p:nvSpPr>
-        <p:spPr/>
-        <p:txBody>
-          <a:bodyPr/>
-          <a:lstStyle/>
-          <a:p>
-            <a:r>
-              <a:t>The Copilot workflow</a:t>
-            </a:r>
-          </a:p>
-        </p:txBody>
-      </p:sp>
-      <p:sp>
-        <p:nvSpPr>
-          <p:cNvPr id="3" name="Text Placeholder 2"/>
-          <p:cNvSpPr>
-            <a:spLocks noGrp="1"/>
-          </p:cNvSpPr>
-          <p:nvPr>
-            <p:ph type="body" idx="11" sz="quarter"/>
-          </p:nvPr>
-        </p:nvSpPr>
-        <p:spPr/>
-        <p:txBody>
-          <a:bodyPr/>
-          <a:lstStyle/>
-          <a:p>
-            <a:r>
-              <a:t>Practice it in every exercise</a:t>
-            </a:r>
-          </a:p>
-        </p:txBody>
-      </p:sp>
-      <p:sp>
-        <p:nvSpPr>
-          <p:cNvPr id="4" name="Title 3"/>
-          <p:cNvSpPr>
-            <a:spLocks noGrp="1"/>
-          </p:cNvSpPr>
-          <p:nvPr>
-            <p:ph type="ctrTitle"/>
-          </p:nvPr>
-        </p:nvSpPr>
-        <p:spPr/>
-        <p:txBody>
-          <a:bodyPr/>
-          <a:lstStyle/>
-          <a:p>
-            <a:r>
-              <a:t>Prompt. Review. Refine. Repeat.</a:t>
-            </a:r>
-          </a:p>
-        </p:txBody>
-      </p:sp>
-      <p:sp>
-        <p:nvSpPr>
-          <p:cNvPr id="5" name="Text Placeholder 4"/>
-          <p:cNvSpPr>
-            <a:spLocks noGrp="1"/>
-          </p:cNvSpPr>
-          <p:nvPr>
-            <p:ph type="body" idx="12" sz="quarter"/>
-          </p:nvPr>
-        </p:nvSpPr>
-        <p:spPr/>
-        <p:txBody>
-          <a:bodyPr/>
-          <a:lstStyle/>
-          <a:p/>
-        </p:txBody>
-      </p:sp>
-    </p:spTree>
-  </p:cSld>
-  <p:clrMapOvr>
-    <a:masterClrMapping/>
-  </p:clrMapOvr>
-</p:sld>
-</file>
-
-<file path=ppt/slides/slide14.xml><?xml version="1.0" encoding="utf-8"?>
-<p:sld xmlns:a="http://schemas.openxmlformats.org/drawingml/2006/main" xmlns:p="http://schemas.openxmlformats.org/presentationml/2006/main" xmlns:r="http://schemas.openxmlformats.org/officeDocument/2006/relationships">
-  <p:cSld>
-    <p:spTree>
-      <p:nvGrpSpPr>
-        <p:cNvPr id="1" name=""/>
-        <p:cNvGrpSpPr/>
-        <p:nvPr/>
-      </p:nvGrpSpPr>
-      <p:grpSpPr/>
-      <p:sp>
-        <p:nvSpPr>
-          <p:cNvPr id="2" name="Content Placeholder 1"/>
-          <p:cNvSpPr>
-            <a:spLocks noGrp="1"/>
-          </p:cNvSpPr>
-          <p:nvPr>
-            <p:ph idx="1"/>
-          </p:nvPr>
-        </p:nvSpPr>
-        <p:spPr/>
-        <p:txBody>
-          <a:bodyPr/>
-          <a:lstStyle/>
-          <a:p>
-            <a:r>
-              <a:t>Exercise 6 orchestrates an end-to-end feature with a custom Copilot agent, a reusable skill, and the Playwright MCP server.</a:t>
-            </a:r>
-          </a:p>
-          <a:p>
-            <a:r>
-              <a:t>Drive the whole loop — plan, implement, verify in a real browser, fix, re-verify — locally in VS Code.</a:t>
-            </a:r>
-          </a:p>
-        </p:txBody>
-      </p:sp>
-      <p:sp>
-        <p:nvSpPr>
-          <p:cNvPr id="3" name="Text Placeholder 2"/>
-          <p:cNvSpPr>
-            <a:spLocks noGrp="1"/>
-          </p:cNvSpPr>
-          <p:nvPr>
-            <p:ph type="body" idx="32" sz="quarter"/>
-          </p:nvPr>
-        </p:nvSpPr>
-        <p:spPr/>
-        <p:txBody>
-          <a:bodyPr/>
-          <a:lstStyle/>
-          <a:p>
-            <a:r>
-              <a:t>Bonus · Advanced track</a:t>
-            </a:r>
-          </a:p>
-        </p:txBody>
-      </p:sp>
-      <p:sp>
-        <p:nvSpPr>
-          <p:cNvPr id="4" name="Title 3"/>
-          <p:cNvSpPr>
-            <a:spLocks noGrp="1"/>
-          </p:cNvSpPr>
-          <p:nvPr>
-            <p:ph type="ctrTitle"/>
-          </p:nvPr>
-        </p:nvSpPr>
-        <p:spPr/>
-        <p:txBody>
-          <a:bodyPr/>
-          <a:lstStyle/>
-          <a:p>
-            <a:r>
-              <a:t>Go further: agents, skills &amp; MCP</a:t>
-            </a:r>
-          </a:p>
-        </p:txBody>
-      </p:sp>
-      <p:sp>
-        <p:nvSpPr>
-          <p:cNvPr id="5" name="Text Placeholder 4"/>
-          <p:cNvSpPr>
-            <a:spLocks noGrp="1"/>
-          </p:cNvSpPr>
-          <p:nvPr>
-            <p:ph type="body" idx="10" sz="quarter"/>
-          </p:nvPr>
-        </p:nvSpPr>
-        <p:spPr/>
-        <p:txBody>
-          <a:bodyPr/>
-          <a:lstStyle/>
-          <a:p/>
-        </p:txBody>
-      </p:sp>
-    </p:spTree>
-  </p:cSld>
-  <p:clrMapOvr>
-    <a:masterClrMapping/>
-  </p:clrMapOvr>
-</p:sld>
-</file>
-
-<file path=ppt/slides/slide2.xml><?xml version="1.0" encoding="utf-8"?>
+<file path=ppt/slides/slide8.xml><?xml version="1.0" encoding="utf-8"?>
 <p:sld xmlns:a="http://schemas.openxmlformats.org/drawingml/2006/main" xmlns:r="http://schemas.openxmlformats.org/officeDocument/2006/relationships" xmlns:p="http://schemas.openxmlformats.org/presentationml/2006/main">
   <p:cSld>
     <p:spTree>
@@ -7868,944 +7929,6 @@
         <p14:creationId xmlns:p14="http://schemas.microsoft.com/office/powerpoint/2010/main" val="2507593852"/>
       </p:ext>
     </p:extLst>
-  </p:cSld>
-  <p:clrMapOvr>
-    <a:masterClrMapping/>
-  </p:clrMapOvr>
-</p:sld>
-</file>
-
-<file path=ppt/slides/slide3.xml><?xml version="1.0" encoding="utf-8"?>
-<p:sld xmlns:a="http://schemas.openxmlformats.org/drawingml/2006/main" xmlns:p="http://schemas.openxmlformats.org/presentationml/2006/main" xmlns:r="http://schemas.openxmlformats.org/officeDocument/2006/relationships">
-  <p:cSld>
-    <p:spTree>
-      <p:nvGrpSpPr>
-        <p:cNvPr id="1" name=""/>
-        <p:cNvGrpSpPr/>
-        <p:nvPr/>
-      </p:nvGrpSpPr>
-      <p:grpSpPr/>
-      <p:sp>
-        <p:nvSpPr>
-          <p:cNvPr id="2" name="Title 1"/>
-          <p:cNvSpPr>
-            <a:spLocks noGrp="1"/>
-          </p:cNvSpPr>
-          <p:nvPr>
-            <p:ph type="ctrTitle"/>
-          </p:nvPr>
-        </p:nvSpPr>
-        <p:spPr/>
-        <p:txBody>
-          <a:bodyPr/>
-          <a:lstStyle/>
-          <a:p>
-            <a:r>
-              <a:t>Meet your AI pair programmer — and learn to build with it.</a:t>
-            </a:r>
-          </a:p>
-        </p:txBody>
-      </p:sp>
-      <p:sp>
-        <p:nvSpPr>
-          <p:cNvPr id="3" name="Text Placeholder 2"/>
-          <p:cNvSpPr>
-            <a:spLocks noGrp="1"/>
-          </p:cNvSpPr>
-          <p:nvPr>
-            <p:ph type="body" idx="10" sz="quarter"/>
-          </p:nvPr>
-        </p:nvSpPr>
-        <p:spPr/>
-        <p:txBody>
-          <a:bodyPr/>
-          <a:lstStyle/>
-          <a:p/>
-        </p:txBody>
-      </p:sp>
-    </p:spTree>
-  </p:cSld>
-  <p:clrMapOvr>
-    <a:masterClrMapping/>
-  </p:clrMapOvr>
-</p:sld>
-</file>
-
-<file path=ppt/slides/slide4.xml><?xml version="1.0" encoding="utf-8"?>
-<p:sld xmlns:a="http://schemas.openxmlformats.org/drawingml/2006/main" xmlns:p="http://schemas.openxmlformats.org/presentationml/2006/main" xmlns:r="http://schemas.openxmlformats.org/officeDocument/2006/relationships">
-  <p:cSld>
-    <p:spTree>
-      <p:nvGrpSpPr>
-        <p:cNvPr id="1" name=""/>
-        <p:cNvGrpSpPr/>
-        <p:nvPr/>
-      </p:nvGrpSpPr>
-      <p:grpSpPr/>
-      <p:sp>
-        <p:nvSpPr>
-          <p:cNvPr id="2" name="Text Placeholder 1"/>
-          <p:cNvSpPr>
-            <a:spLocks noGrp="1"/>
-          </p:cNvSpPr>
-          <p:nvPr>
-            <p:ph type="body" idx="11" sz="quarter"/>
-          </p:nvPr>
-        </p:nvSpPr>
-        <p:spPr/>
-        <p:txBody>
-          <a:bodyPr/>
-          <a:lstStyle/>
-          <a:p>
-            <a:r>
-              <a:t>01</a:t>
-            </a:r>
-          </a:p>
-          <a:p>
-            <a:r>
-              <a:t>02</a:t>
-            </a:r>
-          </a:p>
-          <a:p>
-            <a:r>
-              <a:t>03</a:t>
-            </a:r>
-          </a:p>
-          <a:p>
-            <a:r>
-              <a:t>04</a:t>
-            </a:r>
-          </a:p>
-          <a:p>
-            <a:r>
-              <a:t>05</a:t>
-            </a:r>
-          </a:p>
-          <a:p>
-            <a:r>
-              <a:t>06</a:t>
-            </a:r>
-          </a:p>
-        </p:txBody>
-      </p:sp>
-      <p:sp>
-        <p:nvSpPr>
-          <p:cNvPr id="3" name="Text Placeholder 2"/>
-          <p:cNvSpPr>
-            <a:spLocks noGrp="1"/>
-          </p:cNvSpPr>
-          <p:nvPr>
-            <p:ph type="body" idx="12" sz="quarter"/>
-          </p:nvPr>
-        </p:nvSpPr>
-        <p:spPr/>
-        <p:txBody>
-          <a:bodyPr/>
-          <a:lstStyle/>
-          <a:p>
-            <a:r>
-              <a:t>Setup &amp; Basics</a:t>
-            </a:r>
-          </a:p>
-          <a:p>
-            <a:r>
-              <a:t>Comment-to-Code</a:t>
-            </a:r>
-          </a:p>
-          <a:p>
-            <a:r>
-              <a:t>Code Completion</a:t>
-            </a:r>
-          </a:p>
-          <a:p>
-            <a:r>
-              <a:t>Copilot Chat</a:t>
-            </a:r>
-          </a:p>
-          <a:p>
-            <a:r>
-              <a:t>Real-World Project</a:t>
-            </a:r>
-          </a:p>
-          <a:p>
-            <a:r>
-              <a:t>Advanced: Agents, Skills &amp; MCP</a:t>
-            </a:r>
-          </a:p>
-        </p:txBody>
-      </p:sp>
-      <p:sp>
-        <p:nvSpPr>
-          <p:cNvPr id="4" name="Text Placeholder 3"/>
-          <p:cNvSpPr>
-            <a:spLocks noGrp="1"/>
-          </p:cNvSpPr>
-          <p:nvPr>
-            <p:ph type="body" idx="10" sz="quarter"/>
-          </p:nvPr>
-        </p:nvSpPr>
-        <p:spPr/>
-        <p:txBody>
-          <a:bodyPr/>
-          <a:lstStyle/>
-          <a:p/>
-        </p:txBody>
-      </p:sp>
-    </p:spTree>
-  </p:cSld>
-  <p:clrMapOvr>
-    <a:masterClrMapping/>
-  </p:clrMapOvr>
-</p:sld>
-</file>
-
-<file path=ppt/slides/slide5.xml><?xml version="1.0" encoding="utf-8"?>
-<p:sld xmlns:a="http://schemas.openxmlformats.org/drawingml/2006/main" xmlns:p="http://schemas.openxmlformats.org/presentationml/2006/main" xmlns:r="http://schemas.openxmlformats.org/officeDocument/2006/relationships">
-  <p:cSld>
-    <p:spTree>
-      <p:nvGrpSpPr>
-        <p:cNvPr id="1" name=""/>
-        <p:cNvGrpSpPr/>
-        <p:nvPr/>
-      </p:nvGrpSpPr>
-      <p:grpSpPr/>
-      <p:sp>
-        <p:nvSpPr>
-          <p:cNvPr id="2" name="Content Placeholder 1"/>
-          <p:cNvSpPr>
-            <a:spLocks noGrp="1"/>
-          </p:cNvSpPr>
-          <p:nvPr>
-            <p:ph idx="1"/>
-          </p:nvPr>
-        </p:nvSpPr>
-        <p:spPr/>
-        <p:txBody>
-          <a:bodyPr/>
-          <a:lstStyle/>
-          <a:p>
-            <a:r>
-              <a:t>Your AI pair programmer, right inside the editor</a:t>
-            </a:r>
-          </a:p>
-          <a:p>
-            <a:r>
-              <a:t>Real-time, context-aware code completions</a:t>
-            </a:r>
-          </a:p>
-          <a:p>
-            <a:r>
-              <a:t>Natural-language chat to explain, fix, test and refactor</a:t>
-            </a:r>
-          </a:p>
-          <a:p>
-            <a:r>
-              <a:t>Agents, skills and MCP to automate multi-step work</a:t>
-            </a:r>
-          </a:p>
-          <a:p>
-            <a:r>
-              <a:t>Works across VS Code, the CLI, and GitHub.com</a:t>
-            </a:r>
-          </a:p>
-        </p:txBody>
-      </p:sp>
-      <p:sp>
-        <p:nvSpPr>
-          <p:cNvPr id="3" name="Text Placeholder 2"/>
-          <p:cNvSpPr>
-            <a:spLocks noGrp="1"/>
-          </p:cNvSpPr>
-          <p:nvPr>
-            <p:ph type="body" idx="32" sz="quarter"/>
-          </p:nvPr>
-        </p:nvSpPr>
-        <p:spPr/>
-        <p:txBody>
-          <a:bodyPr/>
-          <a:lstStyle/>
-          <a:p>
-            <a:r>
-              <a:t>Overview</a:t>
-            </a:r>
-          </a:p>
-        </p:txBody>
-      </p:sp>
-      <p:sp>
-        <p:nvSpPr>
-          <p:cNvPr id="4" name="Title 3"/>
-          <p:cNvSpPr>
-            <a:spLocks noGrp="1"/>
-          </p:cNvSpPr>
-          <p:nvPr>
-            <p:ph type="ctrTitle"/>
-          </p:nvPr>
-        </p:nvSpPr>
-        <p:spPr/>
-        <p:txBody>
-          <a:bodyPr/>
-          <a:lstStyle/>
-          <a:p>
-            <a:r>
-              <a:t>What is GitHub Copilot?</a:t>
-            </a:r>
-          </a:p>
-        </p:txBody>
-      </p:sp>
-      <p:sp>
-        <p:nvSpPr>
-          <p:cNvPr id="5" name="Text Placeholder 4"/>
-          <p:cNvSpPr>
-            <a:spLocks noGrp="1"/>
-          </p:cNvSpPr>
-          <p:nvPr>
-            <p:ph type="body" idx="10" sz="quarter"/>
-          </p:nvPr>
-        </p:nvSpPr>
-        <p:spPr/>
-        <p:txBody>
-          <a:bodyPr/>
-          <a:lstStyle/>
-          <a:p/>
-        </p:txBody>
-      </p:sp>
-    </p:spTree>
-  </p:cSld>
-  <p:clrMapOvr>
-    <a:masterClrMapping/>
-  </p:clrMapOvr>
-</p:sld>
-</file>
-
-<file path=ppt/slides/slide6.xml><?xml version="1.0" encoding="utf-8"?>
-<p:sld xmlns:a="http://schemas.openxmlformats.org/drawingml/2006/main" xmlns:p="http://schemas.openxmlformats.org/presentationml/2006/main" xmlns:r="http://schemas.openxmlformats.org/officeDocument/2006/relationships">
-  <p:cSld>
-    <p:spTree>
-      <p:nvGrpSpPr>
-        <p:cNvPr id="1" name=""/>
-        <p:cNvGrpSpPr/>
-        <p:nvPr/>
-      </p:nvGrpSpPr>
-      <p:grpSpPr/>
-      <p:sp>
-        <p:nvSpPr>
-          <p:cNvPr id="2" name="Text Placeholder 1"/>
-          <p:cNvSpPr>
-            <a:spLocks noGrp="1"/>
-          </p:cNvSpPr>
-          <p:nvPr>
-            <p:ph type="body" idx="32" sz="quarter"/>
-          </p:nvPr>
-        </p:nvSpPr>
-        <p:spPr/>
-        <p:txBody>
-          <a:bodyPr/>
-          <a:lstStyle/>
-          <a:p>
-            <a:r>
-              <a:t>How you'll use it</a:t>
-            </a:r>
-          </a:p>
-        </p:txBody>
-      </p:sp>
-      <p:sp>
-        <p:nvSpPr>
-          <p:cNvPr id="3" name="Title 2"/>
-          <p:cNvSpPr>
-            <a:spLocks noGrp="1"/>
-          </p:cNvSpPr>
-          <p:nvPr>
-            <p:ph type="ctrTitle"/>
-          </p:nvPr>
-        </p:nvSpPr>
-        <p:spPr/>
-        <p:txBody>
-          <a:bodyPr/>
-          <a:lstStyle/>
-          <a:p>
-            <a:r>
-              <a:t>Three ways to code with Copilot</a:t>
-            </a:r>
-          </a:p>
-        </p:txBody>
-      </p:sp>
-      <p:sp>
-        <p:nvSpPr>
-          <p:cNvPr id="4" name="Text Placeholder 3"/>
-          <p:cNvSpPr>
-            <a:spLocks noGrp="1"/>
-          </p:cNvSpPr>
-          <p:nvPr>
-            <p:ph type="body" idx="36" sz="quarter"/>
-          </p:nvPr>
-        </p:nvSpPr>
-        <p:spPr/>
-        <p:txBody>
-          <a:bodyPr/>
-          <a:lstStyle/>
-          <a:p>
-            <a:r>
-              <a:t>Completions</a:t>
-            </a:r>
-          </a:p>
-        </p:txBody>
-      </p:sp>
-      <p:sp>
-        <p:nvSpPr>
-          <p:cNvPr id="5" name="Text Placeholder 4"/>
-          <p:cNvSpPr>
-            <a:spLocks noGrp="1"/>
-          </p:cNvSpPr>
-          <p:nvPr>
-            <p:ph type="body" idx="37" sz="quarter"/>
-          </p:nvPr>
-        </p:nvSpPr>
-        <p:spPr/>
-        <p:txBody>
-          <a:bodyPr/>
-          <a:lstStyle/>
-          <a:p>
-            <a:r>
-              <a:t>Inline suggestions as you type. Accept with Tab, cycle alternatives, and let Next Edit Suggestions jump you to the next change.</a:t>
-            </a:r>
-          </a:p>
-        </p:txBody>
-      </p:sp>
-      <p:sp>
-        <p:nvSpPr>
-          <p:cNvPr id="6" name="Picture Placeholder 5"/>
-          <p:cNvSpPr>
-            <a:spLocks noGrp="1"/>
-          </p:cNvSpPr>
-          <p:nvPr>
-            <p:ph type="pic" idx="38" sz="quarter"/>
-          </p:nvPr>
-        </p:nvSpPr>
-        <p:spPr/>
-      </p:sp>
-      <p:sp>
-        <p:nvSpPr>
-          <p:cNvPr id="7" name="Text Placeholder 6"/>
-          <p:cNvSpPr>
-            <a:spLocks noGrp="1"/>
-          </p:cNvSpPr>
-          <p:nvPr>
-            <p:ph type="body" idx="39" sz="quarter"/>
-          </p:nvPr>
-        </p:nvSpPr>
-        <p:spPr/>
-        <p:txBody>
-          <a:bodyPr/>
-          <a:lstStyle/>
-          <a:p>
-            <a:r>
-              <a:t>Chat</a:t>
-            </a:r>
-          </a:p>
-        </p:txBody>
-      </p:sp>
-      <p:sp>
-        <p:nvSpPr>
-          <p:cNvPr id="8" name="Text Placeholder 7"/>
-          <p:cNvSpPr>
-            <a:spLocks noGrp="1"/>
-          </p:cNvSpPr>
-          <p:nvPr>
-            <p:ph type="body" idx="40" sz="quarter"/>
-          </p:nvPr>
-        </p:nvSpPr>
-        <p:spPr/>
-        <p:txBody>
-          <a:bodyPr/>
-          <a:lstStyle/>
-          <a:p>
-            <a:r>
-              <a:t>Ask questions and run /explain, /fix and /tests in natural language. Add context with #codebase and #file.</a:t>
-            </a:r>
-          </a:p>
-        </p:txBody>
-      </p:sp>
-      <p:sp>
-        <p:nvSpPr>
-          <p:cNvPr id="9" name="Picture Placeholder 8"/>
-          <p:cNvSpPr>
-            <a:spLocks noGrp="1"/>
-          </p:cNvSpPr>
-          <p:nvPr>
-            <p:ph type="pic" idx="41" sz="quarter"/>
-          </p:nvPr>
-        </p:nvSpPr>
-        <p:spPr/>
-      </p:sp>
-      <p:sp>
-        <p:nvSpPr>
-          <p:cNvPr id="10" name="Text Placeholder 9"/>
-          <p:cNvSpPr>
-            <a:spLocks noGrp="1"/>
-          </p:cNvSpPr>
-          <p:nvPr>
-            <p:ph type="body" idx="42" sz="quarter"/>
-          </p:nvPr>
-        </p:nvSpPr>
-        <p:spPr/>
-        <p:txBody>
-          <a:bodyPr/>
-          <a:lstStyle/>
-          <a:p>
-            <a:r>
-              <a:t>Agents</a:t>
-            </a:r>
-          </a:p>
-        </p:txBody>
-      </p:sp>
-      <p:sp>
-        <p:nvSpPr>
-          <p:cNvPr id="11" name="Text Placeholder 10"/>
-          <p:cNvSpPr>
-            <a:spLocks noGrp="1"/>
-          </p:cNvSpPr>
-          <p:nvPr>
-            <p:ph type="body" idx="43" sz="quarter"/>
-          </p:nvPr>
-        </p:nvSpPr>
-        <p:spPr/>
-        <p:txBody>
-          <a:bodyPr/>
-          <a:lstStyle/>
-          <a:p>
-            <a:r>
-              <a:t>Delegate multi-file, multi-step tasks. Agent mode edits files, runs commands and iterates until it works.</a:t>
-            </a:r>
-          </a:p>
-        </p:txBody>
-      </p:sp>
-      <p:sp>
-        <p:nvSpPr>
-          <p:cNvPr id="12" name="Picture Placeholder 11"/>
-          <p:cNvSpPr>
-            <a:spLocks noGrp="1"/>
-          </p:cNvSpPr>
-          <p:nvPr>
-            <p:ph type="pic" idx="44" sz="quarter"/>
-          </p:nvPr>
-        </p:nvSpPr>
-        <p:spPr/>
-      </p:sp>
-      <p:sp>
-        <p:nvSpPr>
-          <p:cNvPr id="13" name="Text Placeholder 12"/>
-          <p:cNvSpPr>
-            <a:spLocks noGrp="1"/>
-          </p:cNvSpPr>
-          <p:nvPr>
-            <p:ph type="body" idx="10" sz="quarter"/>
-          </p:nvPr>
-        </p:nvSpPr>
-        <p:spPr/>
-        <p:txBody>
-          <a:bodyPr/>
-          <a:lstStyle/>
-          <a:p/>
-        </p:txBody>
-      </p:sp>
-    </p:spTree>
-  </p:cSld>
-  <p:clrMapOvr>
-    <a:masterClrMapping/>
-  </p:clrMapOvr>
-</p:sld>
-</file>
-
-<file path=ppt/slides/slide7.xml><?xml version="1.0" encoding="utf-8"?>
-<p:sld xmlns:a="http://schemas.openxmlformats.org/drawingml/2006/main" xmlns:p="http://schemas.openxmlformats.org/presentationml/2006/main" xmlns:r="http://schemas.openxmlformats.org/officeDocument/2006/relationships">
-  <p:cSld>
-    <p:spTree>
-      <p:nvGrpSpPr>
-        <p:cNvPr id="1" name=""/>
-        <p:cNvGrpSpPr/>
-        <p:nvPr/>
-      </p:nvGrpSpPr>
-      <p:grpSpPr/>
-      <p:sp>
-        <p:nvSpPr>
-          <p:cNvPr id="2" name="Title 1"/>
-          <p:cNvSpPr>
-            <a:spLocks noGrp="1"/>
-          </p:cNvSpPr>
-          <p:nvPr>
-            <p:ph type="ctrTitle"/>
-          </p:nvPr>
-        </p:nvSpPr>
-        <p:spPr/>
-        <p:txBody>
-          <a:bodyPr/>
-          <a:lstStyle/>
-          <a:p>
-            <a:r>
-              <a:t>55%</a:t>
-            </a:r>
-          </a:p>
-        </p:txBody>
-      </p:sp>
-      <p:sp>
-        <p:nvSpPr>
-          <p:cNvPr id="3" name="Text Placeholder 2"/>
-          <p:cNvSpPr>
-            <a:spLocks noGrp="1"/>
-          </p:cNvSpPr>
-          <p:nvPr>
-            <p:ph type="body" idx="26" sz="quarter"/>
-          </p:nvPr>
-        </p:nvSpPr>
-        <p:spPr/>
-        <p:txBody>
-          <a:bodyPr/>
-          <a:lstStyle/>
-          <a:p>
-            <a:r>
-              <a:t>faster task completion</a:t>
-            </a:r>
-          </a:p>
-        </p:txBody>
-      </p:sp>
-      <p:sp>
-        <p:nvSpPr>
-          <p:cNvPr id="4" name="Text Placeholder 3"/>
-          <p:cNvSpPr>
-            <a:spLocks noGrp="1"/>
-          </p:cNvSpPr>
-          <p:nvPr>
-            <p:ph type="body" idx="27" sz="quarter"/>
-          </p:nvPr>
-        </p:nvSpPr>
-        <p:spPr/>
-        <p:txBody>
-          <a:bodyPr/>
-          <a:lstStyle/>
-          <a:p>
-            <a:r>
-              <a:t>of new code written with Copilot</a:t>
-            </a:r>
-          </a:p>
-        </p:txBody>
-      </p:sp>
-      <p:sp>
-        <p:nvSpPr>
-          <p:cNvPr id="5" name="Text Placeholder 4"/>
-          <p:cNvSpPr>
-            <a:spLocks noGrp="1"/>
-          </p:cNvSpPr>
-          <p:nvPr>
-            <p:ph type="body" idx="28" sz="quarter"/>
-          </p:nvPr>
-        </p:nvSpPr>
-        <p:spPr/>
-        <p:txBody>
-          <a:bodyPr/>
-          <a:lstStyle/>
-          <a:p>
-            <a:r>
-              <a:t>of developers feel more productive</a:t>
-            </a:r>
-          </a:p>
-        </p:txBody>
-      </p:sp>
-      <p:sp>
-        <p:nvSpPr>
-          <p:cNvPr id="6" name="Text Placeholder 5"/>
-          <p:cNvSpPr>
-            <a:spLocks noGrp="1"/>
-          </p:cNvSpPr>
-          <p:nvPr>
-            <p:ph type="body" idx="29" sz="quarter"/>
-          </p:nvPr>
-        </p:nvSpPr>
-        <p:spPr/>
-        <p:txBody>
-          <a:bodyPr/>
-          <a:lstStyle/>
-          <a:p>
-            <a:r>
-              <a:t>46%</a:t>
-            </a:r>
-          </a:p>
-        </p:txBody>
-      </p:sp>
-      <p:sp>
-        <p:nvSpPr>
-          <p:cNvPr id="7" name="Text Placeholder 6"/>
-          <p:cNvSpPr>
-            <a:spLocks noGrp="1"/>
-          </p:cNvSpPr>
-          <p:nvPr>
-            <p:ph type="body" idx="30" sz="quarter"/>
-          </p:nvPr>
-        </p:nvSpPr>
-        <p:spPr/>
-        <p:txBody>
-          <a:bodyPr/>
-          <a:lstStyle/>
-          <a:p>
-            <a:r>
-              <a:t>88%</a:t>
-            </a:r>
-          </a:p>
-        </p:txBody>
-      </p:sp>
-      <p:sp>
-        <p:nvSpPr>
-          <p:cNvPr id="8" name="Text Placeholder 7"/>
-          <p:cNvSpPr>
-            <a:spLocks noGrp="1"/>
-          </p:cNvSpPr>
-          <p:nvPr>
-            <p:ph type="body" idx="31" sz="quarter"/>
-          </p:nvPr>
-        </p:nvSpPr>
-        <p:spPr/>
-        <p:txBody>
-          <a:bodyPr/>
-          <a:lstStyle/>
-          <a:p>
-            <a:r>
-              <a:t/>
-            </a:r>
-          </a:p>
-        </p:txBody>
-      </p:sp>
-      <p:sp>
-        <p:nvSpPr>
-          <p:cNvPr id="9" name="Text Placeholder 8"/>
-          <p:cNvSpPr>
-            <a:spLocks noGrp="1"/>
-          </p:cNvSpPr>
-          <p:nvPr>
-            <p:ph type="body" idx="32" sz="quarter"/>
-          </p:nvPr>
-        </p:nvSpPr>
-        <p:spPr/>
-        <p:txBody>
-          <a:bodyPr/>
-          <a:lstStyle/>
-          <a:p>
-            <a:r>
-              <a:t/>
-            </a:r>
-          </a:p>
-        </p:txBody>
-      </p:sp>
-      <p:sp>
-        <p:nvSpPr>
-          <p:cNvPr id="10" name="Text Placeholder 9"/>
-          <p:cNvSpPr>
-            <a:spLocks noGrp="1"/>
-          </p:cNvSpPr>
-          <p:nvPr>
-            <p:ph type="body" idx="33" sz="quarter"/>
-          </p:nvPr>
-        </p:nvSpPr>
-        <p:spPr/>
-        <p:txBody>
-          <a:bodyPr/>
-          <a:lstStyle/>
-          <a:p>
-            <a:r>
-              <a:t/>
-            </a:r>
-          </a:p>
-        </p:txBody>
-      </p:sp>
-      <p:sp>
-        <p:nvSpPr>
-          <p:cNvPr id="11" name="Text Placeholder 10"/>
-          <p:cNvSpPr>
-            <a:spLocks noGrp="1"/>
-          </p:cNvSpPr>
-          <p:nvPr>
-            <p:ph type="body" idx="35" sz="quarter"/>
-          </p:nvPr>
-        </p:nvSpPr>
-        <p:spPr/>
-        <p:txBody>
-          <a:bodyPr/>
-          <a:lstStyle/>
-          <a:p/>
-        </p:txBody>
-      </p:sp>
-    </p:spTree>
-  </p:cSld>
-  <p:clrMapOvr>
-    <a:masterClrMapping/>
-  </p:clrMapOvr>
-</p:sld>
-</file>
-
-<file path=ppt/slides/slide8.xml><?xml version="1.0" encoding="utf-8"?>
-<p:sld xmlns:a="http://schemas.openxmlformats.org/drawingml/2006/main" xmlns:p="http://schemas.openxmlformats.org/presentationml/2006/main" xmlns:r="http://schemas.openxmlformats.org/officeDocument/2006/relationships">
-  <p:cSld>
-    <p:spTree>
-      <p:nvGrpSpPr>
-        <p:cNvPr id="1" name=""/>
-        <p:cNvGrpSpPr/>
-        <p:nvPr/>
-      </p:nvGrpSpPr>
-      <p:grpSpPr/>
-      <p:sp>
-        <p:nvSpPr>
-          <p:cNvPr id="2" name="Title 1"/>
-          <p:cNvSpPr>
-            <a:spLocks noGrp="1"/>
-          </p:cNvSpPr>
-          <p:nvPr>
-            <p:ph type="ctrTitle"/>
-          </p:nvPr>
-        </p:nvSpPr>
-        <p:spPr/>
-        <p:txBody>
-          <a:bodyPr/>
-          <a:lstStyle/>
-          <a:p>
-            <a:r>
-              <a:t>Before you start</a:t>
-            </a:r>
-          </a:p>
-        </p:txBody>
-      </p:sp>
-      <p:sp>
-        <p:nvSpPr>
-          <p:cNvPr id="3" name="Text Placeholder 2"/>
-          <p:cNvSpPr>
-            <a:spLocks noGrp="1"/>
-          </p:cNvSpPr>
-          <p:nvPr>
-            <p:ph type="body" idx="10" sz="quarter"/>
-          </p:nvPr>
-        </p:nvSpPr>
-        <p:spPr/>
-        <p:txBody>
-          <a:bodyPr/>
-          <a:lstStyle/>
-          <a:p/>
-        </p:txBody>
-      </p:sp>
-    </p:spTree>
-  </p:cSld>
-  <p:clrMapOvr>
-    <a:masterClrMapping/>
-  </p:clrMapOvr>
-</p:sld>
-</file>
-
-<file path=ppt/slides/slide9.xml><?xml version="1.0" encoding="utf-8"?>
-<p:sld xmlns:a="http://schemas.openxmlformats.org/drawingml/2006/main" xmlns:p="http://schemas.openxmlformats.org/presentationml/2006/main" xmlns:r="http://schemas.openxmlformats.org/officeDocument/2006/relationships">
-  <p:cSld>
-    <p:spTree>
-      <p:nvGrpSpPr>
-        <p:cNvPr id="1" name=""/>
-        <p:cNvGrpSpPr/>
-        <p:nvPr/>
-      </p:nvGrpSpPr>
-      <p:grpSpPr/>
-      <p:sp>
-        <p:nvSpPr>
-          <p:cNvPr id="2" name="Content Placeholder 1"/>
-          <p:cNvSpPr>
-            <a:spLocks noGrp="1"/>
-          </p:cNvSpPr>
-          <p:nvPr>
-            <p:ph idx="1"/>
-          </p:nvPr>
-        </p:nvSpPr>
-        <p:spPr/>
-        <p:txBody>
-          <a:bodyPr/>
-          <a:lstStyle/>
-          <a:p>
-            <a:r>
-              <a:t>GitHub Copilot license activated</a:t>
-            </a:r>
-          </a:p>
-          <a:p>
-            <a:r>
-              <a:t>VS Code with the GitHub Copilot extension</a:t>
-            </a:r>
-          </a:p>
-          <a:p>
-            <a:r>
-              <a:t>Node.js 20+ and Git installed and configured</a:t>
-            </a:r>
-          </a:p>
-          <a:p>
-            <a:r>
-              <a:t>Clone the repo, then run npm install</a:t>
-            </a:r>
-          </a:p>
-          <a:p>
-            <a:r>
-              <a:t>Verify the Copilot icon appears in the status bar</a:t>
-            </a:r>
-          </a:p>
-        </p:txBody>
-      </p:sp>
-      <p:sp>
-        <p:nvSpPr>
-          <p:cNvPr id="3" name="Text Placeholder 2"/>
-          <p:cNvSpPr>
-            <a:spLocks noGrp="1"/>
-          </p:cNvSpPr>
-          <p:nvPr>
-            <p:ph type="body" idx="32" sz="quarter"/>
-          </p:nvPr>
-        </p:nvSpPr>
-        <p:spPr/>
-        <p:txBody>
-          <a:bodyPr/>
-          <a:lstStyle/>
-          <a:p>
-            <a:r>
-              <a:t>Setup</a:t>
-            </a:r>
-          </a:p>
-        </p:txBody>
-      </p:sp>
-      <p:sp>
-        <p:nvSpPr>
-          <p:cNvPr id="4" name="Title 3"/>
-          <p:cNvSpPr>
-            <a:spLocks noGrp="1"/>
-          </p:cNvSpPr>
-          <p:nvPr>
-            <p:ph type="ctrTitle"/>
-          </p:nvPr>
-        </p:nvSpPr>
-        <p:spPr/>
-        <p:txBody>
-          <a:bodyPr/>
-          <a:lstStyle/>
-          <a:p>
-            <a:r>
-              <a:t>Prerequisites &amp; setup</a:t>
-            </a:r>
-          </a:p>
-        </p:txBody>
-      </p:sp>
-      <p:sp>
-        <p:nvSpPr>
-          <p:cNvPr id="5" name="Text Placeholder 4"/>
-          <p:cNvSpPr>
-            <a:spLocks noGrp="1"/>
-          </p:cNvSpPr>
-          <p:nvPr>
-            <p:ph type="body" idx="10" sz="quarter"/>
-          </p:nvPr>
-        </p:nvSpPr>
-        <p:spPr/>
-        <p:txBody>
-          <a:bodyPr/>
-          <a:lstStyle/>
-          <a:p/>
-        </p:txBody>
-      </p:sp>
-    </p:spTree>
   </p:cSld>
   <p:clrMapOvr>
     <a:masterClrMapping/>
@@ -9014,7 +8137,7 @@
 </a:theme>
 </file>
 
-<file path=ppt/theme/theme7.xml><?xml version="1.0" encoding="utf-8"?>
+<file path=ppt/theme/theme2.xml><?xml version="1.0" encoding="utf-8"?>
 <a:theme xmlns:a="http://schemas.openxmlformats.org/drawingml/2006/main" name="Office Theme">
   <a:themeElements>
     <a:clrScheme name="Office">
@@ -9330,29 +8453,6 @@
 </file>
 
 <file path=customXml/item1.xml><?xml version="1.0" encoding="utf-8"?>
-<?mso-contentType ?>
-<FormTemplates xmlns="http://schemas.microsoft.com/sharepoint/v3/contenttype/forms">
-  <Display>DocumentLibraryForm</Display>
-  <Edit>DocumentLibraryForm</Edit>
-  <New>DocumentLibraryForm</New>
-</FormTemplates>
-</file>
-
-<file path=customXml/item2.xml><?xml version="1.0" encoding="utf-8"?>
-<p:properties xmlns:p="http://schemas.microsoft.com/office/2006/metadata/properties" xmlns:xsi="http://www.w3.org/2001/XMLSchema-instance" xmlns:pc="http://schemas.microsoft.com/office/infopath/2007/PartnerControls">
-  <documentManagement>
-    <ProductName xmlns="39208136-c58e-4e30-a1ea-e9b896dfd74b">GitHub Copilot, GitHub Actions, GitHub Advanced Security, GitHub Enterprise Cloud, GHC, GHA, GHAS, GHEC</ProductName>
-    <_ip_UnifiedCompliancePolicyUIAction xmlns="http://schemas.microsoft.com/sharepoint/v3" xsi:nil="true"/>
-    <Audience xmlns="39208136-c58e-4e30-a1ea-e9b896dfd74b" xsi:nil="true"/>
-    <_ip_UnifiedCompliancePolicyProperties xmlns="http://schemas.microsoft.com/sharepoint/v3" xsi:nil="true"/>
-    <LastUpdatedDate xmlns="39208136-c58e-4e30-a1ea-e9b896dfd74b" xsi:nil="true"/>
-    <Topic xmlns="39208136-c58e-4e30-a1ea-e9b896dfd74b" xsi:nil="true"/>
-    <Status xmlns="39208136-c58e-4e30-a1ea-e9b896dfd74b" xsi:nil="true"/>
-  </documentManagement>
-</p:properties>
-</file>
-
-<file path=customXml/item3.xml><?xml version="1.0" encoding="utf-8"?>
 <ct:contentTypeSchema xmlns:ct="http://schemas.microsoft.com/office/2006/metadata/contentType" xmlns:ma="http://schemas.microsoft.com/office/2006/metadata/properties/metaAttributes" ct:_="" ma:_="" ma:contentTypeName="Document" ma:contentTypeID="0x010100575BED04A73EC04F8606832822A6508B" ma:contentTypeVersion="11" ma:contentTypeDescription="Create a new document." ma:contentTypeScope="" ma:versionID="3ede87957b835f638e51dd9dd4d1449d">
   <xsd:schema xmlns:xsd="http://www.w3.org/2001/XMLSchema" xmlns:xs="http://www.w3.org/2001/XMLSchema" xmlns:p="http://schemas.microsoft.com/office/2006/metadata/properties" xmlns:ns1="http://schemas.microsoft.com/sharepoint/v3" xmlns:ns2="39208136-c58e-4e30-a1ea-e9b896dfd74b" targetNamespace="http://schemas.microsoft.com/office/2006/metadata/properties" ma:root="true" ma:fieldsID="d7956be1e318c982bedba1a35c9f1493" ns1:_="" ns2:_="">
     <xsd:import namespace="http://schemas.microsoft.com/sharepoint/v3"/>
@@ -9578,10 +8678,44 @@
 </ct:contentTypeSchema>
 </file>
 
+<file path=customXml/item2.xml><?xml version="1.0" encoding="utf-8"?>
+<p:properties xmlns:p="http://schemas.microsoft.com/office/2006/metadata/properties" xmlns:xsi="http://www.w3.org/2001/XMLSchema-instance" xmlns:pc="http://schemas.microsoft.com/office/infopath/2007/PartnerControls">
+  <documentManagement>
+    <ProductName xmlns="39208136-c58e-4e30-a1ea-e9b896dfd74b">GitHub Copilot, GitHub Actions, GitHub Advanced Security, GitHub Enterprise Cloud, GHC, GHA, GHAS, GHEC</ProductName>
+    <_ip_UnifiedCompliancePolicyUIAction xmlns="http://schemas.microsoft.com/sharepoint/v3" xsi:nil="true"/>
+    <Audience xmlns="39208136-c58e-4e30-a1ea-e9b896dfd74b" xsi:nil="true"/>
+    <_ip_UnifiedCompliancePolicyProperties xmlns="http://schemas.microsoft.com/sharepoint/v3" xsi:nil="true"/>
+    <LastUpdatedDate xmlns="39208136-c58e-4e30-a1ea-e9b896dfd74b" xsi:nil="true"/>
+    <Topic xmlns="39208136-c58e-4e30-a1ea-e9b896dfd74b" xsi:nil="true"/>
+    <Status xmlns="39208136-c58e-4e30-a1ea-e9b896dfd74b" xsi:nil="true"/>
+  </documentManagement>
+</p:properties>
+</file>
+
+<file path=customXml/item3.xml><?xml version="1.0" encoding="utf-8"?>
+<?mso-contentType ?>
+<FormTemplates xmlns="http://schemas.microsoft.com/sharepoint/v3/contenttype/forms">
+  <Display>DocumentLibraryForm</Display>
+  <Edit>DocumentLibraryForm</Edit>
+  <New>DocumentLibraryForm</New>
+</FormTemplates>
+</file>
+
 <file path=customXml/itemProps1.xml><?xml version="1.0" encoding="utf-8"?>
-<ds:datastoreItem xmlns:ds="http://schemas.openxmlformats.org/officeDocument/2006/customXml" ds:itemID="{AB543426-3F68-4F40-8364-AB61CAE32945}">
+<ds:datastoreItem xmlns:ds="http://schemas.openxmlformats.org/officeDocument/2006/customXml" ds:itemID="{6D6951A7-F0FD-40B9-9CCF-618617AD55DB}">
   <ds:schemaRefs>
-    <ds:schemaRef ds:uri="http://schemas.microsoft.com/sharepoint/v3/contenttype/forms"/>
+    <ds:schemaRef ds:uri="http://schemas.microsoft.com/office/2006/metadata/contentType"/>
+    <ds:schemaRef ds:uri="http://schemas.microsoft.com/office/2006/metadata/properties/metaAttributes"/>
+    <ds:schemaRef ds:uri="http://www.w3.org/2001/XMLSchema"/>
+    <ds:schemaRef ds:uri="http://schemas.microsoft.com/office/2006/metadata/properties"/>
+    <ds:schemaRef ds:uri="http://schemas.microsoft.com/sharepoint/v3"/>
+    <ds:schemaRef ds:uri="39208136-c58e-4e30-a1ea-e9b896dfd74b"/>
+    <ds:schemaRef ds:uri="http://schemas.microsoft.com/office/2006/documentManagement/types"/>
+    <ds:schemaRef ds:uri="http://schemas.microsoft.com/office/infopath/2007/PartnerControls"/>
+    <ds:schemaRef ds:uri="http://schemas.openxmlformats.org/package/2006/metadata/core-properties"/>
+    <ds:schemaRef ds:uri="http://purl.org/dc/elements/1.1/"/>
+    <ds:schemaRef ds:uri="http://purl.org/dc/terms/"/>
+    <ds:schemaRef ds:uri="http://schemas.microsoft.com/internal/obd"/>
   </ds:schemaRefs>
 </ds:datastoreItem>
 </file>
@@ -9604,20 +8738,9 @@
 </file>
 
 <file path=customXml/itemProps3.xml><?xml version="1.0" encoding="utf-8"?>
-<ds:datastoreItem xmlns:ds="http://schemas.openxmlformats.org/officeDocument/2006/customXml" ds:itemID="{6D6951A7-F0FD-40B9-9CCF-618617AD55DB}">
+<ds:datastoreItem xmlns:ds="http://schemas.openxmlformats.org/officeDocument/2006/customXml" ds:itemID="{AB543426-3F68-4F40-8364-AB61CAE32945}">
   <ds:schemaRefs>
-    <ds:schemaRef ds:uri="http://schemas.microsoft.com/office/2006/metadata/contentType"/>
-    <ds:schemaRef ds:uri="http://schemas.microsoft.com/office/2006/metadata/properties/metaAttributes"/>
-    <ds:schemaRef ds:uri="http://www.w3.org/2001/XMLSchema"/>
-    <ds:schemaRef ds:uri="http://schemas.microsoft.com/office/2006/metadata/properties"/>
-    <ds:schemaRef ds:uri="http://schemas.microsoft.com/sharepoint/v3"/>
-    <ds:schemaRef ds:uri="39208136-c58e-4e30-a1ea-e9b896dfd74b"/>
-    <ds:schemaRef ds:uri="http://schemas.microsoft.com/office/2006/documentManagement/types"/>
-    <ds:schemaRef ds:uri="http://schemas.microsoft.com/office/infopath/2007/PartnerControls"/>
-    <ds:schemaRef ds:uri="http://schemas.openxmlformats.org/package/2006/metadata/core-properties"/>
-    <ds:schemaRef ds:uri="http://purl.org/dc/elements/1.1/"/>
-    <ds:schemaRef ds:uri="http://purl.org/dc/terms/"/>
-    <ds:schemaRef ds:uri="http://schemas.microsoft.com/internal/obd"/>
+    <ds:schemaRef ds:uri="http://schemas.microsoft.com/sharepoint/v3/contenttype/forms"/>
   </ds:schemaRefs>
 </ds:datastoreItem>
 </file>

--- a/resources/github-copilot-workshop.pptx
+++ b/resources/github-copilot-workshop.pptx
@@ -15,6 +15,12 @@
     <p:sldId id="658" r:id="rId9"/>
     <p:sldId id="659" r:id="rId10"/>
     <p:sldId id="660" r:id="rId11"/>
+    <p:sldId id="661" r:id="rId18"/>
+    <p:sldId id="662" r:id="rId19"/>
+    <p:sldId id="663" r:id="rId20"/>
+    <p:sldId id="664" r:id="rId21"/>
+    <p:sldId id="665" r:id="rId22"/>
+    <p:sldId id="666" r:id="rId23"/>
     <p:sldId id="582" r:id="rId12"/>
   </p:sldIdLst>
   <p:sldSz cx="12188825" cy="6858000"/>
@@ -6742,6 +6748,571 @@
 </p:sld>
 </file>
 
+<file path=ppt/slides/slide10.xml><?xml version="1.0" encoding="utf-8"?>
+<p:sld xmlns:a="http://schemas.openxmlformats.org/drawingml/2006/main" xmlns:p="http://schemas.openxmlformats.org/presentationml/2006/main" xmlns:r="http://schemas.openxmlformats.org/officeDocument/2006/relationships">
+  <p:cSld>
+    <p:spTree>
+      <p:nvGrpSpPr>
+        <p:cNvPr id="1" name=""/>
+        <p:cNvGrpSpPr/>
+        <p:nvPr/>
+      </p:nvGrpSpPr>
+      <p:grpSpPr/>
+      <p:sp>
+        <p:nvSpPr>
+          <p:cNvPr id="2" name="Content Placeholder 1"/>
+          <p:cNvSpPr>
+            <a:spLocks noGrp="1"/>
+          </p:cNvSpPr>
+          <p:nvPr>
+            <p:ph idx="1"/>
+          </p:nvPr>
+        </p:nvSpPr>
+        <p:spPr/>
+        <p:txBody>
+          <a:bodyPr/>
+          <a:lstStyle/>
+          <a:p>
+            <a:r>
+              <a:t>Write clear comments that generate high-quality code.</a:t>
+            </a:r>
+          </a:p>
+          <a:p>
+            <a:r>
+              <a:t>Build data-structure, algorithm and business-logic functions.</a:t>
+            </a:r>
+          </a:p>
+          <a:p>
+            <a:r>
+              <a:t>Generate test cases straight from your comments.</a:t>
+            </a:r>
+          </a:p>
+          <a:p>
+            <a:r>
+              <a:t>Learn why specificity — inputs, outputs, edge cases — matters.</a:t>
+            </a:r>
+          </a:p>
+        </p:txBody>
+      </p:sp>
+      <p:sp>
+        <p:nvSpPr>
+          <p:cNvPr id="3" name="Text Placeholder 2"/>
+          <p:cNvSpPr>
+            <a:spLocks noGrp="1"/>
+          </p:cNvSpPr>
+          <p:nvPr>
+            <p:ph type="body" idx="32" sz="quarter"/>
+          </p:nvPr>
+        </p:nvSpPr>
+        <p:spPr/>
+        <p:txBody>
+          <a:bodyPr/>
+          <a:lstStyle/>
+          <a:p>
+            <a:r>
+              <a:t>Exercise 02 · 30 min</a:t>
+            </a:r>
+          </a:p>
+        </p:txBody>
+      </p:sp>
+      <p:sp>
+        <p:nvSpPr>
+          <p:cNvPr id="4" name="Title 3"/>
+          <p:cNvSpPr>
+            <a:spLocks noGrp="1"/>
+          </p:cNvSpPr>
+          <p:nvPr>
+            <p:ph type="ctrTitle"/>
+          </p:nvPr>
+        </p:nvSpPr>
+        <p:spPr/>
+        <p:txBody>
+          <a:bodyPr/>
+          <a:lstStyle/>
+          <a:p>
+            <a:r>
+              <a:t>Comment-to-Code</a:t>
+            </a:r>
+          </a:p>
+        </p:txBody>
+      </p:sp>
+      <p:sp>
+        <p:nvSpPr>
+          <p:cNvPr id="5" name="Text Placeholder 4"/>
+          <p:cNvSpPr>
+            <a:spLocks noGrp="1"/>
+          </p:cNvSpPr>
+          <p:nvPr>
+            <p:ph type="body" idx="10" sz="quarter"/>
+          </p:nvPr>
+        </p:nvSpPr>
+        <p:spPr/>
+        <p:txBody>
+          <a:bodyPr/>
+          <a:lstStyle/>
+          <a:p/>
+        </p:txBody>
+      </p:sp>
+    </p:spTree>
+  </p:cSld>
+  <p:clrMapOvr>
+    <a:masterClrMapping/>
+  </p:clrMapOvr>
+</p:sld>
+</file>
+
+<file path=ppt/slides/slide11.xml><?xml version="1.0" encoding="utf-8"?>
+<p:sld xmlns:a="http://schemas.openxmlformats.org/drawingml/2006/main" xmlns:p="http://schemas.openxmlformats.org/presentationml/2006/main" xmlns:r="http://schemas.openxmlformats.org/officeDocument/2006/relationships">
+  <p:cSld>
+    <p:spTree>
+      <p:nvGrpSpPr>
+        <p:cNvPr id="1" name=""/>
+        <p:cNvGrpSpPr/>
+        <p:nvPr/>
+      </p:nvGrpSpPr>
+      <p:grpSpPr/>
+      <p:sp>
+        <p:nvSpPr>
+          <p:cNvPr id="2" name="Content Placeholder 1"/>
+          <p:cNvSpPr>
+            <a:spLocks noGrp="1"/>
+          </p:cNvSpPr>
+          <p:nvPr>
+            <p:ph idx="1"/>
+          </p:nvPr>
+        </p:nvSpPr>
+        <p:spPr/>
+        <p:txBody>
+          <a:bodyPr/>
+          <a:lstStyle/>
+          <a:p>
+            <a:r>
+              <a:t>Master multi-line completion and working with partial code.</a:t>
+            </a:r>
+          </a:p>
+          <a:p>
+            <a:r>
+              <a:t>Complete functions, classes and async API calls.</a:t>
+            </a:r>
+          </a:p>
+          <a:p>
+            <a:r>
+              <a:t>Recognize loop, iteration and error-handling patterns.</a:t>
+            </a:r>
+          </a:p>
+          <a:p>
+            <a:r>
+              <a:t>Use context — names and imports — to steer suggestions.</a:t>
+            </a:r>
+          </a:p>
+        </p:txBody>
+      </p:sp>
+      <p:sp>
+        <p:nvSpPr>
+          <p:cNvPr id="3" name="Text Placeholder 2"/>
+          <p:cNvSpPr>
+            <a:spLocks noGrp="1"/>
+          </p:cNvSpPr>
+          <p:nvPr>
+            <p:ph type="body" idx="32" sz="quarter"/>
+          </p:nvPr>
+        </p:nvSpPr>
+        <p:spPr/>
+        <p:txBody>
+          <a:bodyPr/>
+          <a:lstStyle/>
+          <a:p>
+            <a:r>
+              <a:t>Exercise 03 · 30 min</a:t>
+            </a:r>
+          </a:p>
+        </p:txBody>
+      </p:sp>
+      <p:sp>
+        <p:nvSpPr>
+          <p:cNvPr id="4" name="Title 3"/>
+          <p:cNvSpPr>
+            <a:spLocks noGrp="1"/>
+          </p:cNvSpPr>
+          <p:nvPr>
+            <p:ph type="ctrTitle"/>
+          </p:nvPr>
+        </p:nvSpPr>
+        <p:spPr/>
+        <p:txBody>
+          <a:bodyPr/>
+          <a:lstStyle/>
+          <a:p>
+            <a:r>
+              <a:t>Code Completion</a:t>
+            </a:r>
+          </a:p>
+        </p:txBody>
+      </p:sp>
+      <p:sp>
+        <p:nvSpPr>
+          <p:cNvPr id="5" name="Text Placeholder 4"/>
+          <p:cNvSpPr>
+            <a:spLocks noGrp="1"/>
+          </p:cNvSpPr>
+          <p:nvPr>
+            <p:ph type="body" idx="10" sz="quarter"/>
+          </p:nvPr>
+        </p:nvSpPr>
+        <p:spPr/>
+        <p:txBody>
+          <a:bodyPr/>
+          <a:lstStyle/>
+          <a:p/>
+        </p:txBody>
+      </p:sp>
+    </p:spTree>
+  </p:cSld>
+  <p:clrMapOvr>
+    <a:masterClrMapping/>
+  </p:clrMapOvr>
+</p:sld>
+</file>
+
+<file path=ppt/slides/slide12.xml><?xml version="1.0" encoding="utf-8"?>
+<p:sld xmlns:a="http://schemas.openxmlformats.org/drawingml/2006/main" xmlns:p="http://schemas.openxmlformats.org/presentationml/2006/main" xmlns:r="http://schemas.openxmlformats.org/officeDocument/2006/relationships">
+  <p:cSld>
+    <p:spTree>
+      <p:nvGrpSpPr>
+        <p:cNvPr id="1" name=""/>
+        <p:cNvGrpSpPr/>
+        <p:nvPr/>
+      </p:nvGrpSpPr>
+      <p:grpSpPr/>
+      <p:sp>
+        <p:nvSpPr>
+          <p:cNvPr id="2" name="Content Placeholder 1"/>
+          <p:cNvSpPr>
+            <a:spLocks noGrp="1"/>
+          </p:cNvSpPr>
+          <p:nvPr>
+            <p:ph idx="1"/>
+          </p:nvPr>
+        </p:nvSpPr>
+        <p:spPr/>
+        <p:txBody>
+          <a:bodyPr/>
+          <a:lstStyle/>
+          <a:p>
+            <a:r>
+              <a:t>Explain, debug, document and test with Copilot Chat.</a:t>
+            </a:r>
+          </a:p>
+          <a:p>
+            <a:r>
+              <a:t>Use slash commands: /explain, /fix, /doc, /tests.</a:t>
+            </a:r>
+          </a:p>
+          <a:p>
+            <a:r>
+              <a:t>Optimize and refactor complex, nested functions.</a:t>
+            </a:r>
+          </a:p>
+          <a:p>
+            <a:r>
+              <a:t>Analyze code for security and quality issues.</a:t>
+            </a:r>
+          </a:p>
+        </p:txBody>
+      </p:sp>
+      <p:sp>
+        <p:nvSpPr>
+          <p:cNvPr id="3" name="Text Placeholder 2"/>
+          <p:cNvSpPr>
+            <a:spLocks noGrp="1"/>
+          </p:cNvSpPr>
+          <p:nvPr>
+            <p:ph type="body" idx="32" sz="quarter"/>
+          </p:nvPr>
+        </p:nvSpPr>
+        <p:spPr/>
+        <p:txBody>
+          <a:bodyPr/>
+          <a:lstStyle/>
+          <a:p>
+            <a:r>
+              <a:t>Exercise 04 · 45 min</a:t>
+            </a:r>
+          </a:p>
+        </p:txBody>
+      </p:sp>
+      <p:sp>
+        <p:nvSpPr>
+          <p:cNvPr id="4" name="Title 3"/>
+          <p:cNvSpPr>
+            <a:spLocks noGrp="1"/>
+          </p:cNvSpPr>
+          <p:nvPr>
+            <p:ph type="ctrTitle"/>
+          </p:nvPr>
+        </p:nvSpPr>
+        <p:spPr/>
+        <p:txBody>
+          <a:bodyPr/>
+          <a:lstStyle/>
+          <a:p>
+            <a:r>
+              <a:t>Copilot Chat</a:t>
+            </a:r>
+          </a:p>
+        </p:txBody>
+      </p:sp>
+      <p:sp>
+        <p:nvSpPr>
+          <p:cNvPr id="5" name="Text Placeholder 4"/>
+          <p:cNvSpPr>
+            <a:spLocks noGrp="1"/>
+          </p:cNvSpPr>
+          <p:nvPr>
+            <p:ph type="body" idx="10" sz="quarter"/>
+          </p:nvPr>
+        </p:nvSpPr>
+        <p:spPr/>
+        <p:txBody>
+          <a:bodyPr/>
+          <a:lstStyle/>
+          <a:p/>
+        </p:txBody>
+      </p:sp>
+    </p:spTree>
+  </p:cSld>
+  <p:clrMapOvr>
+    <a:masterClrMapping/>
+  </p:clrMapOvr>
+</p:sld>
+</file>
+
+<file path=ppt/slides/slide13.xml><?xml version="1.0" encoding="utf-8"?>
+<p:sld xmlns:a="http://schemas.openxmlformats.org/drawingml/2006/main" xmlns:p="http://schemas.openxmlformats.org/presentationml/2006/main" xmlns:r="http://schemas.openxmlformats.org/officeDocument/2006/relationships">
+  <p:cSld>
+    <p:spTree>
+      <p:nvGrpSpPr>
+        <p:cNvPr id="1" name=""/>
+        <p:cNvGrpSpPr/>
+        <p:nvPr/>
+      </p:nvGrpSpPr>
+      <p:grpSpPr/>
+      <p:sp>
+        <p:nvSpPr>
+          <p:cNvPr id="2" name="Content Placeholder 1"/>
+          <p:cNvSpPr>
+            <a:spLocks noGrp="1"/>
+          </p:cNvSpPr>
+          <p:nvPr>
+            <p:ph idx="1"/>
+          </p:nvPr>
+        </p:nvSpPr>
+        <p:spPr/>
+        <p:txBody>
+          <a:bodyPr/>
+          <a:lstStyle/>
+          <a:p>
+            <a:r>
+              <a:t>Build a complete Task Manager — REST API + web UI.</a:t>
+            </a:r>
+          </a:p>
+          <a:p>
+            <a:r>
+              <a:t>Express server backed by an in-memory task store.</a:t>
+            </a:r>
+          </a:p>
+          <a:p>
+            <a:r>
+              <a:t>Interactive frontend that updates without a refresh.</a:t>
+            </a:r>
+          </a:p>
+          <a:p>
+            <a:r>
+              <a:t>Verify end-to-end in the browser and with curl.</a:t>
+            </a:r>
+          </a:p>
+        </p:txBody>
+      </p:sp>
+      <p:sp>
+        <p:nvSpPr>
+          <p:cNvPr id="3" name="Text Placeholder 2"/>
+          <p:cNvSpPr>
+            <a:spLocks noGrp="1"/>
+          </p:cNvSpPr>
+          <p:nvPr>
+            <p:ph type="body" idx="32" sz="quarter"/>
+          </p:nvPr>
+        </p:nvSpPr>
+        <p:spPr/>
+        <p:txBody>
+          <a:bodyPr/>
+          <a:lstStyle/>
+          <a:p>
+            <a:r>
+              <a:t>Exercise 05 · 60 min</a:t>
+            </a:r>
+          </a:p>
+        </p:txBody>
+      </p:sp>
+      <p:sp>
+        <p:nvSpPr>
+          <p:cNvPr id="4" name="Title 3"/>
+          <p:cNvSpPr>
+            <a:spLocks noGrp="1"/>
+          </p:cNvSpPr>
+          <p:nvPr>
+            <p:ph type="ctrTitle"/>
+          </p:nvPr>
+        </p:nvSpPr>
+        <p:spPr/>
+        <p:txBody>
+          <a:bodyPr/>
+          <a:lstStyle/>
+          <a:p>
+            <a:r>
+              <a:t>Real-World Project</a:t>
+            </a:r>
+          </a:p>
+        </p:txBody>
+      </p:sp>
+      <p:sp>
+        <p:nvSpPr>
+          <p:cNvPr id="5" name="Text Placeholder 4"/>
+          <p:cNvSpPr>
+            <a:spLocks noGrp="1"/>
+          </p:cNvSpPr>
+          <p:nvPr>
+            <p:ph type="body" idx="10" sz="quarter"/>
+          </p:nvPr>
+        </p:nvSpPr>
+        <p:spPr/>
+        <p:txBody>
+          <a:bodyPr/>
+          <a:lstStyle/>
+          <a:p/>
+        </p:txBody>
+      </p:sp>
+    </p:spTree>
+  </p:cSld>
+  <p:clrMapOvr>
+    <a:masterClrMapping/>
+  </p:clrMapOvr>
+</p:sld>
+</file>
+
+<file path=ppt/slides/slide14.xml><?xml version="1.0" encoding="utf-8"?>
+<p:sld xmlns:a="http://schemas.openxmlformats.org/drawingml/2006/main" xmlns:p="http://schemas.openxmlformats.org/presentationml/2006/main" xmlns:r="http://schemas.openxmlformats.org/officeDocument/2006/relationships">
+  <p:cSld>
+    <p:spTree>
+      <p:nvGrpSpPr>
+        <p:cNvPr id="1" name=""/>
+        <p:cNvGrpSpPr/>
+        <p:nvPr/>
+      </p:nvGrpSpPr>
+      <p:grpSpPr/>
+      <p:sp>
+        <p:nvSpPr>
+          <p:cNvPr id="2" name="Content Placeholder 1"/>
+          <p:cNvSpPr>
+            <a:spLocks noGrp="1"/>
+          </p:cNvSpPr>
+          <p:nvPr>
+            <p:ph idx="1"/>
+          </p:nvPr>
+        </p:nvSpPr>
+        <p:spPr/>
+        <p:txBody>
+          <a:bodyPr/>
+          <a:lstStyle/>
+          <a:p>
+            <a:r>
+              <a:t>Orchestrate an end-to-end feature with a custom agent.</a:t>
+            </a:r>
+          </a:p>
+          <a:p>
+            <a:r>
+              <a:t>Add repo instructions and a reusable task-crud skill.</a:t>
+            </a:r>
+          </a:p>
+          <a:p>
+            <a:r>
+              <a:t>Drive and verify the UI with the Playwright MCP server.</a:t>
+            </a:r>
+          </a:p>
+          <a:p>
+            <a:r>
+              <a:t>Run the implement → verify → fix → re-verify loop.</a:t>
+            </a:r>
+          </a:p>
+        </p:txBody>
+      </p:sp>
+      <p:sp>
+        <p:nvSpPr>
+          <p:cNvPr id="3" name="Text Placeholder 2"/>
+          <p:cNvSpPr>
+            <a:spLocks noGrp="1"/>
+          </p:cNvSpPr>
+          <p:nvPr>
+            <p:ph type="body" idx="32" sz="quarter"/>
+          </p:nvPr>
+        </p:nvSpPr>
+        <p:spPr/>
+        <p:txBody>
+          <a:bodyPr/>
+          <a:lstStyle/>
+          <a:p>
+            <a:r>
+              <a:t>Exercise 06 · 90 min · Bonus</a:t>
+            </a:r>
+          </a:p>
+        </p:txBody>
+      </p:sp>
+      <p:sp>
+        <p:nvSpPr>
+          <p:cNvPr id="4" name="Title 3"/>
+          <p:cNvSpPr>
+            <a:spLocks noGrp="1"/>
+          </p:cNvSpPr>
+          <p:nvPr>
+            <p:ph type="ctrTitle"/>
+          </p:nvPr>
+        </p:nvSpPr>
+        <p:spPr/>
+        <p:txBody>
+          <a:bodyPr/>
+          <a:lstStyle/>
+          <a:p>
+            <a:r>
+              <a:t>Agents, Skills &amp; MCP</a:t>
+            </a:r>
+          </a:p>
+        </p:txBody>
+      </p:sp>
+      <p:sp>
+        <p:nvSpPr>
+          <p:cNvPr id="5" name="Text Placeholder 4"/>
+          <p:cNvSpPr>
+            <a:spLocks noGrp="1"/>
+          </p:cNvSpPr>
+          <p:nvPr>
+            <p:ph type="body" idx="10" sz="quarter"/>
+          </p:nvPr>
+        </p:nvSpPr>
+        <p:spPr/>
+        <p:txBody>
+          <a:bodyPr/>
+          <a:lstStyle/>
+          <a:p/>
+        </p:txBody>
+      </p:sp>
+    </p:spTree>
+  </p:cSld>
+  <p:clrMapOvr>
+    <a:masterClrMapping/>
+  </p:clrMapOvr>
+</p:sld>
+</file>
+
 <file path=ppt/slides/slide2.xml><?xml version="1.0" encoding="utf-8"?>
 <p:sld xmlns:a="http://schemas.openxmlformats.org/drawingml/2006/main" xmlns:r="http://schemas.openxmlformats.org/officeDocument/2006/relationships" xmlns:p="http://schemas.openxmlformats.org/presentationml/2006/main">
   <p:cSld>
@@ -7929,6 +8500,119 @@
         <p14:creationId xmlns:p14="http://schemas.microsoft.com/office/powerpoint/2010/main" val="2507593852"/>
       </p:ext>
     </p:extLst>
+  </p:cSld>
+  <p:clrMapOvr>
+    <a:masterClrMapping/>
+  </p:clrMapOvr>
+</p:sld>
+</file>
+
+<file path=ppt/slides/slide9.xml><?xml version="1.0" encoding="utf-8"?>
+<p:sld xmlns:a="http://schemas.openxmlformats.org/drawingml/2006/main" xmlns:p="http://schemas.openxmlformats.org/presentationml/2006/main" xmlns:r="http://schemas.openxmlformats.org/officeDocument/2006/relationships">
+  <p:cSld>
+    <p:spTree>
+      <p:nvGrpSpPr>
+        <p:cNvPr id="1" name=""/>
+        <p:cNvGrpSpPr/>
+        <p:nvPr/>
+      </p:nvGrpSpPr>
+      <p:grpSpPr/>
+      <p:sp>
+        <p:nvSpPr>
+          <p:cNvPr id="2" name="Content Placeholder 1"/>
+          <p:cNvSpPr>
+            <a:spLocks noGrp="1"/>
+          </p:cNvSpPr>
+          <p:nvPr>
+            <p:ph idx="1"/>
+          </p:nvPr>
+        </p:nvSpPr>
+        <p:spPr/>
+        <p:txBody>
+          <a:bodyPr/>
+          <a:lstStyle/>
+          <a:p>
+            <a:r>
+              <a:t>Get comfortable with Copilot's core code suggestions.</a:t>
+            </a:r>
+          </a:p>
+          <a:p>
+            <a:r>
+              <a:t>Verify Copilot is active, then trigger a suggestion from a comment.</a:t>
+            </a:r>
+          </a:p>
+          <a:p>
+            <a:r>
+              <a:t>Cycle alternatives with Alt+] / Alt+[ and accept with Tab.</a:t>
+            </a:r>
+          </a:p>
+          <a:p>
+            <a:r>
+              <a:t>Let inline completion finish a function for you.</a:t>
+            </a:r>
+          </a:p>
+        </p:txBody>
+      </p:sp>
+      <p:sp>
+        <p:nvSpPr>
+          <p:cNvPr id="3" name="Text Placeholder 2"/>
+          <p:cNvSpPr>
+            <a:spLocks noGrp="1"/>
+          </p:cNvSpPr>
+          <p:nvPr>
+            <p:ph type="body" idx="32" sz="quarter"/>
+          </p:nvPr>
+        </p:nvSpPr>
+        <p:spPr/>
+        <p:txBody>
+          <a:bodyPr/>
+          <a:lstStyle/>
+          <a:p>
+            <a:r>
+              <a:t>Exercise 01 · 20 min</a:t>
+            </a:r>
+          </a:p>
+        </p:txBody>
+      </p:sp>
+      <p:sp>
+        <p:nvSpPr>
+          <p:cNvPr id="4" name="Title 3"/>
+          <p:cNvSpPr>
+            <a:spLocks noGrp="1"/>
+          </p:cNvSpPr>
+          <p:nvPr>
+            <p:ph type="ctrTitle"/>
+          </p:nvPr>
+        </p:nvSpPr>
+        <p:spPr/>
+        <p:txBody>
+          <a:bodyPr/>
+          <a:lstStyle/>
+          <a:p>
+            <a:r>
+              <a:t>Setup &amp; Basics</a:t>
+            </a:r>
+          </a:p>
+        </p:txBody>
+      </p:sp>
+      <p:sp>
+        <p:nvSpPr>
+          <p:cNvPr id="5" name="Text Placeholder 4"/>
+          <p:cNvSpPr>
+            <a:spLocks noGrp="1"/>
+          </p:cNvSpPr>
+          <p:nvPr>
+            <p:ph type="body" idx="10" sz="quarter"/>
+          </p:nvPr>
+        </p:nvSpPr>
+        <p:spPr/>
+        <p:txBody>
+          <a:bodyPr/>
+          <a:lstStyle/>
+          <a:p/>
+        </p:txBody>
+      </p:sp>
+    </p:spTree>
   </p:cSld>
   <p:clrMapOvr>
     <a:masterClrMapping/>

--- a/resources/github-copilot-workshop.pptx
+++ b/resources/github-copilot-workshop.pptx
@@ -5,7 +5,7 @@
     <p:sldMasterId id="2147483660" r:id="rId4"/>
   </p:sldMasterIdLst>
   <p:notesMasterIdLst>
-    <p:notesMasterId r:id="rId13"/>
+    <p:notesMasterId r:id="rId19"/>
   </p:notesMasterIdLst>
   <p:sldIdLst>
     <p:sldId id="651" r:id="rId5"/>
@@ -15,13 +15,13 @@
     <p:sldId id="658" r:id="rId9"/>
     <p:sldId id="659" r:id="rId10"/>
     <p:sldId id="660" r:id="rId11"/>
-    <p:sldId id="661" r:id="rId18"/>
-    <p:sldId id="662" r:id="rId19"/>
-    <p:sldId id="663" r:id="rId20"/>
-    <p:sldId id="664" r:id="rId21"/>
-    <p:sldId id="665" r:id="rId22"/>
-    <p:sldId id="666" r:id="rId23"/>
-    <p:sldId id="582" r:id="rId12"/>
+    <p:sldId id="661" r:id="rId12"/>
+    <p:sldId id="662" r:id="rId13"/>
+    <p:sldId id="663" r:id="rId14"/>
+    <p:sldId id="664" r:id="rId15"/>
+    <p:sldId id="665" r:id="rId16"/>
+    <p:sldId id="666" r:id="rId17"/>
+    <p:sldId id="582" r:id="rId18"/>
   </p:sldIdLst>
   <p:sldSz cx="12188825" cy="6858000"/>
   <p:notesSz cx="6858000" cy="9144000"/>
@@ -6749,7 +6749,7 @@
 </file>
 
 <file path=ppt/slides/slide10.xml><?xml version="1.0" encoding="utf-8"?>
-<p:sld xmlns:a="http://schemas.openxmlformats.org/drawingml/2006/main" xmlns:p="http://schemas.openxmlformats.org/presentationml/2006/main" xmlns:r="http://schemas.openxmlformats.org/officeDocument/2006/relationships">
+<p:sld xmlns:a="http://schemas.openxmlformats.org/drawingml/2006/main" xmlns:r="http://schemas.openxmlformats.org/officeDocument/2006/relationships" xmlns:p="http://schemas.openxmlformats.org/presentationml/2006/main">
   <p:cSld>
     <p:spTree>
       <p:nvGrpSpPr>
@@ -6757,7 +6757,14 @@
         <p:cNvGrpSpPr/>
         <p:nvPr/>
       </p:nvGrpSpPr>
-      <p:grpSpPr/>
+      <p:grpSpPr>
+        <a:xfrm>
+          <a:off x="0" y="0"/>
+          <a:ext cx="0" cy="0"/>
+          <a:chOff x="0" y="0"/>
+          <a:chExt cx="0" cy="0"/>
+        </a:xfrm>
+      </p:grpSpPr>
       <p:sp>
         <p:nvSpPr>
           <p:cNvPr id="2" name="Content Placeholder 1"/>
@@ -6774,22 +6781,22 @@
           <a:lstStyle/>
           <a:p>
             <a:r>
-              <a:t>Write clear comments that generate high-quality code.</a:t>
-            </a:r>
-          </a:p>
-          <a:p>
-            <a:r>
-              <a:t>Build data-structure, algorithm and business-logic functions.</a:t>
-            </a:r>
-          </a:p>
-          <a:p>
-            <a:r>
-              <a:t>Generate test cases straight from your comments.</a:t>
-            </a:r>
-          </a:p>
-          <a:p>
-            <a:r>
-              <a:t>Learn why specificity — inputs, outputs, edge cases — matters.</a:t>
+              <a:t>Master multi-line completion and working with partial code.</a:t>
+            </a:r>
+          </a:p>
+          <a:p>
+            <a:r>
+              <a:t>Complete functions, classes and async API calls.</a:t>
+            </a:r>
+          </a:p>
+          <a:p>
+            <a:r>
+              <a:t>Recognize loop, iteration and error-handling patterns.</a:t>
+            </a:r>
+          </a:p>
+          <a:p>
+            <a:r>
+              <a:t>Use context — names and imports — to steer suggestions.</a:t>
             </a:r>
           </a:p>
         </p:txBody>
@@ -6801,7 +6808,7 @@
             <a:spLocks noGrp="1"/>
           </p:cNvSpPr>
           <p:nvPr>
-            <p:ph type="body" idx="32" sz="quarter"/>
+            <p:ph type="body" sz="quarter" idx="32"/>
           </p:nvPr>
         </p:nvSpPr>
         <p:spPr/>
@@ -6810,7 +6817,7 @@
           <a:lstStyle/>
           <a:p>
             <a:r>
-              <a:t>Exercise 02 · 30 min</a:t>
+              <a:t>Exercise 03 · 30 min</a:t>
             </a:r>
           </a:p>
         </p:txBody>
@@ -6831,7 +6838,7 @@
           <a:lstStyle/>
           <a:p>
             <a:r>
-              <a:t>Comment-to-Code</a:t>
+              <a:t>Code Completion</a:t>
             </a:r>
           </a:p>
         </p:txBody>
@@ -6843,14 +6850,16 @@
             <a:spLocks noGrp="1"/>
           </p:cNvSpPr>
           <p:nvPr>
-            <p:ph type="body" idx="10" sz="quarter"/>
+            <p:ph type="body" sz="quarter" idx="10"/>
           </p:nvPr>
         </p:nvSpPr>
         <p:spPr/>
         <p:txBody>
           <a:bodyPr/>
           <a:lstStyle/>
-          <a:p/>
+          <a:p>
+            <a:endParaRPr/>
+          </a:p>
         </p:txBody>
       </p:sp>
     </p:spTree>
@@ -6862,7 +6871,7 @@
 </file>
 
 <file path=ppt/slides/slide11.xml><?xml version="1.0" encoding="utf-8"?>
-<p:sld xmlns:a="http://schemas.openxmlformats.org/drawingml/2006/main" xmlns:p="http://schemas.openxmlformats.org/presentationml/2006/main" xmlns:r="http://schemas.openxmlformats.org/officeDocument/2006/relationships">
+<p:sld xmlns:a="http://schemas.openxmlformats.org/drawingml/2006/main" xmlns:r="http://schemas.openxmlformats.org/officeDocument/2006/relationships" xmlns:p="http://schemas.openxmlformats.org/presentationml/2006/main">
   <p:cSld>
     <p:spTree>
       <p:nvGrpSpPr>
@@ -6870,7 +6879,14 @@
         <p:cNvGrpSpPr/>
         <p:nvPr/>
       </p:nvGrpSpPr>
-      <p:grpSpPr/>
+      <p:grpSpPr>
+        <a:xfrm>
+          <a:off x="0" y="0"/>
+          <a:ext cx="0" cy="0"/>
+          <a:chOff x="0" y="0"/>
+          <a:chExt cx="0" cy="0"/>
+        </a:xfrm>
+      </p:grpSpPr>
       <p:sp>
         <p:nvSpPr>
           <p:cNvPr id="2" name="Content Placeholder 1"/>
@@ -6887,22 +6903,22 @@
           <a:lstStyle/>
           <a:p>
             <a:r>
-              <a:t>Master multi-line completion and working with partial code.</a:t>
-            </a:r>
-          </a:p>
-          <a:p>
-            <a:r>
-              <a:t>Complete functions, classes and async API calls.</a:t>
-            </a:r>
-          </a:p>
-          <a:p>
-            <a:r>
-              <a:t>Recognize loop, iteration and error-handling patterns.</a:t>
-            </a:r>
-          </a:p>
-          <a:p>
-            <a:r>
-              <a:t>Use context — names and imports — to steer suggestions.</a:t>
+              <a:t>Explain, debug, document and test with Copilot Chat.</a:t>
+            </a:r>
+          </a:p>
+          <a:p>
+            <a:r>
+              <a:t>Use slash commands: /explain, /fix, /doc, /tests.</a:t>
+            </a:r>
+          </a:p>
+          <a:p>
+            <a:r>
+              <a:t>Optimize and refactor complex, nested functions.</a:t>
+            </a:r>
+          </a:p>
+          <a:p>
+            <a:r>
+              <a:t>Analyze code for security and quality issues.</a:t>
             </a:r>
           </a:p>
         </p:txBody>
@@ -6914,7 +6930,7 @@
             <a:spLocks noGrp="1"/>
           </p:cNvSpPr>
           <p:nvPr>
-            <p:ph type="body" idx="32" sz="quarter"/>
+            <p:ph type="body" sz="quarter" idx="32"/>
           </p:nvPr>
         </p:nvSpPr>
         <p:spPr/>
@@ -6923,7 +6939,7 @@
           <a:lstStyle/>
           <a:p>
             <a:r>
-              <a:t>Exercise 03 · 30 min</a:t>
+              <a:t>Exercise 04 · 45 min</a:t>
             </a:r>
           </a:p>
         </p:txBody>
@@ -6944,7 +6960,7 @@
           <a:lstStyle/>
           <a:p>
             <a:r>
-              <a:t>Code Completion</a:t>
+              <a:t>Copilot Chat</a:t>
             </a:r>
           </a:p>
         </p:txBody>
@@ -6956,14 +6972,16 @@
             <a:spLocks noGrp="1"/>
           </p:cNvSpPr>
           <p:nvPr>
-            <p:ph type="body" idx="10" sz="quarter"/>
+            <p:ph type="body" sz="quarter" idx="10"/>
           </p:nvPr>
         </p:nvSpPr>
         <p:spPr/>
         <p:txBody>
           <a:bodyPr/>
           <a:lstStyle/>
-          <a:p/>
+          <a:p>
+            <a:endParaRPr/>
+          </a:p>
         </p:txBody>
       </p:sp>
     </p:spTree>
@@ -6975,7 +6993,7 @@
 </file>
 
 <file path=ppt/slides/slide12.xml><?xml version="1.0" encoding="utf-8"?>
-<p:sld xmlns:a="http://schemas.openxmlformats.org/drawingml/2006/main" xmlns:p="http://schemas.openxmlformats.org/presentationml/2006/main" xmlns:r="http://schemas.openxmlformats.org/officeDocument/2006/relationships">
+<p:sld xmlns:a="http://schemas.openxmlformats.org/drawingml/2006/main" xmlns:r="http://schemas.openxmlformats.org/officeDocument/2006/relationships" xmlns:p="http://schemas.openxmlformats.org/presentationml/2006/main">
   <p:cSld>
     <p:spTree>
       <p:nvGrpSpPr>
@@ -6983,7 +7001,14 @@
         <p:cNvGrpSpPr/>
         <p:nvPr/>
       </p:nvGrpSpPr>
-      <p:grpSpPr/>
+      <p:grpSpPr>
+        <a:xfrm>
+          <a:off x="0" y="0"/>
+          <a:ext cx="0" cy="0"/>
+          <a:chOff x="0" y="0"/>
+          <a:chExt cx="0" cy="0"/>
+        </a:xfrm>
+      </p:grpSpPr>
       <p:sp>
         <p:nvSpPr>
           <p:cNvPr id="2" name="Content Placeholder 1"/>
@@ -7000,22 +7025,22 @@
           <a:lstStyle/>
           <a:p>
             <a:r>
-              <a:t>Explain, debug, document and test with Copilot Chat.</a:t>
-            </a:r>
-          </a:p>
-          <a:p>
-            <a:r>
-              <a:t>Use slash commands: /explain, /fix, /doc, /tests.</a:t>
-            </a:r>
-          </a:p>
-          <a:p>
-            <a:r>
-              <a:t>Optimize and refactor complex, nested functions.</a:t>
-            </a:r>
-          </a:p>
-          <a:p>
-            <a:r>
-              <a:t>Analyze code for security and quality issues.</a:t>
+              <a:t>Build a complete Task Manager — REST API + web UI.</a:t>
+            </a:r>
+          </a:p>
+          <a:p>
+            <a:r>
+              <a:t>Express server backed by an in-memory task store.</a:t>
+            </a:r>
+          </a:p>
+          <a:p>
+            <a:r>
+              <a:t>Interactive frontend that updates without a refresh.</a:t>
+            </a:r>
+          </a:p>
+          <a:p>
+            <a:r>
+              <a:t>Verify end-to-end in the browser and with curl.</a:t>
             </a:r>
           </a:p>
         </p:txBody>
@@ -7027,7 +7052,7 @@
             <a:spLocks noGrp="1"/>
           </p:cNvSpPr>
           <p:nvPr>
-            <p:ph type="body" idx="32" sz="quarter"/>
+            <p:ph type="body" sz="quarter" idx="32"/>
           </p:nvPr>
         </p:nvSpPr>
         <p:spPr/>
@@ -7036,7 +7061,7 @@
           <a:lstStyle/>
           <a:p>
             <a:r>
-              <a:t>Exercise 04 · 45 min</a:t>
+              <a:t>Exercise 05 · 60 min</a:t>
             </a:r>
           </a:p>
         </p:txBody>
@@ -7057,7 +7082,7 @@
           <a:lstStyle/>
           <a:p>
             <a:r>
-              <a:t>Copilot Chat</a:t>
+              <a:t>Real-World Project</a:t>
             </a:r>
           </a:p>
         </p:txBody>
@@ -7069,14 +7094,16 @@
             <a:spLocks noGrp="1"/>
           </p:cNvSpPr>
           <p:nvPr>
-            <p:ph type="body" idx="10" sz="quarter"/>
+            <p:ph type="body" sz="quarter" idx="10"/>
           </p:nvPr>
         </p:nvSpPr>
         <p:spPr/>
         <p:txBody>
           <a:bodyPr/>
           <a:lstStyle/>
-          <a:p/>
+          <a:p>
+            <a:endParaRPr/>
+          </a:p>
         </p:txBody>
       </p:sp>
     </p:spTree>
@@ -7088,7 +7115,7 @@
 </file>
 
 <file path=ppt/slides/slide13.xml><?xml version="1.0" encoding="utf-8"?>
-<p:sld xmlns:a="http://schemas.openxmlformats.org/drawingml/2006/main" xmlns:p="http://schemas.openxmlformats.org/presentationml/2006/main" xmlns:r="http://schemas.openxmlformats.org/officeDocument/2006/relationships">
+<p:sld xmlns:a="http://schemas.openxmlformats.org/drawingml/2006/main" xmlns:r="http://schemas.openxmlformats.org/officeDocument/2006/relationships" xmlns:p="http://schemas.openxmlformats.org/presentationml/2006/main">
   <p:cSld>
     <p:spTree>
       <p:nvGrpSpPr>
@@ -7096,7 +7123,14 @@
         <p:cNvGrpSpPr/>
         <p:nvPr/>
       </p:nvGrpSpPr>
-      <p:grpSpPr/>
+      <p:grpSpPr>
+        <a:xfrm>
+          <a:off x="0" y="0"/>
+          <a:ext cx="0" cy="0"/>
+          <a:chOff x="0" y="0"/>
+          <a:chExt cx="0" cy="0"/>
+        </a:xfrm>
+      </p:grpSpPr>
       <p:sp>
         <p:nvSpPr>
           <p:cNvPr id="2" name="Content Placeholder 1"/>
@@ -7113,22 +7147,22 @@
           <a:lstStyle/>
           <a:p>
             <a:r>
-              <a:t>Build a complete Task Manager — REST API + web UI.</a:t>
-            </a:r>
-          </a:p>
-          <a:p>
-            <a:r>
-              <a:t>Express server backed by an in-memory task store.</a:t>
-            </a:r>
-          </a:p>
-          <a:p>
-            <a:r>
-              <a:t>Interactive frontend that updates without a refresh.</a:t>
-            </a:r>
-          </a:p>
-          <a:p>
-            <a:r>
-              <a:t>Verify end-to-end in the browser and with curl.</a:t>
+              <a:t>Orchestrate an end-to-end feature with a custom agent.</a:t>
+            </a:r>
+          </a:p>
+          <a:p>
+            <a:r>
+              <a:t>Add repo instructions and a reusable task-crud skill.</a:t>
+            </a:r>
+          </a:p>
+          <a:p>
+            <a:r>
+              <a:t>Drive and verify the UI with the Playwright MCP server.</a:t>
+            </a:r>
+          </a:p>
+          <a:p>
+            <a:r>
+              <a:t>Run the implement → verify → fix → re-verify loop.</a:t>
             </a:r>
           </a:p>
         </p:txBody>
@@ -7140,7 +7174,7 @@
             <a:spLocks noGrp="1"/>
           </p:cNvSpPr>
           <p:nvPr>
-            <p:ph type="body" idx="32" sz="quarter"/>
+            <p:ph type="body" sz="quarter" idx="32"/>
           </p:nvPr>
         </p:nvSpPr>
         <p:spPr/>
@@ -7149,7 +7183,7 @@
           <a:lstStyle/>
           <a:p>
             <a:r>
-              <a:t>Exercise 05 · 60 min</a:t>
+              <a:t>Exercise 06 · 90 min · Bonus</a:t>
             </a:r>
           </a:p>
         </p:txBody>
@@ -7170,7 +7204,7 @@
           <a:lstStyle/>
           <a:p>
             <a:r>
-              <a:t>Real-World Project</a:t>
+              <a:t>Agents, Skills &amp; MCP</a:t>
             </a:r>
           </a:p>
         </p:txBody>
@@ -7182,14 +7216,16 @@
             <a:spLocks noGrp="1"/>
           </p:cNvSpPr>
           <p:nvPr>
-            <p:ph type="body" idx="10" sz="quarter"/>
+            <p:ph type="body" sz="quarter" idx="10"/>
           </p:nvPr>
         </p:nvSpPr>
         <p:spPr/>
         <p:txBody>
           <a:bodyPr/>
           <a:lstStyle/>
-          <a:p/>
+          <a:p>
+            <a:endParaRPr/>
+          </a:p>
         </p:txBody>
       </p:sp>
     </p:spTree>
@@ -7201,7 +7237,7 @@
 </file>
 
 <file path=ppt/slides/slide14.xml><?xml version="1.0" encoding="utf-8"?>
-<p:sld xmlns:a="http://schemas.openxmlformats.org/drawingml/2006/main" xmlns:p="http://schemas.openxmlformats.org/presentationml/2006/main" xmlns:r="http://schemas.openxmlformats.org/officeDocument/2006/relationships">
+<p:sld xmlns:a="http://schemas.openxmlformats.org/drawingml/2006/main" xmlns:r="http://schemas.openxmlformats.org/officeDocument/2006/relationships" xmlns:p="http://schemas.openxmlformats.org/presentationml/2006/main">
   <p:cSld>
     <p:spTree>
       <p:nvGrpSpPr>
@@ -7209,103 +7245,20 @@
         <p:cNvGrpSpPr/>
         <p:nvPr/>
       </p:nvGrpSpPr>
-      <p:grpSpPr/>
-      <p:sp>
-        <p:nvSpPr>
-          <p:cNvPr id="2" name="Content Placeholder 1"/>
-          <p:cNvSpPr>
-            <a:spLocks noGrp="1"/>
-          </p:cNvSpPr>
-          <p:nvPr>
-            <p:ph idx="1"/>
-          </p:nvPr>
-        </p:nvSpPr>
-        <p:spPr/>
-        <p:txBody>
-          <a:bodyPr/>
-          <a:lstStyle/>
-          <a:p>
-            <a:r>
-              <a:t>Orchestrate an end-to-end feature with a custom agent.</a:t>
-            </a:r>
-          </a:p>
-          <a:p>
-            <a:r>
-              <a:t>Add repo instructions and a reusable task-crud skill.</a:t>
-            </a:r>
-          </a:p>
-          <a:p>
-            <a:r>
-              <a:t>Drive and verify the UI with the Playwright MCP server.</a:t>
-            </a:r>
-          </a:p>
-          <a:p>
-            <a:r>
-              <a:t>Run the implement → verify → fix → re-verify loop.</a:t>
-            </a:r>
-          </a:p>
-        </p:txBody>
-      </p:sp>
-      <p:sp>
-        <p:nvSpPr>
-          <p:cNvPr id="3" name="Text Placeholder 2"/>
-          <p:cNvSpPr>
-            <a:spLocks noGrp="1"/>
-          </p:cNvSpPr>
-          <p:nvPr>
-            <p:ph type="body" idx="32" sz="quarter"/>
-          </p:nvPr>
-        </p:nvSpPr>
-        <p:spPr/>
-        <p:txBody>
-          <a:bodyPr/>
-          <a:lstStyle/>
-          <a:p>
-            <a:r>
-              <a:t>Exercise 06 · 90 min · Bonus</a:t>
-            </a:r>
-          </a:p>
-        </p:txBody>
-      </p:sp>
-      <p:sp>
-        <p:nvSpPr>
-          <p:cNvPr id="4" name="Title 3"/>
-          <p:cNvSpPr>
-            <a:spLocks noGrp="1"/>
-          </p:cNvSpPr>
-          <p:nvPr>
-            <p:ph type="ctrTitle"/>
-          </p:nvPr>
-        </p:nvSpPr>
-        <p:spPr/>
-        <p:txBody>
-          <a:bodyPr/>
-          <a:lstStyle/>
-          <a:p>
-            <a:r>
-              <a:t>Agents, Skills &amp; MCP</a:t>
-            </a:r>
-          </a:p>
-        </p:txBody>
-      </p:sp>
-      <p:sp>
-        <p:nvSpPr>
-          <p:cNvPr id="5" name="Text Placeholder 4"/>
-          <p:cNvSpPr>
-            <a:spLocks noGrp="1"/>
-          </p:cNvSpPr>
-          <p:nvPr>
-            <p:ph type="body" idx="10" sz="quarter"/>
-          </p:nvPr>
-        </p:nvSpPr>
-        <p:spPr/>
-        <p:txBody>
-          <a:bodyPr/>
-          <a:lstStyle/>
-          <a:p/>
-        </p:txBody>
-      </p:sp>
+      <p:grpSpPr>
+        <a:xfrm>
+          <a:off x="0" y="0"/>
+          <a:ext cx="0" cy="0"/>
+          <a:chOff x="0" y="0"/>
+          <a:chExt cx="0" cy="0"/>
+        </a:xfrm>
+      </p:grpSpPr>
     </p:spTree>
+    <p:extLst>
+      <p:ext uri="{BB962C8B-B14F-4D97-AF65-F5344CB8AC3E}">
+        <p14:creationId xmlns:p14="http://schemas.microsoft.com/office/powerpoint/2010/main" val="2507593852"/>
+      </p:ext>
+    </p:extLst>
   </p:cSld>
   <p:clrMapOvr>
     <a:masterClrMapping/>
@@ -7346,7 +7299,8 @@
           <a:lstStyle/>
           <a:p>
             <a:r>
-              <a:t>Meet your AI pair programmer — and learn to build with it.</a:t>
+              <a:rPr dirty="0"/>
+              <a:t>Meet your AI pair programmer  and learn to build with it.</a:t>
             </a:r>
           </a:p>
         </p:txBody>
@@ -8494,12 +8448,120 @@
           <a:chExt cx="0" cy="0"/>
         </a:xfrm>
       </p:grpSpPr>
+      <p:sp>
+        <p:nvSpPr>
+          <p:cNvPr id="2" name="Content Placeholder 1"/>
+          <p:cNvSpPr>
+            <a:spLocks noGrp="1"/>
+          </p:cNvSpPr>
+          <p:nvPr>
+            <p:ph idx="1"/>
+          </p:nvPr>
+        </p:nvSpPr>
+        <p:spPr>
+          <a:xfrm>
+            <a:off x="517791" y="1923552"/>
+            <a:ext cx="11379581" cy="1718100"/>
+          </a:xfrm>
+        </p:spPr>
+        <p:txBody>
+          <a:bodyPr/>
+          <a:lstStyle/>
+          <a:p>
+            <a:r>
+              <a:rPr dirty="0"/>
+              <a:t>Get comfortable with Copilot's core code suggestions.</a:t>
+            </a:r>
+          </a:p>
+          <a:p>
+            <a:r>
+              <a:rPr dirty="0"/>
+              <a:t>Verify Copilot is active, then trigger a suggestion from a comment.</a:t>
+            </a:r>
+          </a:p>
+          <a:p>
+            <a:r>
+              <a:rPr dirty="0"/>
+              <a:t>Cycle alternatives with Alt+] / Alt+[ and accept with Tab.</a:t>
+            </a:r>
+          </a:p>
+          <a:p>
+            <a:r>
+              <a:rPr dirty="0"/>
+              <a:t>Let inline completion finish a function for you.</a:t>
+            </a:r>
+          </a:p>
+        </p:txBody>
+      </p:sp>
+      <p:sp>
+        <p:nvSpPr>
+          <p:cNvPr id="3" name="Text Placeholder 2"/>
+          <p:cNvSpPr>
+            <a:spLocks noGrp="1"/>
+          </p:cNvSpPr>
+          <p:nvPr>
+            <p:ph type="body" sz="quarter" idx="32"/>
+          </p:nvPr>
+        </p:nvSpPr>
+        <p:spPr/>
+        <p:txBody>
+          <a:bodyPr/>
+          <a:lstStyle/>
+          <a:p>
+            <a:r>
+              <a:rPr dirty="0"/>
+              <a:t>Exercise 01 · 20 min</a:t>
+            </a:r>
+          </a:p>
+        </p:txBody>
+      </p:sp>
+      <p:sp>
+        <p:nvSpPr>
+          <p:cNvPr id="4" name="Title 3"/>
+          <p:cNvSpPr>
+            <a:spLocks noGrp="1"/>
+          </p:cNvSpPr>
+          <p:nvPr>
+            <p:ph type="ctrTitle"/>
+          </p:nvPr>
+        </p:nvSpPr>
+        <p:spPr>
+          <a:xfrm>
+            <a:off x="517792" y="1009083"/>
+            <a:ext cx="11379581" cy="882013"/>
+          </a:xfrm>
+        </p:spPr>
+        <p:txBody>
+          <a:bodyPr/>
+          <a:lstStyle/>
+          <a:p>
+            <a:r>
+              <a:rPr dirty="0"/>
+              <a:t>Setup &amp; Basics</a:t>
+            </a:r>
+          </a:p>
+        </p:txBody>
+      </p:sp>
+      <p:sp>
+        <p:nvSpPr>
+          <p:cNvPr id="5" name="Text Placeholder 4"/>
+          <p:cNvSpPr>
+            <a:spLocks noGrp="1"/>
+          </p:cNvSpPr>
+          <p:nvPr>
+            <p:ph type="body" sz="quarter" idx="10"/>
+          </p:nvPr>
+        </p:nvSpPr>
+        <p:spPr/>
+        <p:txBody>
+          <a:bodyPr/>
+          <a:lstStyle/>
+          <a:p>
+            <a:endParaRPr/>
+          </a:p>
+        </p:txBody>
+      </p:sp>
     </p:spTree>
-    <p:extLst>
-      <p:ext uri="{BB962C8B-B14F-4D97-AF65-F5344CB8AC3E}">
-        <p14:creationId xmlns:p14="http://schemas.microsoft.com/office/powerpoint/2010/main" val="2507593852"/>
-      </p:ext>
-    </p:extLst>
   </p:cSld>
   <p:clrMapOvr>
     <a:masterClrMapping/>
@@ -8508,7 +8570,7 @@
 </file>
 
 <file path=ppt/slides/slide9.xml><?xml version="1.0" encoding="utf-8"?>
-<p:sld xmlns:a="http://schemas.openxmlformats.org/drawingml/2006/main" xmlns:p="http://schemas.openxmlformats.org/presentationml/2006/main" xmlns:r="http://schemas.openxmlformats.org/officeDocument/2006/relationships">
+<p:sld xmlns:a="http://schemas.openxmlformats.org/drawingml/2006/main" xmlns:r="http://schemas.openxmlformats.org/officeDocument/2006/relationships" xmlns:p="http://schemas.openxmlformats.org/presentationml/2006/main">
   <p:cSld>
     <p:spTree>
       <p:nvGrpSpPr>
@@ -8516,7 +8578,14 @@
         <p:cNvGrpSpPr/>
         <p:nvPr/>
       </p:nvGrpSpPr>
-      <p:grpSpPr/>
+      <p:grpSpPr>
+        <a:xfrm>
+          <a:off x="0" y="0"/>
+          <a:ext cx="0" cy="0"/>
+          <a:chOff x="0" y="0"/>
+          <a:chExt cx="0" cy="0"/>
+        </a:xfrm>
+      </p:grpSpPr>
       <p:sp>
         <p:nvSpPr>
           <p:cNvPr id="2" name="Content Placeholder 1"/>
@@ -8533,22 +8602,26 @@
           <a:lstStyle/>
           <a:p>
             <a:r>
-              <a:t>Get comfortable with Copilot's core code suggestions.</a:t>
-            </a:r>
-          </a:p>
-          <a:p>
-            <a:r>
-              <a:t>Verify Copilot is active, then trigger a suggestion from a comment.</a:t>
-            </a:r>
-          </a:p>
-          <a:p>
-            <a:r>
-              <a:t>Cycle alternatives with Alt+] / Alt+[ and accept with Tab.</a:t>
-            </a:r>
-          </a:p>
-          <a:p>
-            <a:r>
-              <a:t>Let inline completion finish a function for you.</a:t>
+              <a:rPr dirty="0"/>
+              <a:t>Write clear comments that generate high-quality code.</a:t>
+            </a:r>
+          </a:p>
+          <a:p>
+            <a:r>
+              <a:rPr dirty="0"/>
+              <a:t>Build data-structure, algorithm and business-logic functions.</a:t>
+            </a:r>
+          </a:p>
+          <a:p>
+            <a:r>
+              <a:rPr dirty="0"/>
+              <a:t>Generate test cases straight from your comments.</a:t>
+            </a:r>
+          </a:p>
+          <a:p>
+            <a:r>
+              <a:rPr dirty="0"/>
+              <a:t>Learn why specificity — inputs, outputs, edge cases — matters.</a:t>
             </a:r>
           </a:p>
         </p:txBody>
@@ -8560,7 +8633,7 @@
             <a:spLocks noGrp="1"/>
           </p:cNvSpPr>
           <p:nvPr>
-            <p:ph type="body" idx="32" sz="quarter"/>
+            <p:ph type="body" sz="quarter" idx="32"/>
           </p:nvPr>
         </p:nvSpPr>
         <p:spPr/>
@@ -8569,7 +8642,7 @@
           <a:lstStyle/>
           <a:p>
             <a:r>
-              <a:t>Exercise 01 · 20 min</a:t>
+              <a:t>Exercise 02 · 30 min</a:t>
             </a:r>
           </a:p>
         </p:txBody>
@@ -8590,7 +8663,8 @@
           <a:lstStyle/>
           <a:p>
             <a:r>
-              <a:t>Setup &amp; Basics</a:t>
+              <a:rPr dirty="0"/>
+              <a:t>Comment-to-Code</a:t>
             </a:r>
           </a:p>
         </p:txBody>
@@ -8602,14 +8676,16 @@
             <a:spLocks noGrp="1"/>
           </p:cNvSpPr>
           <p:nvPr>
-            <p:ph type="body" idx="10" sz="quarter"/>
+            <p:ph type="body" sz="quarter" idx="10"/>
           </p:nvPr>
         </p:nvSpPr>
         <p:spPr/>
         <p:txBody>
           <a:bodyPr/>
           <a:lstStyle/>
-          <a:p/>
+          <a:p>
+            <a:endParaRPr/>
+          </a:p>
         </p:txBody>
       </p:sp>
     </p:spTree>
@@ -9137,6 +9213,20 @@
 </file>
 
 <file path=customXml/item1.xml><?xml version="1.0" encoding="utf-8"?>
+<p:properties xmlns:p="http://schemas.microsoft.com/office/2006/metadata/properties" xmlns:xsi="http://www.w3.org/2001/XMLSchema-instance" xmlns:pc="http://schemas.microsoft.com/office/infopath/2007/PartnerControls">
+  <documentManagement>
+    <ProductName xmlns="39208136-c58e-4e30-a1ea-e9b896dfd74b">GitHub Copilot, GitHub Actions, GitHub Advanced Security, GitHub Enterprise Cloud, GHC, GHA, GHAS, GHEC</ProductName>
+    <_ip_UnifiedCompliancePolicyUIAction xmlns="http://schemas.microsoft.com/sharepoint/v3" xsi:nil="true"/>
+    <Audience xmlns="39208136-c58e-4e30-a1ea-e9b896dfd74b" xsi:nil="true"/>
+    <_ip_UnifiedCompliancePolicyProperties xmlns="http://schemas.microsoft.com/sharepoint/v3" xsi:nil="true"/>
+    <LastUpdatedDate xmlns="39208136-c58e-4e30-a1ea-e9b896dfd74b" xsi:nil="true"/>
+    <Topic xmlns="39208136-c58e-4e30-a1ea-e9b896dfd74b" xsi:nil="true"/>
+    <Status xmlns="39208136-c58e-4e30-a1ea-e9b896dfd74b" xsi:nil="true"/>
+  </documentManagement>
+</p:properties>
+</file>
+
+<file path=customXml/item2.xml><?xml version="1.0" encoding="utf-8"?>
 <ct:contentTypeSchema xmlns:ct="http://schemas.microsoft.com/office/2006/metadata/contentType" xmlns:ma="http://schemas.microsoft.com/office/2006/metadata/properties/metaAttributes" ct:_="" ma:_="" ma:contentTypeName="Document" ma:contentTypeID="0x010100575BED04A73EC04F8606832822A6508B" ma:contentTypeVersion="11" ma:contentTypeDescription="Create a new document." ma:contentTypeScope="" ma:versionID="3ede87957b835f638e51dd9dd4d1449d">
   <xsd:schema xmlns:xsd="http://www.w3.org/2001/XMLSchema" xmlns:xs="http://www.w3.org/2001/XMLSchema" xmlns:p="http://schemas.microsoft.com/office/2006/metadata/properties" xmlns:ns1="http://schemas.microsoft.com/sharepoint/v3" xmlns:ns2="39208136-c58e-4e30-a1ea-e9b896dfd74b" targetNamespace="http://schemas.microsoft.com/office/2006/metadata/properties" ma:root="true" ma:fieldsID="d7956be1e318c982bedba1a35c9f1493" ns1:_="" ns2:_="">
     <xsd:import namespace="http://schemas.microsoft.com/sharepoint/v3"/>
@@ -9362,20 +9452,6 @@
 </ct:contentTypeSchema>
 </file>
 
-<file path=customXml/item2.xml><?xml version="1.0" encoding="utf-8"?>
-<p:properties xmlns:p="http://schemas.microsoft.com/office/2006/metadata/properties" xmlns:xsi="http://www.w3.org/2001/XMLSchema-instance" xmlns:pc="http://schemas.microsoft.com/office/infopath/2007/PartnerControls">
-  <documentManagement>
-    <ProductName xmlns="39208136-c58e-4e30-a1ea-e9b896dfd74b">GitHub Copilot, GitHub Actions, GitHub Advanced Security, GitHub Enterprise Cloud, GHC, GHA, GHAS, GHEC</ProductName>
-    <_ip_UnifiedCompliancePolicyUIAction xmlns="http://schemas.microsoft.com/sharepoint/v3" xsi:nil="true"/>
-    <Audience xmlns="39208136-c58e-4e30-a1ea-e9b896dfd74b" xsi:nil="true"/>
-    <_ip_UnifiedCompliancePolicyProperties xmlns="http://schemas.microsoft.com/sharepoint/v3" xsi:nil="true"/>
-    <LastUpdatedDate xmlns="39208136-c58e-4e30-a1ea-e9b896dfd74b" xsi:nil="true"/>
-    <Topic xmlns="39208136-c58e-4e30-a1ea-e9b896dfd74b" xsi:nil="true"/>
-    <Status xmlns="39208136-c58e-4e30-a1ea-e9b896dfd74b" xsi:nil="true"/>
-  </documentManagement>
-</p:properties>
-</file>
-
 <file path=customXml/item3.xml><?xml version="1.0" encoding="utf-8"?>
 <?mso-contentType ?>
 <FormTemplates xmlns="http://schemas.microsoft.com/sharepoint/v3/contenttype/forms">
@@ -9386,6 +9462,23 @@
 </file>
 
 <file path=customXml/itemProps1.xml><?xml version="1.0" encoding="utf-8"?>
+<ds:datastoreItem xmlns:ds="http://schemas.openxmlformats.org/officeDocument/2006/customXml" ds:itemID="{5B539F14-A8E4-4272-8072-DAD8D69DF4E5}">
+  <ds:schemaRefs>
+    <ds:schemaRef ds:uri="http://purl.org/dc/elements/1.1/"/>
+    <ds:schemaRef ds:uri="http://purl.org/dc/dcmitype/"/>
+    <ds:schemaRef ds:uri="http://schemas.microsoft.com/office/2006/documentManagement/types"/>
+    <ds:schemaRef ds:uri="39208136-c58e-4e30-a1ea-e9b896dfd74b"/>
+    <ds:schemaRef ds:uri="http://schemas.openxmlformats.org/package/2006/metadata/core-properties"/>
+    <ds:schemaRef ds:uri="http://schemas.microsoft.com/office/2006/metadata/properties"/>
+    <ds:schemaRef ds:uri="http://schemas.microsoft.com/sharepoint/v3"/>
+    <ds:schemaRef ds:uri="http://purl.org/dc/terms/"/>
+    <ds:schemaRef ds:uri="http://schemas.microsoft.com/office/infopath/2007/PartnerControls"/>
+    <ds:schemaRef ds:uri="http://www.w3.org/XML/1998/namespace"/>
+  </ds:schemaRefs>
+</ds:datastoreItem>
+</file>
+
+<file path=customXml/itemProps2.xml><?xml version="1.0" encoding="utf-8"?>
 <ds:datastoreItem xmlns:ds="http://schemas.openxmlformats.org/officeDocument/2006/customXml" ds:itemID="{6D6951A7-F0FD-40B9-9CCF-618617AD55DB}">
   <ds:schemaRefs>
     <ds:schemaRef ds:uri="http://schemas.microsoft.com/office/2006/metadata/contentType"/>
@@ -9404,23 +9497,6 @@
 </ds:datastoreItem>
 </file>
 
-<file path=customXml/itemProps2.xml><?xml version="1.0" encoding="utf-8"?>
-<ds:datastoreItem xmlns:ds="http://schemas.openxmlformats.org/officeDocument/2006/customXml" ds:itemID="{5B539F14-A8E4-4272-8072-DAD8D69DF4E5}">
-  <ds:schemaRefs>
-    <ds:schemaRef ds:uri="http://purl.org/dc/elements/1.1/"/>
-    <ds:schemaRef ds:uri="http://purl.org/dc/dcmitype/"/>
-    <ds:schemaRef ds:uri="http://schemas.microsoft.com/office/2006/documentManagement/types"/>
-    <ds:schemaRef ds:uri="39208136-c58e-4e30-a1ea-e9b896dfd74b"/>
-    <ds:schemaRef ds:uri="http://schemas.openxmlformats.org/package/2006/metadata/core-properties"/>
-    <ds:schemaRef ds:uri="http://schemas.microsoft.com/office/2006/metadata/properties"/>
-    <ds:schemaRef ds:uri="http://schemas.microsoft.com/sharepoint/v3"/>
-    <ds:schemaRef ds:uri="http://purl.org/dc/terms/"/>
-    <ds:schemaRef ds:uri="http://schemas.microsoft.com/office/infopath/2007/PartnerControls"/>
-    <ds:schemaRef ds:uri="http://www.w3.org/XML/1998/namespace"/>
-  </ds:schemaRefs>
-</ds:datastoreItem>
-</file>
-
 <file path=customXml/itemProps3.xml><?xml version="1.0" encoding="utf-8"?>
 <ds:datastoreItem xmlns:ds="http://schemas.openxmlformats.org/officeDocument/2006/customXml" ds:itemID="{AB543426-3F68-4F40-8364-AB61CAE32945}">
   <ds:schemaRefs>
